--- a/docs/pptx/auc3/jx-auc3-linsubhr-sens-anemia2.pptx
+++ b/docs/pptx/auc3/jx-auc3-linsubhr-sens-anemia2.pptx
@@ -5339,7 +5339,7 @@
           <p:spPr>
             <a:xfrm>
               <a:off x="817517" y="1896563"/>
-              <a:ext cx="6169365" cy="82021"/>
+              <a:ext cx="6833128" cy="82021"/>
             </a:xfrm>
             <a:prstGeom prst="rect">
               <a:avLst/>
@@ -5371,7 +5371,7 @@
                   <a:latin typeface="Helvetica"/>
                   <a:cs typeface="Helvetica"/>
                 </a:rPr>
-                <a:t>subHR per 0.1 ratio decline: 1.10 (1.01-1.19), p = 0.028  |  per IQR decline (Δ = 0.28): 1.30 (1.03-1.64)  |  IQR: [0.70, 0.98]</a:t>
+                <a:t>subHR per 0.1 ratio decline: 1.10 (1.01-1.19), p_Bonf = 0.169 (n = 6)  |  per IQR decline (Δ = 0.28): 1.30 (1.03-1.64)  |  IQR: [0.70, 0.98]</a:t>
               </a:r>
             </a:p>
           </p:txBody>

--- a/docs/pptx/auc3/jx-auc3-linsubhr-sens-anemia2.pptx
+++ b/docs/pptx/auc3/jx-auc3-linsubhr-sens-anemia2.pptx
@@ -5062,8 +5062,8 @@
           </p:nvSpPr>
           <p:spPr>
             <a:xfrm>
-              <a:off x="2137719" y="5785772"/>
-              <a:ext cx="155356" cy="80101"/>
+              <a:off x="2134610" y="5785772"/>
+              <a:ext cx="161574" cy="80101"/>
             </a:xfrm>
             <a:prstGeom prst="rect">
               <a:avLst/>
@@ -5095,7 +5095,7 @@
                   <a:latin typeface="Helvetica"/>
                   <a:cs typeface="Helvetica"/>
                 </a:rPr>
-                <a:t>0.6</a:t>
+                <a:t>-40</a:t>
               </a:r>
             </a:p>
           </p:txBody>
@@ -5108,8 +5108,8 @@
           </p:nvSpPr>
           <p:spPr>
             <a:xfrm>
-              <a:off x="3878840" y="5785772"/>
-              <a:ext cx="155356" cy="80101"/>
+              <a:off x="3875731" y="5785772"/>
+              <a:ext cx="161574" cy="80101"/>
             </a:xfrm>
             <a:prstGeom prst="rect">
               <a:avLst/>
@@ -5141,7 +5141,7 @@
                   <a:latin typeface="Helvetica"/>
                   <a:cs typeface="Helvetica"/>
                 </a:rPr>
-                <a:t>0.8</a:t>
+                <a:t>-20</a:t>
               </a:r>
             </a:p>
           </p:txBody>
@@ -5154,8 +5154,8 @@
           </p:nvSpPr>
           <p:spPr>
             <a:xfrm>
-              <a:off x="5619961" y="5785772"/>
-              <a:ext cx="155356" cy="80101"/>
+              <a:off x="5666549" y="5785772"/>
+              <a:ext cx="62179" cy="80101"/>
             </a:xfrm>
             <a:prstGeom prst="rect">
               <a:avLst/>
@@ -5187,7 +5187,7 @@
                   <a:latin typeface="Helvetica"/>
                   <a:cs typeface="Helvetica"/>
                 </a:rPr>
-                <a:t>1.0</a:t>
+                <a:t>0</a:t>
               </a:r>
             </a:p>
           </p:txBody>
@@ -5200,8 +5200,8 @@
           </p:nvSpPr>
           <p:spPr>
             <a:xfrm>
-              <a:off x="7361081" y="5785772"/>
-              <a:ext cx="155356" cy="80101"/>
+              <a:off x="7376580" y="5785772"/>
+              <a:ext cx="124358" cy="80101"/>
             </a:xfrm>
             <a:prstGeom prst="rect">
               <a:avLst/>
@@ -5233,7 +5233,7 @@
                   <a:latin typeface="Helvetica"/>
                   <a:cs typeface="Helvetica"/>
                 </a:rPr>
-                <a:t>1.2</a:t>
+                <a:t>20</a:t>
               </a:r>
             </a:p>
           </p:txBody>
@@ -5246,8 +5246,8 @@
           </p:nvSpPr>
           <p:spPr>
             <a:xfrm>
-              <a:off x="2691419" y="5925448"/>
-              <a:ext cx="4051889" cy="100218"/>
+              <a:off x="1561815" y="5925448"/>
+              <a:ext cx="6311097" cy="100218"/>
             </a:xfrm>
             <a:prstGeom prst="rect">
               <a:avLst/>
@@ -5279,7 +5279,7 @@
                   <a:latin typeface="Helvetica"/>
                   <a:cs typeface="Helvetica"/>
                 </a:rPr>
-                <a:t>Sensitivity eGFR Ratio (CKD-EPI 2012 CysC / CKD-EPI 2021 Cr)</a:t>
+                <a:t>Sensitivity eGFR Difference (%): 100 × (CKD-EPI 2012 CysC − CKD-EPI 2021 Cr) / CKD-EPI 2021 Cr</a:t>
               </a:r>
             </a:p>
           </p:txBody>
@@ -5339,7 +5339,7 @@
           <p:spPr>
             <a:xfrm>
               <a:off x="817517" y="1896563"/>
-              <a:ext cx="6833128" cy="82021"/>
+              <a:ext cx="6959864" cy="82021"/>
             </a:xfrm>
             <a:prstGeom prst="rect">
               <a:avLst/>
@@ -5371,7 +5371,7 @@
                   <a:latin typeface="Helvetica"/>
                   <a:cs typeface="Helvetica"/>
                 </a:rPr>
-                <a:t>subHR per 0.1 ratio decline: 1.10 (1.01-1.19), p_Bonf = 0.169 (n = 6)  |  per IQR decline (Δ = 0.28): 1.30 (1.03-1.64)  |  IQR: [0.70, 0.98]</a:t>
+                <a:t>subHR per 10 % decline: 1.10 (1.01-1.19), p_Bonf = 0.169 (n = 6)  |  per IQR decline (Δ = 28.1 %): 1.30 (1.03-1.64)  |  IQR: [-30.1, -2.1] %</a:t>
               </a:r>
             </a:p>
           </p:txBody>

--- a/docs/pptx/auc3/jx-auc3-linsubhr-sens-anemia2.pptx
+++ b/docs/pptx/auc3/jx-auc3-linsubhr-sens-anemia2.pptx
@@ -2265,34 +2265,26 @@
         </p:sp>
         <p:sp>
           <p:nvSpPr>
-            <p:cNvPr id="4" name="pl4"/>
+            <p:cNvPr id="4" name="rc4"/>
             <p:cNvSpPr/>
             <p:nvPr/>
           </p:nvSpPr>
           <p:spPr>
             <a:xfrm>
-              <a:off x="817517" y="5142518"/>
-              <a:ext cx="7799693" cy="0"/>
+              <a:off x="457200" y="1600200"/>
+              <a:ext cx="8229600" cy="4525962"/>
             </a:xfrm>
-            <a:custGeom>
+            <a:prstGeom prst="rect">
               <a:avLst/>
-              <a:pathLst>
-                <a:path w="7799693" h="0">
-                  <a:moveTo>
-                    <a:pt x="0" y="0"/>
-                  </a:moveTo>
-                  <a:lnTo>
-                    <a:pt x="7799693" y="0"/>
-                  </a:lnTo>
-                  <a:lnTo>
-                    <a:pt x="7799693" y="0"/>
-                  </a:lnTo>
-                </a:path>
-              </a:pathLst>
-            </a:custGeom>
-            <a:ln w="6775" cap="flat">
+            </a:prstGeom>
+            <a:solidFill>
+              <a:srgbClr val="FFFFFF">
+                <a:alpha val="100000"/>
+              </a:srgbClr>
+            </a:solidFill>
+            <a:ln w="13550" cap="rnd">
               <a:solidFill>
-                <a:srgbClr val="EBEBEB">
+                <a:srgbClr val="FFFFFF">
                   <a:alpha val="100000"/>
                 </a:srgbClr>
               </a:solidFill>
@@ -2314,21 +2306,21 @@
           </p:nvSpPr>
           <p:spPr>
             <a:xfrm>
-              <a:off x="817517" y="4313054"/>
-              <a:ext cx="7799693" cy="0"/>
+              <a:off x="887106" y="3250627"/>
+              <a:ext cx="7660515" cy="0"/>
             </a:xfrm>
             <a:custGeom>
               <a:avLst/>
               <a:pathLst>
-                <a:path w="7799693" h="0">
+                <a:path w="7660515" h="0">
                   <a:moveTo>
                     <a:pt x="0" y="0"/>
                   </a:moveTo>
                   <a:lnTo>
-                    <a:pt x="7799693" y="0"/>
-                  </a:lnTo>
-                  <a:lnTo>
-                    <a:pt x="7799693" y="0"/>
+                    <a:pt x="7660515" y="0"/>
+                  </a:lnTo>
+                  <a:lnTo>
+                    <a:pt x="7660515" y="0"/>
                   </a:lnTo>
                 </a:path>
               </a:pathLst>
@@ -2357,21 +2349,21 @@
           </p:nvSpPr>
           <p:spPr>
             <a:xfrm>
-              <a:off x="817517" y="3483591"/>
-              <a:ext cx="7799693" cy="0"/>
+              <a:off x="887106" y="2951293"/>
+              <a:ext cx="7660515" cy="0"/>
             </a:xfrm>
             <a:custGeom>
               <a:avLst/>
               <a:pathLst>
-                <a:path w="7799693" h="0">
+                <a:path w="7660515" h="0">
                   <a:moveTo>
                     <a:pt x="0" y="0"/>
                   </a:moveTo>
                   <a:lnTo>
-                    <a:pt x="7799693" y="0"/>
-                  </a:lnTo>
-                  <a:lnTo>
-                    <a:pt x="7799693" y="0"/>
+                    <a:pt x="7660515" y="0"/>
+                  </a:lnTo>
+                  <a:lnTo>
+                    <a:pt x="7660515" y="0"/>
                   </a:lnTo>
                 </a:path>
               </a:pathLst>
@@ -2400,21 +2392,21 @@
           </p:nvSpPr>
           <p:spPr>
             <a:xfrm>
-              <a:off x="817517" y="2654127"/>
-              <a:ext cx="7799693" cy="0"/>
+              <a:off x="887106" y="2651959"/>
+              <a:ext cx="7660515" cy="0"/>
             </a:xfrm>
             <a:custGeom>
               <a:avLst/>
               <a:pathLst>
-                <a:path w="7799693" h="0">
+                <a:path w="7660515" h="0">
                   <a:moveTo>
                     <a:pt x="0" y="0"/>
                   </a:moveTo>
                   <a:lnTo>
-                    <a:pt x="7799693" y="0"/>
-                  </a:lnTo>
-                  <a:lnTo>
-                    <a:pt x="7799693" y="0"/>
+                    <a:pt x="7660515" y="0"/>
+                  </a:lnTo>
+                  <a:lnTo>
+                    <a:pt x="7660515" y="0"/>
                   </a:lnTo>
                 </a:path>
               </a:pathLst>
@@ -2443,21 +2435,21 @@
           </p:nvSpPr>
           <p:spPr>
             <a:xfrm>
-              <a:off x="1344837" y="2073503"/>
-              <a:ext cx="0" cy="3649639"/>
+              <a:off x="887106" y="2352625"/>
+              <a:ext cx="7660515" cy="0"/>
             </a:xfrm>
             <a:custGeom>
               <a:avLst/>
               <a:pathLst>
-                <a:path w="0" h="3649639">
+                <a:path w="7660515" h="0">
                   <a:moveTo>
-                    <a:pt x="0" y="3649639"/>
+                    <a:pt x="0" y="0"/>
                   </a:moveTo>
                   <a:lnTo>
-                    <a:pt x="0" y="0"/>
-                  </a:lnTo>
-                  <a:lnTo>
-                    <a:pt x="0" y="0"/>
+                    <a:pt x="7660515" y="0"/>
+                  </a:lnTo>
+                  <a:lnTo>
+                    <a:pt x="7660515" y="0"/>
                   </a:lnTo>
                 </a:path>
               </a:pathLst>
@@ -2486,15 +2478,15 @@
           </p:nvSpPr>
           <p:spPr>
             <a:xfrm>
-              <a:off x="3085958" y="2073503"/>
-              <a:ext cx="0" cy="3649639"/>
+              <a:off x="1405017" y="2143092"/>
+              <a:ext cx="0" cy="1317069"/>
             </a:xfrm>
             <a:custGeom>
               <a:avLst/>
               <a:pathLst>
-                <a:path w="0" h="3649639">
+                <a:path w="0" h="1317069">
                   <a:moveTo>
-                    <a:pt x="0" y="3649639"/>
+                    <a:pt x="0" y="1317069"/>
                   </a:moveTo>
                   <a:lnTo>
                     <a:pt x="0" y="0"/>
@@ -2529,15 +2521,15 @@
           </p:nvSpPr>
           <p:spPr>
             <a:xfrm>
-              <a:off x="4827079" y="2073503"/>
-              <a:ext cx="0" cy="3649639"/>
+              <a:off x="3115069" y="2143092"/>
+              <a:ext cx="0" cy="1317069"/>
             </a:xfrm>
             <a:custGeom>
               <a:avLst/>
               <a:pathLst>
-                <a:path w="0" h="3649639">
+                <a:path w="0" h="1317069">
                   <a:moveTo>
-                    <a:pt x="0" y="3649639"/>
+                    <a:pt x="0" y="1317069"/>
                   </a:moveTo>
                   <a:lnTo>
                     <a:pt x="0" y="0"/>
@@ -2572,15 +2564,15 @@
           </p:nvSpPr>
           <p:spPr>
             <a:xfrm>
-              <a:off x="6568199" y="2073503"/>
-              <a:ext cx="0" cy="3649639"/>
+              <a:off x="4825121" y="2143092"/>
+              <a:ext cx="0" cy="1317069"/>
             </a:xfrm>
             <a:custGeom>
               <a:avLst/>
               <a:pathLst>
-                <a:path w="0" h="3649639">
+                <a:path w="0" h="1317069">
                   <a:moveTo>
-                    <a:pt x="0" y="3649639"/>
+                    <a:pt x="0" y="1317069"/>
                   </a:moveTo>
                   <a:lnTo>
                     <a:pt x="0" y="0"/>
@@ -2615,15 +2607,15 @@
           </p:nvSpPr>
           <p:spPr>
             <a:xfrm>
-              <a:off x="8309320" y="2073503"/>
-              <a:ext cx="0" cy="3649639"/>
+              <a:off x="6535173" y="2143092"/>
+              <a:ext cx="0" cy="1317069"/>
             </a:xfrm>
             <a:custGeom>
               <a:avLst/>
               <a:pathLst>
-                <a:path w="0" h="3649639">
+                <a:path w="0" h="1317069">
                   <a:moveTo>
-                    <a:pt x="0" y="3649639"/>
+                    <a:pt x="0" y="1317069"/>
                   </a:moveTo>
                   <a:lnTo>
                     <a:pt x="0" y="0"/>
@@ -2658,26 +2650,26 @@
           </p:nvSpPr>
           <p:spPr>
             <a:xfrm>
-              <a:off x="817517" y="5557249"/>
-              <a:ext cx="7799693" cy="0"/>
+              <a:off x="8245225" y="2143092"/>
+              <a:ext cx="0" cy="1317069"/>
             </a:xfrm>
             <a:custGeom>
               <a:avLst/>
               <a:pathLst>
-                <a:path w="7799693" h="0">
+                <a:path w="0" h="1317069">
                   <a:moveTo>
+                    <a:pt x="0" y="1317069"/>
+                  </a:moveTo>
+                  <a:lnTo>
                     <a:pt x="0" y="0"/>
-                  </a:moveTo>
-                  <a:lnTo>
-                    <a:pt x="7799693" y="0"/>
-                  </a:lnTo>
-                  <a:lnTo>
-                    <a:pt x="7799693" y="0"/>
+                  </a:lnTo>
+                  <a:lnTo>
+                    <a:pt x="0" y="0"/>
                   </a:lnTo>
                 </a:path>
               </a:pathLst>
             </a:custGeom>
-            <a:ln w="13550" cap="flat">
+            <a:ln w="6775" cap="flat">
               <a:solidFill>
                 <a:srgbClr val="EBEBEB">
                   <a:alpha val="100000"/>
@@ -2701,21 +2693,21 @@
           </p:nvSpPr>
           <p:spPr>
             <a:xfrm>
-              <a:off x="817517" y="4727786"/>
-              <a:ext cx="7799693" cy="0"/>
+              <a:off x="887106" y="3400294"/>
+              <a:ext cx="7660515" cy="0"/>
             </a:xfrm>
             <a:custGeom>
               <a:avLst/>
               <a:pathLst>
-                <a:path w="7799693" h="0">
+                <a:path w="7660515" h="0">
                   <a:moveTo>
                     <a:pt x="0" y="0"/>
                   </a:moveTo>
                   <a:lnTo>
-                    <a:pt x="7799693" y="0"/>
-                  </a:lnTo>
-                  <a:lnTo>
-                    <a:pt x="7799693" y="0"/>
+                    <a:pt x="7660515" y="0"/>
+                  </a:lnTo>
+                  <a:lnTo>
+                    <a:pt x="7660515" y="0"/>
                   </a:lnTo>
                 </a:path>
               </a:pathLst>
@@ -2744,21 +2736,21 @@
           </p:nvSpPr>
           <p:spPr>
             <a:xfrm>
-              <a:off x="817517" y="3898322"/>
-              <a:ext cx="7799693" cy="0"/>
+              <a:off x="887106" y="3100960"/>
+              <a:ext cx="7660515" cy="0"/>
             </a:xfrm>
             <a:custGeom>
               <a:avLst/>
               <a:pathLst>
-                <a:path w="7799693" h="0">
+                <a:path w="7660515" h="0">
                   <a:moveTo>
                     <a:pt x="0" y="0"/>
                   </a:moveTo>
                   <a:lnTo>
-                    <a:pt x="7799693" y="0"/>
-                  </a:lnTo>
-                  <a:lnTo>
-                    <a:pt x="7799693" y="0"/>
+                    <a:pt x="7660515" y="0"/>
+                  </a:lnTo>
+                  <a:lnTo>
+                    <a:pt x="7660515" y="0"/>
                   </a:lnTo>
                 </a:path>
               </a:pathLst>
@@ -2787,21 +2779,21 @@
           </p:nvSpPr>
           <p:spPr>
             <a:xfrm>
-              <a:off x="817517" y="3068859"/>
-              <a:ext cx="7799693" cy="0"/>
+              <a:off x="887106" y="2801626"/>
+              <a:ext cx="7660515" cy="0"/>
             </a:xfrm>
             <a:custGeom>
               <a:avLst/>
               <a:pathLst>
-                <a:path w="7799693" h="0">
+                <a:path w="7660515" h="0">
                   <a:moveTo>
                     <a:pt x="0" y="0"/>
                   </a:moveTo>
                   <a:lnTo>
-                    <a:pt x="7799693" y="0"/>
-                  </a:lnTo>
-                  <a:lnTo>
-                    <a:pt x="7799693" y="0"/>
+                    <a:pt x="7660515" y="0"/>
+                  </a:lnTo>
+                  <a:lnTo>
+                    <a:pt x="7660515" y="0"/>
                   </a:lnTo>
                 </a:path>
               </a:pathLst>
@@ -2830,21 +2822,21 @@
           </p:nvSpPr>
           <p:spPr>
             <a:xfrm>
-              <a:off x="817517" y="2239395"/>
-              <a:ext cx="7799693" cy="0"/>
+              <a:off x="887106" y="2502292"/>
+              <a:ext cx="7660515" cy="0"/>
             </a:xfrm>
             <a:custGeom>
               <a:avLst/>
               <a:pathLst>
-                <a:path w="7799693" h="0">
+                <a:path w="7660515" h="0">
                   <a:moveTo>
                     <a:pt x="0" y="0"/>
                   </a:moveTo>
                   <a:lnTo>
-                    <a:pt x="7799693" y="0"/>
-                  </a:lnTo>
-                  <a:lnTo>
-                    <a:pt x="7799693" y="0"/>
+                    <a:pt x="7660515" y="0"/>
+                  </a:lnTo>
+                  <a:lnTo>
+                    <a:pt x="7660515" y="0"/>
                   </a:lnTo>
                 </a:path>
               </a:pathLst>
@@ -2873,21 +2865,21 @@
           </p:nvSpPr>
           <p:spPr>
             <a:xfrm>
-              <a:off x="2215398" y="2073503"/>
-              <a:ext cx="0" cy="3649639"/>
+              <a:off x="887106" y="2202958"/>
+              <a:ext cx="7660515" cy="0"/>
             </a:xfrm>
             <a:custGeom>
               <a:avLst/>
               <a:pathLst>
-                <a:path w="0" h="3649639">
+                <a:path w="7660515" h="0">
                   <a:moveTo>
-                    <a:pt x="0" y="3649639"/>
+                    <a:pt x="0" y="0"/>
                   </a:moveTo>
                   <a:lnTo>
-                    <a:pt x="0" y="0"/>
-                  </a:lnTo>
-                  <a:lnTo>
-                    <a:pt x="0" y="0"/>
+                    <a:pt x="7660515" y="0"/>
+                  </a:lnTo>
+                  <a:lnTo>
+                    <a:pt x="7660515" y="0"/>
                   </a:lnTo>
                 </a:path>
               </a:pathLst>
@@ -2916,15 +2908,15 @@
           </p:nvSpPr>
           <p:spPr>
             <a:xfrm>
-              <a:off x="3956518" y="2073503"/>
-              <a:ext cx="0" cy="3649639"/>
+              <a:off x="2260043" y="2143092"/>
+              <a:ext cx="0" cy="1317069"/>
             </a:xfrm>
             <a:custGeom>
               <a:avLst/>
               <a:pathLst>
-                <a:path w="0" h="3649639">
+                <a:path w="0" h="1317069">
                   <a:moveTo>
-                    <a:pt x="0" y="3649639"/>
+                    <a:pt x="0" y="1317069"/>
                   </a:moveTo>
                   <a:lnTo>
                     <a:pt x="0" y="0"/>
@@ -2959,15 +2951,15 @@
           </p:nvSpPr>
           <p:spPr>
             <a:xfrm>
-              <a:off x="5697639" y="2073503"/>
-              <a:ext cx="0" cy="3649639"/>
+              <a:off x="3970095" y="2143092"/>
+              <a:ext cx="0" cy="1317069"/>
             </a:xfrm>
             <a:custGeom>
               <a:avLst/>
               <a:pathLst>
-                <a:path w="0" h="3649639">
+                <a:path w="0" h="1317069">
                   <a:moveTo>
-                    <a:pt x="0" y="3649639"/>
+                    <a:pt x="0" y="1317069"/>
                   </a:moveTo>
                   <a:lnTo>
                     <a:pt x="0" y="0"/>
@@ -3002,15 +2994,15 @@
           </p:nvSpPr>
           <p:spPr>
             <a:xfrm>
-              <a:off x="7438760" y="2073503"/>
-              <a:ext cx="0" cy="3649639"/>
+              <a:off x="5680147" y="2143092"/>
+              <a:ext cx="0" cy="1317069"/>
             </a:xfrm>
             <a:custGeom>
               <a:avLst/>
               <a:pathLst>
-                <a:path w="0" h="3649639">
+                <a:path w="0" h="1317069">
                   <a:moveTo>
-                    <a:pt x="0" y="3649639"/>
+                    <a:pt x="0" y="1317069"/>
                   </a:moveTo>
                   <a:lnTo>
                     <a:pt x="0" y="0"/>
@@ -3039,618 +3031,661 @@
         </p:sp>
         <p:sp>
           <p:nvSpPr>
-            <p:cNvPr id="22" name="pg22"/>
+            <p:cNvPr id="22" name="pl22"/>
             <p:cNvSpPr/>
             <p:nvPr/>
           </p:nvSpPr>
           <p:spPr>
             <a:xfrm>
-              <a:off x="1172049" y="3991802"/>
-              <a:ext cx="7090630" cy="1195643"/>
+              <a:off x="7390199" y="2143092"/>
+              <a:ext cx="0" cy="1317069"/>
             </a:xfrm>
             <a:custGeom>
               <a:avLst/>
               <a:pathLst>
-                <a:path w="7090630" h="1195643">
+                <a:path w="0" h="1317069">
+                  <a:moveTo>
+                    <a:pt x="0" y="1317069"/>
+                  </a:moveTo>
+                  <a:lnTo>
+                    <a:pt x="0" y="0"/>
+                  </a:lnTo>
+                  <a:lnTo>
+                    <a:pt x="0" y="0"/>
+                  </a:lnTo>
+                </a:path>
+              </a:pathLst>
+            </a:custGeom>
+            <a:ln w="13550" cap="flat">
+              <a:solidFill>
+                <a:srgbClr val="EBEBEB">
+                  <a:alpha val="100000"/>
+                </a:srgbClr>
+              </a:solidFill>
+              <a:prstDash val="solid"/>
+              <a:round/>
+            </a:ln>
+          </p:spPr>
+          <p:txBody>
+            <a:bodyPr/>
+            <a:lstStyle/>
+            <a:p/>
+          </p:txBody>
+        </p:sp>
+        <p:sp>
+          <p:nvSpPr>
+            <p:cNvPr id="23" name="pg23"/>
+            <p:cNvSpPr/>
+            <p:nvPr/>
+          </p:nvSpPr>
+          <p:spPr>
+            <a:xfrm>
+              <a:off x="1235312" y="2835361"/>
+              <a:ext cx="6964104" cy="431479"/>
+            </a:xfrm>
+            <a:custGeom>
+              <a:avLst/>
+              <a:pathLst>
+                <a:path w="6964104" h="431479">
                   <a:moveTo>
                     <a:pt x="0" y="0"/>
                   </a:moveTo>
                   <a:lnTo>
-                    <a:pt x="71622" y="22651"/>
-                  </a:lnTo>
-                  <a:lnTo>
-                    <a:pt x="143245" y="44975"/>
-                  </a:lnTo>
-                  <a:lnTo>
-                    <a:pt x="214867" y="66975"/>
-                  </a:lnTo>
-                  <a:lnTo>
-                    <a:pt x="286490" y="88657"/>
-                  </a:lnTo>
-                  <a:lnTo>
-                    <a:pt x="358112" y="110026"/>
-                  </a:lnTo>
-                  <a:lnTo>
-                    <a:pt x="429735" y="131085"/>
-                  </a:lnTo>
-                  <a:lnTo>
-                    <a:pt x="501357" y="151840"/>
-                  </a:lnTo>
-                  <a:lnTo>
-                    <a:pt x="572980" y="172294"/>
-                  </a:lnTo>
-                  <a:lnTo>
-                    <a:pt x="644602" y="192453"/>
-                  </a:lnTo>
-                  <a:lnTo>
-                    <a:pt x="716225" y="212319"/>
-                  </a:lnTo>
-                  <a:lnTo>
-                    <a:pt x="787847" y="231898"/>
-                  </a:lnTo>
-                  <a:lnTo>
-                    <a:pt x="859470" y="251194"/>
-                  </a:lnTo>
-                  <a:lnTo>
-                    <a:pt x="931092" y="270211"/>
-                  </a:lnTo>
-                  <a:lnTo>
-                    <a:pt x="1002715" y="288953"/>
-                  </a:lnTo>
-                  <a:lnTo>
-                    <a:pt x="1074337" y="307423"/>
-                  </a:lnTo>
-                  <a:lnTo>
-                    <a:pt x="1145960" y="325626"/>
-                  </a:lnTo>
-                  <a:lnTo>
-                    <a:pt x="1217582" y="343566"/>
-                  </a:lnTo>
-                  <a:lnTo>
-                    <a:pt x="1289205" y="361246"/>
-                  </a:lnTo>
-                  <a:lnTo>
-                    <a:pt x="1360827" y="378670"/>
-                  </a:lnTo>
-                  <a:lnTo>
-                    <a:pt x="1432450" y="395842"/>
-                  </a:lnTo>
-                  <a:lnTo>
-                    <a:pt x="1504073" y="412766"/>
-                  </a:lnTo>
-                  <a:lnTo>
-                    <a:pt x="1575695" y="429445"/>
-                  </a:lnTo>
-                  <a:lnTo>
-                    <a:pt x="1647318" y="445882"/>
-                  </a:lnTo>
-                  <a:lnTo>
-                    <a:pt x="1718940" y="462082"/>
-                  </a:lnTo>
-                  <a:lnTo>
-                    <a:pt x="1790563" y="478047"/>
-                  </a:lnTo>
-                  <a:lnTo>
-                    <a:pt x="1862185" y="493781"/>
-                  </a:lnTo>
-                  <a:lnTo>
-                    <a:pt x="1933808" y="509288"/>
-                  </a:lnTo>
-                  <a:lnTo>
-                    <a:pt x="2005430" y="524570"/>
-                  </a:lnTo>
-                  <a:lnTo>
-                    <a:pt x="2077053" y="539631"/>
-                  </a:lnTo>
-                  <a:lnTo>
-                    <a:pt x="2148675" y="554474"/>
-                  </a:lnTo>
-                  <a:lnTo>
-                    <a:pt x="2220298" y="569103"/>
-                  </a:lnTo>
-                  <a:lnTo>
-                    <a:pt x="2291920" y="583519"/>
-                  </a:lnTo>
-                  <a:lnTo>
-                    <a:pt x="2363543" y="597727"/>
-                  </a:lnTo>
-                  <a:lnTo>
-                    <a:pt x="2435165" y="611730"/>
-                  </a:lnTo>
-                  <a:lnTo>
-                    <a:pt x="2506788" y="625530"/>
-                  </a:lnTo>
-                  <a:lnTo>
-                    <a:pt x="2578410" y="639130"/>
-                  </a:lnTo>
-                  <a:lnTo>
-                    <a:pt x="2650033" y="652533"/>
-                  </a:lnTo>
-                  <a:lnTo>
-                    <a:pt x="2721655" y="665743"/>
-                  </a:lnTo>
-                  <a:lnTo>
-                    <a:pt x="2793278" y="678761"/>
-                  </a:lnTo>
-                  <a:lnTo>
-                    <a:pt x="2864901" y="691591"/>
-                  </a:lnTo>
-                  <a:lnTo>
-                    <a:pt x="2936523" y="704236"/>
-                  </a:lnTo>
-                  <a:lnTo>
-                    <a:pt x="3008146" y="716697"/>
-                  </a:lnTo>
-                  <a:lnTo>
-                    <a:pt x="3079768" y="728978"/>
-                  </a:lnTo>
-                  <a:lnTo>
-                    <a:pt x="3151391" y="736272"/>
-                  </a:lnTo>
-                  <a:lnTo>
-                    <a:pt x="3223013" y="736955"/>
-                  </a:lnTo>
-                  <a:lnTo>
-                    <a:pt x="3294636" y="737637"/>
-                  </a:lnTo>
-                  <a:lnTo>
-                    <a:pt x="3366258" y="738319"/>
-                  </a:lnTo>
-                  <a:lnTo>
-                    <a:pt x="3437881" y="739000"/>
-                  </a:lnTo>
-                  <a:lnTo>
-                    <a:pt x="3509503" y="739681"/>
-                  </a:lnTo>
-                  <a:lnTo>
-                    <a:pt x="3581126" y="740361"/>
-                  </a:lnTo>
-                  <a:lnTo>
-                    <a:pt x="3652748" y="741040"/>
-                  </a:lnTo>
-                  <a:lnTo>
-                    <a:pt x="3724371" y="741719"/>
-                  </a:lnTo>
-                  <a:lnTo>
-                    <a:pt x="3795993" y="742398"/>
-                  </a:lnTo>
-                  <a:lnTo>
-                    <a:pt x="3867616" y="743076"/>
-                  </a:lnTo>
-                  <a:lnTo>
-                    <a:pt x="3939238" y="743753"/>
-                  </a:lnTo>
-                  <a:lnTo>
-                    <a:pt x="4010861" y="744430"/>
-                  </a:lnTo>
-                  <a:lnTo>
-                    <a:pt x="4082483" y="745106"/>
-                  </a:lnTo>
-                  <a:lnTo>
-                    <a:pt x="4154106" y="745781"/>
-                  </a:lnTo>
-                  <a:lnTo>
-                    <a:pt x="4225729" y="746456"/>
-                  </a:lnTo>
-                  <a:lnTo>
-                    <a:pt x="4297351" y="747131"/>
-                  </a:lnTo>
-                  <a:lnTo>
-                    <a:pt x="4368974" y="747805"/>
-                  </a:lnTo>
-                  <a:lnTo>
-                    <a:pt x="4440596" y="748478"/>
-                  </a:lnTo>
-                  <a:lnTo>
-                    <a:pt x="4512219" y="749151"/>
-                  </a:lnTo>
-                  <a:lnTo>
-                    <a:pt x="4583841" y="749823"/>
-                  </a:lnTo>
-                  <a:lnTo>
-                    <a:pt x="4655464" y="750495"/>
-                  </a:lnTo>
-                  <a:lnTo>
-                    <a:pt x="4727086" y="751166"/>
-                  </a:lnTo>
-                  <a:lnTo>
-                    <a:pt x="4798709" y="751837"/>
-                  </a:lnTo>
-                  <a:lnTo>
-                    <a:pt x="4870331" y="752507"/>
-                  </a:lnTo>
-                  <a:lnTo>
-                    <a:pt x="4941954" y="753176"/>
-                  </a:lnTo>
-                  <a:lnTo>
-                    <a:pt x="5013576" y="753845"/>
-                  </a:lnTo>
-                  <a:lnTo>
-                    <a:pt x="5085199" y="754514"/>
-                  </a:lnTo>
-                  <a:lnTo>
-                    <a:pt x="5156821" y="755181"/>
-                  </a:lnTo>
-                  <a:lnTo>
-                    <a:pt x="5228444" y="755849"/>
-                  </a:lnTo>
-                  <a:lnTo>
-                    <a:pt x="5300066" y="756515"/>
-                  </a:lnTo>
-                  <a:lnTo>
-                    <a:pt x="5371689" y="757182"/>
-                  </a:lnTo>
-                  <a:lnTo>
-                    <a:pt x="5443311" y="757847"/>
-                  </a:lnTo>
-                  <a:lnTo>
-                    <a:pt x="5514934" y="758512"/>
-                  </a:lnTo>
-                  <a:lnTo>
-                    <a:pt x="5586557" y="759177"/>
-                  </a:lnTo>
-                  <a:lnTo>
-                    <a:pt x="5658179" y="759841"/>
-                  </a:lnTo>
-                  <a:lnTo>
-                    <a:pt x="5729802" y="760504"/>
-                  </a:lnTo>
-                  <a:lnTo>
-                    <a:pt x="5801424" y="761167"/>
-                  </a:lnTo>
-                  <a:lnTo>
-                    <a:pt x="5873047" y="761830"/>
-                  </a:lnTo>
-                  <a:lnTo>
-                    <a:pt x="5944669" y="762491"/>
-                  </a:lnTo>
-                  <a:lnTo>
-                    <a:pt x="6016292" y="763153"/>
-                  </a:lnTo>
-                  <a:lnTo>
-                    <a:pt x="6087914" y="763813"/>
-                  </a:lnTo>
-                  <a:lnTo>
-                    <a:pt x="6159537" y="764474"/>
-                  </a:lnTo>
-                  <a:lnTo>
-                    <a:pt x="6231159" y="765133"/>
-                  </a:lnTo>
-                  <a:lnTo>
-                    <a:pt x="6302782" y="765792"/>
-                  </a:lnTo>
-                  <a:lnTo>
-                    <a:pt x="6374404" y="766451"/>
-                  </a:lnTo>
-                  <a:lnTo>
-                    <a:pt x="6446027" y="767109"/>
-                  </a:lnTo>
-                  <a:lnTo>
-                    <a:pt x="6517649" y="767766"/>
-                  </a:lnTo>
-                  <a:lnTo>
-                    <a:pt x="6589272" y="768423"/>
-                  </a:lnTo>
-                  <a:lnTo>
-                    <a:pt x="6660894" y="769080"/>
-                  </a:lnTo>
-                  <a:lnTo>
-                    <a:pt x="6732517" y="769735"/>
-                  </a:lnTo>
-                  <a:lnTo>
-                    <a:pt x="6804139" y="770391"/>
-                  </a:lnTo>
-                  <a:lnTo>
-                    <a:pt x="6875762" y="771046"/>
-                  </a:lnTo>
-                  <a:lnTo>
-                    <a:pt x="6947385" y="771700"/>
-                  </a:lnTo>
-                  <a:lnTo>
-                    <a:pt x="7019007" y="772353"/>
-                  </a:lnTo>
-                  <a:lnTo>
-                    <a:pt x="7090630" y="773007"/>
-                  </a:lnTo>
-                  <a:lnTo>
-                    <a:pt x="7090630" y="1195643"/>
-                  </a:lnTo>
-                  <a:lnTo>
-                    <a:pt x="7019007" y="1190214"/>
-                  </a:lnTo>
-                  <a:lnTo>
-                    <a:pt x="6947385" y="1184704"/>
-                  </a:lnTo>
-                  <a:lnTo>
-                    <a:pt x="6875762" y="1179114"/>
-                  </a:lnTo>
-                  <a:lnTo>
-                    <a:pt x="6804139" y="1173442"/>
-                  </a:lnTo>
-                  <a:lnTo>
-                    <a:pt x="6732517" y="1167687"/>
-                  </a:lnTo>
-                  <a:lnTo>
-                    <a:pt x="6660894" y="1161847"/>
-                  </a:lnTo>
-                  <a:lnTo>
-                    <a:pt x="6589272" y="1155921"/>
-                  </a:lnTo>
-                  <a:lnTo>
-                    <a:pt x="6517649" y="1149908"/>
-                  </a:lnTo>
-                  <a:lnTo>
-                    <a:pt x="6446027" y="1143807"/>
-                  </a:lnTo>
-                  <a:lnTo>
-                    <a:pt x="6374404" y="1137617"/>
-                  </a:lnTo>
-                  <a:lnTo>
-                    <a:pt x="6302782" y="1131336"/>
-                  </a:lnTo>
-                  <a:lnTo>
-                    <a:pt x="6231159" y="1124962"/>
-                  </a:lnTo>
-                  <a:lnTo>
-                    <a:pt x="6159537" y="1118495"/>
-                  </a:lnTo>
-                  <a:lnTo>
-                    <a:pt x="6087914" y="1111933"/>
-                  </a:lnTo>
-                  <a:lnTo>
-                    <a:pt x="6016292" y="1105274"/>
-                  </a:lnTo>
-                  <a:lnTo>
-                    <a:pt x="5944669" y="1098518"/>
-                  </a:lnTo>
-                  <a:lnTo>
-                    <a:pt x="5873047" y="1091662"/>
-                  </a:lnTo>
-                  <a:lnTo>
-                    <a:pt x="5801424" y="1084706"/>
-                  </a:lnTo>
-                  <a:lnTo>
-                    <a:pt x="5729802" y="1077648"/>
-                  </a:lnTo>
-                  <a:lnTo>
-                    <a:pt x="5658179" y="1070486"/>
-                  </a:lnTo>
-                  <a:lnTo>
-                    <a:pt x="5586557" y="1063219"/>
-                  </a:lnTo>
-                  <a:lnTo>
-                    <a:pt x="5514934" y="1055845"/>
-                  </a:lnTo>
-                  <a:lnTo>
-                    <a:pt x="5443311" y="1048363"/>
-                  </a:lnTo>
-                  <a:lnTo>
-                    <a:pt x="5371689" y="1040771"/>
-                  </a:lnTo>
-                  <a:lnTo>
-                    <a:pt x="5300066" y="1033068"/>
-                  </a:lnTo>
-                  <a:lnTo>
-                    <a:pt x="5228444" y="1025252"/>
-                  </a:lnTo>
-                  <a:lnTo>
-                    <a:pt x="5156821" y="1017321"/>
-                  </a:lnTo>
-                  <a:lnTo>
-                    <a:pt x="5085199" y="1009273"/>
-                  </a:lnTo>
-                  <a:lnTo>
-                    <a:pt x="5013576" y="1001107"/>
-                  </a:lnTo>
-                  <a:lnTo>
-                    <a:pt x="4941954" y="992822"/>
-                  </a:lnTo>
-                  <a:lnTo>
-                    <a:pt x="4870331" y="984414"/>
-                  </a:lnTo>
-                  <a:lnTo>
-                    <a:pt x="4798709" y="975884"/>
-                  </a:lnTo>
-                  <a:lnTo>
-                    <a:pt x="4727086" y="967228"/>
-                  </a:lnTo>
-                  <a:lnTo>
-                    <a:pt x="4655464" y="958444"/>
-                  </a:lnTo>
-                  <a:lnTo>
-                    <a:pt x="4583841" y="949532"/>
-                  </a:lnTo>
-                  <a:lnTo>
-                    <a:pt x="4512219" y="940490"/>
-                  </a:lnTo>
-                  <a:lnTo>
-                    <a:pt x="4440596" y="931314"/>
-                  </a:lnTo>
-                  <a:lnTo>
-                    <a:pt x="4368974" y="922004"/>
-                  </a:lnTo>
-                  <a:lnTo>
-                    <a:pt x="4297351" y="912557"/>
-                  </a:lnTo>
-                  <a:lnTo>
-                    <a:pt x="4225729" y="902971"/>
-                  </a:lnTo>
-                  <a:lnTo>
-                    <a:pt x="4154106" y="893244"/>
-                  </a:lnTo>
-                  <a:lnTo>
-                    <a:pt x="4082483" y="883375"/>
-                  </a:lnTo>
-                  <a:lnTo>
-                    <a:pt x="4010861" y="873361"/>
-                  </a:lnTo>
-                  <a:lnTo>
-                    <a:pt x="3939238" y="863200"/>
-                  </a:lnTo>
-                  <a:lnTo>
-                    <a:pt x="3867616" y="852889"/>
-                  </a:lnTo>
-                  <a:lnTo>
-                    <a:pt x="3795993" y="842427"/>
-                  </a:lnTo>
-                  <a:lnTo>
-                    <a:pt x="3724371" y="831812"/>
-                  </a:lnTo>
-                  <a:lnTo>
-                    <a:pt x="3652748" y="821041"/>
-                  </a:lnTo>
-                  <a:lnTo>
-                    <a:pt x="3581126" y="810111"/>
-                  </a:lnTo>
-                  <a:lnTo>
-                    <a:pt x="3509503" y="799021"/>
-                  </a:lnTo>
-                  <a:lnTo>
-                    <a:pt x="3437881" y="787769"/>
-                  </a:lnTo>
-                  <a:lnTo>
-                    <a:pt x="3366258" y="776351"/>
-                  </a:lnTo>
-                  <a:lnTo>
-                    <a:pt x="3294636" y="764765"/>
-                  </a:lnTo>
-                  <a:lnTo>
-                    <a:pt x="3223013" y="753010"/>
-                  </a:lnTo>
-                  <a:lnTo>
-                    <a:pt x="3151391" y="741081"/>
-                  </a:lnTo>
-                  <a:lnTo>
-                    <a:pt x="3079768" y="735589"/>
-                  </a:lnTo>
-                  <a:lnTo>
-                    <a:pt x="3008146" y="734905"/>
-                  </a:lnTo>
-                  <a:lnTo>
-                    <a:pt x="2936523" y="734220"/>
-                  </a:lnTo>
-                  <a:lnTo>
-                    <a:pt x="2864901" y="733535"/>
-                  </a:lnTo>
-                  <a:lnTo>
-                    <a:pt x="2793278" y="732849"/>
-                  </a:lnTo>
-                  <a:lnTo>
-                    <a:pt x="2721655" y="732163"/>
-                  </a:lnTo>
-                  <a:lnTo>
-                    <a:pt x="2650033" y="731476"/>
-                  </a:lnTo>
-                  <a:lnTo>
-                    <a:pt x="2578410" y="730789"/>
-                  </a:lnTo>
-                  <a:lnTo>
-                    <a:pt x="2506788" y="730101"/>
-                  </a:lnTo>
-                  <a:lnTo>
-                    <a:pt x="2435165" y="729413"/>
-                  </a:lnTo>
-                  <a:lnTo>
-                    <a:pt x="2363543" y="728723"/>
-                  </a:lnTo>
-                  <a:lnTo>
-                    <a:pt x="2291920" y="728034"/>
-                  </a:lnTo>
-                  <a:lnTo>
-                    <a:pt x="2220298" y="727344"/>
-                  </a:lnTo>
-                  <a:lnTo>
-                    <a:pt x="2148675" y="726653"/>
-                  </a:lnTo>
-                  <a:lnTo>
-                    <a:pt x="2077053" y="725961"/>
-                  </a:lnTo>
-                  <a:lnTo>
-                    <a:pt x="2005430" y="725270"/>
-                  </a:lnTo>
-                  <a:lnTo>
-                    <a:pt x="1933808" y="724577"/>
-                  </a:lnTo>
-                  <a:lnTo>
-                    <a:pt x="1862185" y="723884"/>
-                  </a:lnTo>
-                  <a:lnTo>
-                    <a:pt x="1790563" y="723190"/>
-                  </a:lnTo>
-                  <a:lnTo>
-                    <a:pt x="1718940" y="722496"/>
-                  </a:lnTo>
-                  <a:lnTo>
-                    <a:pt x="1647318" y="721801"/>
-                  </a:lnTo>
-                  <a:lnTo>
-                    <a:pt x="1575695" y="721106"/>
-                  </a:lnTo>
-                  <a:lnTo>
-                    <a:pt x="1504073" y="720410"/>
-                  </a:lnTo>
-                  <a:lnTo>
-                    <a:pt x="1432450" y="719714"/>
-                  </a:lnTo>
-                  <a:lnTo>
-                    <a:pt x="1360827" y="719017"/>
-                  </a:lnTo>
-                  <a:lnTo>
-                    <a:pt x="1289205" y="718319"/>
-                  </a:lnTo>
-                  <a:lnTo>
-                    <a:pt x="1217582" y="717621"/>
-                  </a:lnTo>
-                  <a:lnTo>
-                    <a:pt x="1145960" y="716922"/>
-                  </a:lnTo>
-                  <a:lnTo>
-                    <a:pt x="1074337" y="716222"/>
-                  </a:lnTo>
-                  <a:lnTo>
-                    <a:pt x="1002715" y="715523"/>
-                  </a:lnTo>
-                  <a:lnTo>
-                    <a:pt x="931092" y="714822"/>
-                  </a:lnTo>
-                  <a:lnTo>
-                    <a:pt x="859470" y="714121"/>
-                  </a:lnTo>
-                  <a:lnTo>
-                    <a:pt x="787847" y="713419"/>
-                  </a:lnTo>
-                  <a:lnTo>
-                    <a:pt x="716225" y="712717"/>
-                  </a:lnTo>
-                  <a:lnTo>
-                    <a:pt x="644602" y="712014"/>
-                  </a:lnTo>
-                  <a:lnTo>
-                    <a:pt x="572980" y="711311"/>
-                  </a:lnTo>
-                  <a:lnTo>
-                    <a:pt x="501357" y="710607"/>
-                  </a:lnTo>
-                  <a:lnTo>
-                    <a:pt x="429735" y="709902"/>
-                  </a:lnTo>
-                  <a:lnTo>
-                    <a:pt x="358112" y="709197"/>
-                  </a:lnTo>
-                  <a:lnTo>
-                    <a:pt x="286490" y="708491"/>
-                  </a:lnTo>
-                  <a:lnTo>
-                    <a:pt x="214867" y="707785"/>
-                  </a:lnTo>
-                  <a:lnTo>
-                    <a:pt x="143245" y="707078"/>
-                  </a:lnTo>
-                  <a:lnTo>
-                    <a:pt x="71622" y="706370"/>
-                  </a:lnTo>
-                  <a:lnTo>
-                    <a:pt x="0" y="705662"/>
+                    <a:pt x="70344" y="8174"/>
+                  </a:lnTo>
+                  <a:lnTo>
+                    <a:pt x="140688" y="16230"/>
+                  </a:lnTo>
+                  <a:lnTo>
+                    <a:pt x="211033" y="24169"/>
+                  </a:lnTo>
+                  <a:lnTo>
+                    <a:pt x="281377" y="31994"/>
+                  </a:lnTo>
+                  <a:lnTo>
+                    <a:pt x="351722" y="39705"/>
+                  </a:lnTo>
+                  <a:lnTo>
+                    <a:pt x="422066" y="47305"/>
+                  </a:lnTo>
+                  <a:lnTo>
+                    <a:pt x="492411" y="54795"/>
+                  </a:lnTo>
+                  <a:lnTo>
+                    <a:pt x="562755" y="62177"/>
+                  </a:lnTo>
+                  <a:lnTo>
+                    <a:pt x="633100" y="69451"/>
+                  </a:lnTo>
+                  <a:lnTo>
+                    <a:pt x="703444" y="76621"/>
+                  </a:lnTo>
+                  <a:lnTo>
+                    <a:pt x="773789" y="83686"/>
+                  </a:lnTo>
+                  <a:lnTo>
+                    <a:pt x="844133" y="90650"/>
+                  </a:lnTo>
+                  <a:lnTo>
+                    <a:pt x="914478" y="97512"/>
+                  </a:lnTo>
+                  <a:lnTo>
+                    <a:pt x="984822" y="104276"/>
+                  </a:lnTo>
+                  <a:lnTo>
+                    <a:pt x="1055167" y="110941"/>
+                  </a:lnTo>
+                  <a:lnTo>
+                    <a:pt x="1125511" y="117510"/>
+                  </a:lnTo>
+                  <a:lnTo>
+                    <a:pt x="1195856" y="123984"/>
+                  </a:lnTo>
+                  <a:lnTo>
+                    <a:pt x="1266200" y="130365"/>
+                  </a:lnTo>
+                  <a:lnTo>
+                    <a:pt x="1336545" y="136653"/>
+                  </a:lnTo>
+                  <a:lnTo>
+                    <a:pt x="1406889" y="142850"/>
+                  </a:lnTo>
+                  <a:lnTo>
+                    <a:pt x="1477234" y="148957"/>
+                  </a:lnTo>
+                  <a:lnTo>
+                    <a:pt x="1547578" y="154976"/>
+                  </a:lnTo>
+                  <a:lnTo>
+                    <a:pt x="1617923" y="160908"/>
+                  </a:lnTo>
+                  <a:lnTo>
+                    <a:pt x="1688267" y="166754"/>
+                  </a:lnTo>
+                  <a:lnTo>
+                    <a:pt x="1758612" y="172516"/>
+                  </a:lnTo>
+                  <a:lnTo>
+                    <a:pt x="1828956" y="178194"/>
+                  </a:lnTo>
+                  <a:lnTo>
+                    <a:pt x="1899301" y="183790"/>
+                  </a:lnTo>
+                  <a:lnTo>
+                    <a:pt x="1969645" y="189305"/>
+                  </a:lnTo>
+                  <a:lnTo>
+                    <a:pt x="2039990" y="194740"/>
+                  </a:lnTo>
+                  <a:lnTo>
+                    <a:pt x="2110334" y="200096"/>
+                  </a:lnTo>
+                  <a:lnTo>
+                    <a:pt x="2180679" y="205375"/>
+                  </a:lnTo>
+                  <a:lnTo>
+                    <a:pt x="2251023" y="210578"/>
+                  </a:lnTo>
+                  <a:lnTo>
+                    <a:pt x="2321368" y="215705"/>
+                  </a:lnTo>
+                  <a:lnTo>
+                    <a:pt x="2391712" y="220759"/>
+                  </a:lnTo>
+                  <a:lnTo>
+                    <a:pt x="2462057" y="225739"/>
+                  </a:lnTo>
+                  <a:lnTo>
+                    <a:pt x="2532401" y="230647"/>
+                  </a:lnTo>
+                  <a:lnTo>
+                    <a:pt x="2602746" y="235484"/>
+                  </a:lnTo>
+                  <a:lnTo>
+                    <a:pt x="2673090" y="240251"/>
+                  </a:lnTo>
+                  <a:lnTo>
+                    <a:pt x="2743435" y="244949"/>
+                  </a:lnTo>
+                  <a:lnTo>
+                    <a:pt x="2813779" y="249579"/>
+                  </a:lnTo>
+                  <a:lnTo>
+                    <a:pt x="2884124" y="254142"/>
+                  </a:lnTo>
+                  <a:lnTo>
+                    <a:pt x="2954468" y="258639"/>
+                  </a:lnTo>
+                  <a:lnTo>
+                    <a:pt x="3024813" y="263071"/>
+                  </a:lnTo>
+                  <a:lnTo>
+                    <a:pt x="3095157" y="265703"/>
+                  </a:lnTo>
+                  <a:lnTo>
+                    <a:pt x="3165502" y="265949"/>
+                  </a:lnTo>
+                  <a:lnTo>
+                    <a:pt x="3235846" y="266196"/>
+                  </a:lnTo>
+                  <a:lnTo>
+                    <a:pt x="3306191" y="266442"/>
+                  </a:lnTo>
+                  <a:lnTo>
+                    <a:pt x="3376535" y="266688"/>
+                  </a:lnTo>
+                  <a:lnTo>
+                    <a:pt x="3446880" y="266933"/>
+                  </a:lnTo>
+                  <a:lnTo>
+                    <a:pt x="3517224" y="267179"/>
+                  </a:lnTo>
+                  <a:lnTo>
+                    <a:pt x="3587569" y="267424"/>
+                  </a:lnTo>
+                  <a:lnTo>
+                    <a:pt x="3657913" y="267669"/>
+                  </a:lnTo>
+                  <a:lnTo>
+                    <a:pt x="3728257" y="267914"/>
+                  </a:lnTo>
+                  <a:lnTo>
+                    <a:pt x="3798602" y="268158"/>
+                  </a:lnTo>
+                  <a:lnTo>
+                    <a:pt x="3868946" y="268403"/>
+                  </a:lnTo>
+                  <a:lnTo>
+                    <a:pt x="3939291" y="268647"/>
+                  </a:lnTo>
+                  <a:lnTo>
+                    <a:pt x="4009635" y="268891"/>
+                  </a:lnTo>
+                  <a:lnTo>
+                    <a:pt x="4079980" y="269135"/>
+                  </a:lnTo>
+                  <a:lnTo>
+                    <a:pt x="4150324" y="269378"/>
+                  </a:lnTo>
+                  <a:lnTo>
+                    <a:pt x="4220669" y="269622"/>
+                  </a:lnTo>
+                  <a:lnTo>
+                    <a:pt x="4291013" y="269865"/>
+                  </a:lnTo>
+                  <a:lnTo>
+                    <a:pt x="4361358" y="270108"/>
+                  </a:lnTo>
+                  <a:lnTo>
+                    <a:pt x="4431702" y="270351"/>
+                  </a:lnTo>
+                  <a:lnTo>
+                    <a:pt x="4502047" y="270593"/>
+                  </a:lnTo>
+                  <a:lnTo>
+                    <a:pt x="4572391" y="270836"/>
+                  </a:lnTo>
+                  <a:lnTo>
+                    <a:pt x="4642736" y="271078"/>
+                  </a:lnTo>
+                  <a:lnTo>
+                    <a:pt x="4713080" y="271320"/>
+                  </a:lnTo>
+                  <a:lnTo>
+                    <a:pt x="4783425" y="271562"/>
+                  </a:lnTo>
+                  <a:lnTo>
+                    <a:pt x="4853769" y="271803"/>
+                  </a:lnTo>
+                  <a:lnTo>
+                    <a:pt x="4924114" y="272045"/>
+                  </a:lnTo>
+                  <a:lnTo>
+                    <a:pt x="4994458" y="272286"/>
+                  </a:lnTo>
+                  <a:lnTo>
+                    <a:pt x="5064803" y="272527"/>
+                  </a:lnTo>
+                  <a:lnTo>
+                    <a:pt x="5135147" y="272768"/>
+                  </a:lnTo>
+                  <a:lnTo>
+                    <a:pt x="5205492" y="273008"/>
+                  </a:lnTo>
+                  <a:lnTo>
+                    <a:pt x="5275836" y="273249"/>
+                  </a:lnTo>
+                  <a:lnTo>
+                    <a:pt x="5346181" y="273489"/>
+                  </a:lnTo>
+                  <a:lnTo>
+                    <a:pt x="5416525" y="273729"/>
+                  </a:lnTo>
+                  <a:lnTo>
+                    <a:pt x="5486870" y="273969"/>
+                  </a:lnTo>
+                  <a:lnTo>
+                    <a:pt x="5557214" y="274208"/>
+                  </a:lnTo>
+                  <a:lnTo>
+                    <a:pt x="5627559" y="274448"/>
+                  </a:lnTo>
+                  <a:lnTo>
+                    <a:pt x="5697903" y="274687"/>
+                  </a:lnTo>
+                  <a:lnTo>
+                    <a:pt x="5768248" y="274926"/>
+                  </a:lnTo>
+                  <a:lnTo>
+                    <a:pt x="5838592" y="275165"/>
+                  </a:lnTo>
+                  <a:lnTo>
+                    <a:pt x="5908937" y="275404"/>
+                  </a:lnTo>
+                  <a:lnTo>
+                    <a:pt x="5979281" y="275642"/>
+                  </a:lnTo>
+                  <a:lnTo>
+                    <a:pt x="6049626" y="275880"/>
+                  </a:lnTo>
+                  <a:lnTo>
+                    <a:pt x="6119970" y="276118"/>
+                  </a:lnTo>
+                  <a:lnTo>
+                    <a:pt x="6190315" y="276356"/>
+                  </a:lnTo>
+                  <a:lnTo>
+                    <a:pt x="6260659" y="276594"/>
+                  </a:lnTo>
+                  <a:lnTo>
+                    <a:pt x="6331004" y="276831"/>
+                  </a:lnTo>
+                  <a:lnTo>
+                    <a:pt x="6401348" y="277068"/>
+                  </a:lnTo>
+                  <a:lnTo>
+                    <a:pt x="6471693" y="277306"/>
+                  </a:lnTo>
+                  <a:lnTo>
+                    <a:pt x="6542037" y="277542"/>
+                  </a:lnTo>
+                  <a:lnTo>
+                    <a:pt x="6612382" y="277779"/>
+                  </a:lnTo>
+                  <a:lnTo>
+                    <a:pt x="6682726" y="278016"/>
+                  </a:lnTo>
+                  <a:lnTo>
+                    <a:pt x="6753071" y="278252"/>
+                  </a:lnTo>
+                  <a:lnTo>
+                    <a:pt x="6823415" y="278488"/>
+                  </a:lnTo>
+                  <a:lnTo>
+                    <a:pt x="6893760" y="278724"/>
+                  </a:lnTo>
+                  <a:lnTo>
+                    <a:pt x="6964104" y="278960"/>
+                  </a:lnTo>
+                  <a:lnTo>
+                    <a:pt x="6964104" y="431479"/>
+                  </a:lnTo>
+                  <a:lnTo>
+                    <a:pt x="6893760" y="429520"/>
+                  </a:lnTo>
+                  <a:lnTo>
+                    <a:pt x="6823415" y="427532"/>
+                  </a:lnTo>
+                  <a:lnTo>
+                    <a:pt x="6753071" y="425514"/>
+                  </a:lnTo>
+                  <a:lnTo>
+                    <a:pt x="6682726" y="423467"/>
+                  </a:lnTo>
+                  <a:lnTo>
+                    <a:pt x="6612382" y="421390"/>
+                  </a:lnTo>
+                  <a:lnTo>
+                    <a:pt x="6542037" y="419283"/>
+                  </a:lnTo>
+                  <a:lnTo>
+                    <a:pt x="6471693" y="417144"/>
+                  </a:lnTo>
+                  <a:lnTo>
+                    <a:pt x="6401348" y="414975"/>
+                  </a:lnTo>
+                  <a:lnTo>
+                    <a:pt x="6331004" y="412773"/>
+                  </a:lnTo>
+                  <a:lnTo>
+                    <a:pt x="6260659" y="410539"/>
+                  </a:lnTo>
+                  <a:lnTo>
+                    <a:pt x="6190315" y="408272"/>
+                  </a:lnTo>
+                  <a:lnTo>
+                    <a:pt x="6119970" y="405972"/>
+                  </a:lnTo>
+                  <a:lnTo>
+                    <a:pt x="6049626" y="403638"/>
+                  </a:lnTo>
+                  <a:lnTo>
+                    <a:pt x="5979281" y="401270"/>
+                  </a:lnTo>
+                  <a:lnTo>
+                    <a:pt x="5908937" y="398867"/>
+                  </a:lnTo>
+                  <a:lnTo>
+                    <a:pt x="5838592" y="396429"/>
+                  </a:lnTo>
+                  <a:lnTo>
+                    <a:pt x="5768248" y="393955"/>
+                  </a:lnTo>
+                  <a:lnTo>
+                    <a:pt x="5697903" y="391445"/>
+                  </a:lnTo>
+                  <a:lnTo>
+                    <a:pt x="5627559" y="388897"/>
+                  </a:lnTo>
+                  <a:lnTo>
+                    <a:pt x="5557214" y="386313"/>
+                  </a:lnTo>
+                  <a:lnTo>
+                    <a:pt x="5486870" y="383690"/>
+                  </a:lnTo>
+                  <a:lnTo>
+                    <a:pt x="5416525" y="381029"/>
+                  </a:lnTo>
+                  <a:lnTo>
+                    <a:pt x="5346181" y="378329"/>
+                  </a:lnTo>
+                  <a:lnTo>
+                    <a:pt x="5275836" y="375590"/>
+                  </a:lnTo>
+                  <a:lnTo>
+                    <a:pt x="5205492" y="372810"/>
+                  </a:lnTo>
+                  <a:lnTo>
+                    <a:pt x="5135147" y="369989"/>
+                  </a:lnTo>
+                  <a:lnTo>
+                    <a:pt x="5064803" y="367127"/>
+                  </a:lnTo>
+                  <a:lnTo>
+                    <a:pt x="4994458" y="364223"/>
+                  </a:lnTo>
+                  <a:lnTo>
+                    <a:pt x="4924114" y="361276"/>
+                  </a:lnTo>
+                  <a:lnTo>
+                    <a:pt x="4853769" y="358286"/>
+                  </a:lnTo>
+                  <a:lnTo>
+                    <a:pt x="4783425" y="355252"/>
+                  </a:lnTo>
+                  <a:lnTo>
+                    <a:pt x="4713080" y="352173"/>
+                  </a:lnTo>
+                  <a:lnTo>
+                    <a:pt x="4642736" y="349049"/>
+                  </a:lnTo>
+                  <a:lnTo>
+                    <a:pt x="4572391" y="345880"/>
+                  </a:lnTo>
+                  <a:lnTo>
+                    <a:pt x="4502047" y="342664"/>
+                  </a:lnTo>
+                  <a:lnTo>
+                    <a:pt x="4431702" y="339400"/>
+                  </a:lnTo>
+                  <a:lnTo>
+                    <a:pt x="4361358" y="336089"/>
+                  </a:lnTo>
+                  <a:lnTo>
+                    <a:pt x="4291013" y="332729"/>
+                  </a:lnTo>
+                  <a:lnTo>
+                    <a:pt x="4220669" y="329320"/>
+                  </a:lnTo>
+                  <a:lnTo>
+                    <a:pt x="4150324" y="325861"/>
+                  </a:lnTo>
+                  <a:lnTo>
+                    <a:pt x="4079980" y="322351"/>
+                  </a:lnTo>
+                  <a:lnTo>
+                    <a:pt x="4009635" y="318789"/>
+                  </a:lnTo>
+                  <a:lnTo>
+                    <a:pt x="3939291" y="315175"/>
+                  </a:lnTo>
+                  <a:lnTo>
+                    <a:pt x="3868946" y="311508"/>
+                  </a:lnTo>
+                  <a:lnTo>
+                    <a:pt x="3798602" y="307787"/>
+                  </a:lnTo>
+                  <a:lnTo>
+                    <a:pt x="3728257" y="304012"/>
+                  </a:lnTo>
+                  <a:lnTo>
+                    <a:pt x="3657913" y="300181"/>
+                  </a:lnTo>
+                  <a:lnTo>
+                    <a:pt x="3587569" y="296294"/>
+                  </a:lnTo>
+                  <a:lnTo>
+                    <a:pt x="3517224" y="292350"/>
+                  </a:lnTo>
+                  <a:lnTo>
+                    <a:pt x="3446880" y="288348"/>
+                  </a:lnTo>
+                  <a:lnTo>
+                    <a:pt x="3376535" y="284287"/>
+                  </a:lnTo>
+                  <a:lnTo>
+                    <a:pt x="3306191" y="280166"/>
+                  </a:lnTo>
+                  <a:lnTo>
+                    <a:pt x="3235846" y="275985"/>
+                  </a:lnTo>
+                  <a:lnTo>
+                    <a:pt x="3165502" y="271743"/>
+                  </a:lnTo>
+                  <a:lnTo>
+                    <a:pt x="3095157" y="267439"/>
+                  </a:lnTo>
+                  <a:lnTo>
+                    <a:pt x="3024813" y="265456"/>
+                  </a:lnTo>
+                  <a:lnTo>
+                    <a:pt x="2954468" y="265210"/>
+                  </a:lnTo>
+                  <a:lnTo>
+                    <a:pt x="2884124" y="264962"/>
+                  </a:lnTo>
+                  <a:lnTo>
+                    <a:pt x="2813779" y="264715"/>
+                  </a:lnTo>
+                  <a:lnTo>
+                    <a:pt x="2743435" y="264468"/>
+                  </a:lnTo>
+                  <a:lnTo>
+                    <a:pt x="2673090" y="264220"/>
+                  </a:lnTo>
+                  <a:lnTo>
+                    <a:pt x="2602746" y="263972"/>
+                  </a:lnTo>
+                  <a:lnTo>
+                    <a:pt x="2532401" y="263724"/>
+                  </a:lnTo>
+                  <a:lnTo>
+                    <a:pt x="2462057" y="263476"/>
+                  </a:lnTo>
+                  <a:lnTo>
+                    <a:pt x="2391712" y="263228"/>
+                  </a:lnTo>
+                  <a:lnTo>
+                    <a:pt x="2321368" y="262979"/>
+                  </a:lnTo>
+                  <a:lnTo>
+                    <a:pt x="2251023" y="262730"/>
+                  </a:lnTo>
+                  <a:lnTo>
+                    <a:pt x="2180679" y="262481"/>
+                  </a:lnTo>
+                  <a:lnTo>
+                    <a:pt x="2110334" y="262232"/>
+                  </a:lnTo>
+                  <a:lnTo>
+                    <a:pt x="2039990" y="261982"/>
+                  </a:lnTo>
+                  <a:lnTo>
+                    <a:pt x="1969645" y="261732"/>
+                  </a:lnTo>
+                  <a:lnTo>
+                    <a:pt x="1899301" y="261482"/>
+                  </a:lnTo>
+                  <a:lnTo>
+                    <a:pt x="1828956" y="261232"/>
+                  </a:lnTo>
+                  <a:lnTo>
+                    <a:pt x="1758612" y="260982"/>
+                  </a:lnTo>
+                  <a:lnTo>
+                    <a:pt x="1688267" y="260732"/>
+                  </a:lnTo>
+                  <a:lnTo>
+                    <a:pt x="1617923" y="260481"/>
+                  </a:lnTo>
+                  <a:lnTo>
+                    <a:pt x="1547578" y="260230"/>
+                  </a:lnTo>
+                  <a:lnTo>
+                    <a:pt x="1477234" y="259979"/>
+                  </a:lnTo>
+                  <a:lnTo>
+                    <a:pt x="1406889" y="259727"/>
+                  </a:lnTo>
+                  <a:lnTo>
+                    <a:pt x="1336545" y="259476"/>
+                  </a:lnTo>
+                  <a:lnTo>
+                    <a:pt x="1266200" y="259224"/>
+                  </a:lnTo>
+                  <a:lnTo>
+                    <a:pt x="1195856" y="258972"/>
+                  </a:lnTo>
+                  <a:lnTo>
+                    <a:pt x="1125511" y="258720"/>
+                  </a:lnTo>
+                  <a:lnTo>
+                    <a:pt x="1055167" y="258468"/>
+                  </a:lnTo>
+                  <a:lnTo>
+                    <a:pt x="984822" y="258215"/>
+                  </a:lnTo>
+                  <a:lnTo>
+                    <a:pt x="914478" y="257962"/>
+                  </a:lnTo>
+                  <a:lnTo>
+                    <a:pt x="844133" y="257709"/>
+                  </a:lnTo>
+                  <a:lnTo>
+                    <a:pt x="773789" y="257456"/>
+                  </a:lnTo>
+                  <a:lnTo>
+                    <a:pt x="703444" y="257202"/>
+                  </a:lnTo>
+                  <a:lnTo>
+                    <a:pt x="633100" y="256949"/>
+                  </a:lnTo>
+                  <a:lnTo>
+                    <a:pt x="562755" y="256695"/>
+                  </a:lnTo>
+                  <a:lnTo>
+                    <a:pt x="492411" y="256441"/>
+                  </a:lnTo>
+                  <a:lnTo>
+                    <a:pt x="422066" y="256187"/>
+                  </a:lnTo>
+                  <a:lnTo>
+                    <a:pt x="351722" y="255932"/>
+                  </a:lnTo>
+                  <a:lnTo>
+                    <a:pt x="281377" y="255677"/>
+                  </a:lnTo>
+                  <a:lnTo>
+                    <a:pt x="211033" y="255423"/>
+                  </a:lnTo>
+                  <a:lnTo>
+                    <a:pt x="140688" y="255167"/>
+                  </a:lnTo>
+                  <a:lnTo>
+                    <a:pt x="70344" y="254912"/>
+                  </a:lnTo>
+                  <a:lnTo>
+                    <a:pt x="0" y="254657"/>
                   </a:lnTo>
                   <a:close/>
                 </a:path>
@@ -3670,643 +3705,318 @@
         </p:sp>
         <p:sp>
           <p:nvSpPr>
-            <p:cNvPr id="23" name="pl23"/>
-            <p:cNvSpPr/>
-            <p:nvPr/>
-          </p:nvSpPr>
-          <p:spPr>
-            <a:xfrm>
-              <a:off x="1172049" y="3991802"/>
-              <a:ext cx="7090630" cy="773007"/>
-            </a:xfrm>
-            <a:custGeom>
-              <a:avLst/>
-              <a:pathLst>
-                <a:path w="7090630" h="773007">
-                  <a:moveTo>
-                    <a:pt x="0" y="0"/>
-                  </a:moveTo>
-                  <a:lnTo>
-                    <a:pt x="71622" y="22651"/>
-                  </a:lnTo>
-                  <a:lnTo>
-                    <a:pt x="143245" y="44975"/>
-                  </a:lnTo>
-                  <a:lnTo>
-                    <a:pt x="214867" y="66975"/>
-                  </a:lnTo>
-                  <a:lnTo>
-                    <a:pt x="286490" y="88657"/>
-                  </a:lnTo>
-                  <a:lnTo>
-                    <a:pt x="358112" y="110026"/>
-                  </a:lnTo>
-                  <a:lnTo>
-                    <a:pt x="429735" y="131085"/>
-                  </a:lnTo>
-                  <a:lnTo>
-                    <a:pt x="501357" y="151840"/>
-                  </a:lnTo>
-                  <a:lnTo>
-                    <a:pt x="572980" y="172294"/>
-                  </a:lnTo>
-                  <a:lnTo>
-                    <a:pt x="644602" y="192453"/>
-                  </a:lnTo>
-                  <a:lnTo>
-                    <a:pt x="716225" y="212319"/>
-                  </a:lnTo>
-                  <a:lnTo>
-                    <a:pt x="787847" y="231898"/>
-                  </a:lnTo>
-                  <a:lnTo>
-                    <a:pt x="859470" y="251194"/>
-                  </a:lnTo>
-                  <a:lnTo>
-                    <a:pt x="931092" y="270211"/>
-                  </a:lnTo>
-                  <a:lnTo>
-                    <a:pt x="1002715" y="288953"/>
-                  </a:lnTo>
-                  <a:lnTo>
-                    <a:pt x="1074337" y="307423"/>
-                  </a:lnTo>
-                  <a:lnTo>
-                    <a:pt x="1145960" y="325626"/>
-                  </a:lnTo>
-                  <a:lnTo>
-                    <a:pt x="1217582" y="343566"/>
-                  </a:lnTo>
-                  <a:lnTo>
-                    <a:pt x="1289205" y="361246"/>
-                  </a:lnTo>
-                  <a:lnTo>
-                    <a:pt x="1360827" y="378670"/>
-                  </a:lnTo>
-                  <a:lnTo>
-                    <a:pt x="1432450" y="395842"/>
-                  </a:lnTo>
-                  <a:lnTo>
-                    <a:pt x="1504073" y="412766"/>
-                  </a:lnTo>
-                  <a:lnTo>
-                    <a:pt x="1575695" y="429445"/>
-                  </a:lnTo>
-                  <a:lnTo>
-                    <a:pt x="1647318" y="445882"/>
-                  </a:lnTo>
-                  <a:lnTo>
-                    <a:pt x="1718940" y="462082"/>
-                  </a:lnTo>
-                  <a:lnTo>
-                    <a:pt x="1790563" y="478047"/>
-                  </a:lnTo>
-                  <a:lnTo>
-                    <a:pt x="1862185" y="493781"/>
-                  </a:lnTo>
-                  <a:lnTo>
-                    <a:pt x="1933808" y="509288"/>
-                  </a:lnTo>
-                  <a:lnTo>
-                    <a:pt x="2005430" y="524570"/>
-                  </a:lnTo>
-                  <a:lnTo>
-                    <a:pt x="2077053" y="539631"/>
-                  </a:lnTo>
-                  <a:lnTo>
-                    <a:pt x="2148675" y="554474"/>
-                  </a:lnTo>
-                  <a:lnTo>
-                    <a:pt x="2220298" y="569103"/>
-                  </a:lnTo>
-                  <a:lnTo>
-                    <a:pt x="2291920" y="583519"/>
-                  </a:lnTo>
-                  <a:lnTo>
-                    <a:pt x="2363543" y="597727"/>
-                  </a:lnTo>
-                  <a:lnTo>
-                    <a:pt x="2435165" y="611730"/>
-                  </a:lnTo>
-                  <a:lnTo>
-                    <a:pt x="2506788" y="625530"/>
-                  </a:lnTo>
-                  <a:lnTo>
-                    <a:pt x="2578410" y="639130"/>
-                  </a:lnTo>
-                  <a:lnTo>
-                    <a:pt x="2650033" y="652533"/>
-                  </a:lnTo>
-                  <a:lnTo>
-                    <a:pt x="2721655" y="665743"/>
-                  </a:lnTo>
-                  <a:lnTo>
-                    <a:pt x="2793278" y="678761"/>
-                  </a:lnTo>
-                  <a:lnTo>
-                    <a:pt x="2864901" y="691591"/>
-                  </a:lnTo>
-                  <a:lnTo>
-                    <a:pt x="2936523" y="704236"/>
-                  </a:lnTo>
-                  <a:lnTo>
-                    <a:pt x="3008146" y="716697"/>
-                  </a:lnTo>
-                  <a:lnTo>
-                    <a:pt x="3079768" y="728978"/>
-                  </a:lnTo>
-                  <a:lnTo>
-                    <a:pt x="3151391" y="736272"/>
-                  </a:lnTo>
-                  <a:lnTo>
-                    <a:pt x="3223013" y="736955"/>
-                  </a:lnTo>
-                  <a:lnTo>
-                    <a:pt x="3294636" y="737637"/>
-                  </a:lnTo>
-                  <a:lnTo>
-                    <a:pt x="3366258" y="738319"/>
-                  </a:lnTo>
-                  <a:lnTo>
-                    <a:pt x="3437881" y="739000"/>
-                  </a:lnTo>
-                  <a:lnTo>
-                    <a:pt x="3509503" y="739681"/>
-                  </a:lnTo>
-                  <a:lnTo>
-                    <a:pt x="3581126" y="740361"/>
-                  </a:lnTo>
-                  <a:lnTo>
-                    <a:pt x="3652748" y="741040"/>
-                  </a:lnTo>
-                  <a:lnTo>
-                    <a:pt x="3724371" y="741719"/>
-                  </a:lnTo>
-                  <a:lnTo>
-                    <a:pt x="3795993" y="742398"/>
-                  </a:lnTo>
-                  <a:lnTo>
-                    <a:pt x="3867616" y="743076"/>
-                  </a:lnTo>
-                  <a:lnTo>
-                    <a:pt x="3939238" y="743753"/>
-                  </a:lnTo>
-                  <a:lnTo>
-                    <a:pt x="4010861" y="744430"/>
-                  </a:lnTo>
-                  <a:lnTo>
-                    <a:pt x="4082483" y="745106"/>
-                  </a:lnTo>
-                  <a:lnTo>
-                    <a:pt x="4154106" y="745781"/>
-                  </a:lnTo>
-                  <a:lnTo>
-                    <a:pt x="4225729" y="746456"/>
-                  </a:lnTo>
-                  <a:lnTo>
-                    <a:pt x="4297351" y="747131"/>
-                  </a:lnTo>
-                  <a:lnTo>
-                    <a:pt x="4368974" y="747805"/>
-                  </a:lnTo>
-                  <a:lnTo>
-                    <a:pt x="4440596" y="748478"/>
-                  </a:lnTo>
-                  <a:lnTo>
-                    <a:pt x="4512219" y="749151"/>
-                  </a:lnTo>
-                  <a:lnTo>
-                    <a:pt x="4583841" y="749823"/>
-                  </a:lnTo>
-                  <a:lnTo>
-                    <a:pt x="4655464" y="750495"/>
-                  </a:lnTo>
-                  <a:lnTo>
-                    <a:pt x="4727086" y="751166"/>
-                  </a:lnTo>
-                  <a:lnTo>
-                    <a:pt x="4798709" y="751837"/>
-                  </a:lnTo>
-                  <a:lnTo>
-                    <a:pt x="4870331" y="752507"/>
-                  </a:lnTo>
-                  <a:lnTo>
-                    <a:pt x="4941954" y="753176"/>
-                  </a:lnTo>
-                  <a:lnTo>
-                    <a:pt x="5013576" y="753845"/>
-                  </a:lnTo>
-                  <a:lnTo>
-                    <a:pt x="5085199" y="754514"/>
-                  </a:lnTo>
-                  <a:lnTo>
-                    <a:pt x="5156821" y="755181"/>
-                  </a:lnTo>
-                  <a:lnTo>
-                    <a:pt x="5228444" y="755849"/>
-                  </a:lnTo>
-                  <a:lnTo>
-                    <a:pt x="5300066" y="756515"/>
-                  </a:lnTo>
-                  <a:lnTo>
-                    <a:pt x="5371689" y="757182"/>
-                  </a:lnTo>
-                  <a:lnTo>
-                    <a:pt x="5443311" y="757847"/>
-                  </a:lnTo>
-                  <a:lnTo>
-                    <a:pt x="5514934" y="758512"/>
-                  </a:lnTo>
-                  <a:lnTo>
-                    <a:pt x="5586557" y="759177"/>
-                  </a:lnTo>
-                  <a:lnTo>
-                    <a:pt x="5658179" y="759841"/>
-                  </a:lnTo>
-                  <a:lnTo>
-                    <a:pt x="5729802" y="760504"/>
-                  </a:lnTo>
-                  <a:lnTo>
-                    <a:pt x="5801424" y="761167"/>
-                  </a:lnTo>
-                  <a:lnTo>
-                    <a:pt x="5873047" y="761830"/>
-                  </a:lnTo>
-                  <a:lnTo>
-                    <a:pt x="5944669" y="762491"/>
-                  </a:lnTo>
-                  <a:lnTo>
-                    <a:pt x="6016292" y="763153"/>
-                  </a:lnTo>
-                  <a:lnTo>
-                    <a:pt x="6087914" y="763813"/>
-                  </a:lnTo>
-                  <a:lnTo>
-                    <a:pt x="6159537" y="764474"/>
-                  </a:lnTo>
-                  <a:lnTo>
-                    <a:pt x="6231159" y="765133"/>
-                  </a:lnTo>
-                  <a:lnTo>
-                    <a:pt x="6302782" y="765792"/>
-                  </a:lnTo>
-                  <a:lnTo>
-                    <a:pt x="6374404" y="766451"/>
-                  </a:lnTo>
-                  <a:lnTo>
-                    <a:pt x="6446027" y="767109"/>
-                  </a:lnTo>
-                  <a:lnTo>
-                    <a:pt x="6517649" y="767766"/>
-                  </a:lnTo>
-                  <a:lnTo>
-                    <a:pt x="6589272" y="768423"/>
-                  </a:lnTo>
-                  <a:lnTo>
-                    <a:pt x="6660894" y="769080"/>
-                  </a:lnTo>
-                  <a:lnTo>
-                    <a:pt x="6732517" y="769735"/>
-                  </a:lnTo>
-                  <a:lnTo>
-                    <a:pt x="6804139" y="770391"/>
-                  </a:lnTo>
-                  <a:lnTo>
-                    <a:pt x="6875762" y="771046"/>
-                  </a:lnTo>
-                  <a:lnTo>
-                    <a:pt x="6947385" y="771700"/>
-                  </a:lnTo>
-                  <a:lnTo>
-                    <a:pt x="7019007" y="772353"/>
-                  </a:lnTo>
-                  <a:lnTo>
-                    <a:pt x="7090630" y="773007"/>
-                  </a:lnTo>
-                </a:path>
-              </a:pathLst>
-            </a:custGeom>
-          </p:spPr>
-          <p:txBody>
-            <a:bodyPr/>
-            <a:lstStyle/>
-            <a:p/>
-          </p:txBody>
-        </p:sp>
-        <p:sp>
-          <p:nvSpPr>
             <p:cNvPr id="24" name="pl24"/>
             <p:cNvSpPr/>
             <p:nvPr/>
           </p:nvSpPr>
           <p:spPr>
             <a:xfrm>
-              <a:off x="1172049" y="4697465"/>
-              <a:ext cx="7090630" cy="489980"/>
+              <a:off x="1235312" y="2835361"/>
+              <a:ext cx="6964104" cy="278960"/>
             </a:xfrm>
             <a:custGeom>
               <a:avLst/>
               <a:pathLst>
-                <a:path w="7090630" h="489980">
+                <a:path w="6964104" h="278960">
                   <a:moveTo>
-                    <a:pt x="7090630" y="489980"/>
+                    <a:pt x="0" y="0"/>
                   </a:moveTo>
                   <a:lnTo>
-                    <a:pt x="7019007" y="484551"/>
-                  </a:lnTo>
-                  <a:lnTo>
-                    <a:pt x="6947385" y="479041"/>
-                  </a:lnTo>
-                  <a:lnTo>
-                    <a:pt x="6875762" y="473451"/>
-                  </a:lnTo>
-                  <a:lnTo>
-                    <a:pt x="6804139" y="467779"/>
-                  </a:lnTo>
-                  <a:lnTo>
-                    <a:pt x="6732517" y="462024"/>
-                  </a:lnTo>
-                  <a:lnTo>
-                    <a:pt x="6660894" y="456184"/>
-                  </a:lnTo>
-                  <a:lnTo>
-                    <a:pt x="6589272" y="450258"/>
-                  </a:lnTo>
-                  <a:lnTo>
-                    <a:pt x="6517649" y="444246"/>
-                  </a:lnTo>
-                  <a:lnTo>
-                    <a:pt x="6446027" y="438145"/>
-                  </a:lnTo>
-                  <a:lnTo>
-                    <a:pt x="6374404" y="431954"/>
-                  </a:lnTo>
-                  <a:lnTo>
-                    <a:pt x="6302782" y="425673"/>
-                  </a:lnTo>
-                  <a:lnTo>
-                    <a:pt x="6231159" y="419299"/>
-                  </a:lnTo>
-                  <a:lnTo>
-                    <a:pt x="6159537" y="412832"/>
-                  </a:lnTo>
-                  <a:lnTo>
-                    <a:pt x="6087914" y="406270"/>
-                  </a:lnTo>
-                  <a:lnTo>
-                    <a:pt x="6016292" y="399611"/>
-                  </a:lnTo>
-                  <a:lnTo>
-                    <a:pt x="5944669" y="392855"/>
-                  </a:lnTo>
-                  <a:lnTo>
-                    <a:pt x="5873047" y="385999"/>
-                  </a:lnTo>
-                  <a:lnTo>
-                    <a:pt x="5801424" y="379043"/>
-                  </a:lnTo>
-                  <a:lnTo>
-                    <a:pt x="5729802" y="371985"/>
-                  </a:lnTo>
-                  <a:lnTo>
-                    <a:pt x="5658179" y="364823"/>
-                  </a:lnTo>
-                  <a:lnTo>
-                    <a:pt x="5586557" y="357556"/>
-                  </a:lnTo>
-                  <a:lnTo>
-                    <a:pt x="5514934" y="350182"/>
-                  </a:lnTo>
-                  <a:lnTo>
-                    <a:pt x="5443311" y="342700"/>
-                  </a:lnTo>
-                  <a:lnTo>
-                    <a:pt x="5371689" y="335109"/>
-                  </a:lnTo>
-                  <a:lnTo>
-                    <a:pt x="5300066" y="327405"/>
-                  </a:lnTo>
-                  <a:lnTo>
-                    <a:pt x="5228444" y="319589"/>
-                  </a:lnTo>
-                  <a:lnTo>
-                    <a:pt x="5156821" y="311658"/>
-                  </a:lnTo>
-                  <a:lnTo>
-                    <a:pt x="5085199" y="303610"/>
-                  </a:lnTo>
-                  <a:lnTo>
-                    <a:pt x="5013576" y="295444"/>
-                  </a:lnTo>
-                  <a:lnTo>
-                    <a:pt x="4941954" y="287159"/>
-                  </a:lnTo>
-                  <a:lnTo>
-                    <a:pt x="4870331" y="278751"/>
-                  </a:lnTo>
-                  <a:lnTo>
-                    <a:pt x="4798709" y="270221"/>
-                  </a:lnTo>
-                  <a:lnTo>
-                    <a:pt x="4727086" y="261565"/>
-                  </a:lnTo>
-                  <a:lnTo>
-                    <a:pt x="4655464" y="252782"/>
-                  </a:lnTo>
-                  <a:lnTo>
-                    <a:pt x="4583841" y="243870"/>
-                  </a:lnTo>
-                  <a:lnTo>
-                    <a:pt x="4512219" y="234827"/>
-                  </a:lnTo>
-                  <a:lnTo>
-                    <a:pt x="4440596" y="225651"/>
-                  </a:lnTo>
-                  <a:lnTo>
-                    <a:pt x="4368974" y="216341"/>
-                  </a:lnTo>
-                  <a:lnTo>
-                    <a:pt x="4297351" y="206894"/>
-                  </a:lnTo>
-                  <a:lnTo>
-                    <a:pt x="4225729" y="197308"/>
-                  </a:lnTo>
-                  <a:lnTo>
-                    <a:pt x="4154106" y="187581"/>
-                  </a:lnTo>
-                  <a:lnTo>
-                    <a:pt x="4082483" y="177712"/>
-                  </a:lnTo>
-                  <a:lnTo>
-                    <a:pt x="4010861" y="167698"/>
-                  </a:lnTo>
-                  <a:lnTo>
-                    <a:pt x="3939238" y="157537"/>
-                  </a:lnTo>
-                  <a:lnTo>
-                    <a:pt x="3867616" y="147226"/>
-                  </a:lnTo>
-                  <a:lnTo>
-                    <a:pt x="3795993" y="136764"/>
-                  </a:lnTo>
-                  <a:lnTo>
-                    <a:pt x="3724371" y="126149"/>
-                  </a:lnTo>
-                  <a:lnTo>
-                    <a:pt x="3652748" y="115378"/>
-                  </a:lnTo>
-                  <a:lnTo>
-                    <a:pt x="3581126" y="104448"/>
-                  </a:lnTo>
-                  <a:lnTo>
-                    <a:pt x="3509503" y="93359"/>
-                  </a:lnTo>
-                  <a:lnTo>
-                    <a:pt x="3437881" y="82106"/>
-                  </a:lnTo>
-                  <a:lnTo>
-                    <a:pt x="3366258" y="70688"/>
-                  </a:lnTo>
-                  <a:lnTo>
-                    <a:pt x="3294636" y="59102"/>
-                  </a:lnTo>
-                  <a:lnTo>
-                    <a:pt x="3223013" y="47347"/>
-                  </a:lnTo>
-                  <a:lnTo>
-                    <a:pt x="3151391" y="35419"/>
-                  </a:lnTo>
-                  <a:lnTo>
-                    <a:pt x="3079768" y="29926"/>
-                  </a:lnTo>
-                  <a:lnTo>
-                    <a:pt x="3008146" y="29242"/>
-                  </a:lnTo>
-                  <a:lnTo>
-                    <a:pt x="2936523" y="28557"/>
-                  </a:lnTo>
-                  <a:lnTo>
-                    <a:pt x="2864901" y="27872"/>
-                  </a:lnTo>
-                  <a:lnTo>
-                    <a:pt x="2793278" y="27187"/>
-                  </a:lnTo>
-                  <a:lnTo>
-                    <a:pt x="2721655" y="26500"/>
-                  </a:lnTo>
-                  <a:lnTo>
-                    <a:pt x="2650033" y="25814"/>
-                  </a:lnTo>
-                  <a:lnTo>
-                    <a:pt x="2578410" y="25126"/>
-                  </a:lnTo>
-                  <a:lnTo>
-                    <a:pt x="2506788" y="24438"/>
-                  </a:lnTo>
-                  <a:lnTo>
-                    <a:pt x="2435165" y="23750"/>
-                  </a:lnTo>
-                  <a:lnTo>
-                    <a:pt x="2363543" y="23061"/>
-                  </a:lnTo>
-                  <a:lnTo>
-                    <a:pt x="2291920" y="22371"/>
-                  </a:lnTo>
-                  <a:lnTo>
-                    <a:pt x="2220298" y="21681"/>
-                  </a:lnTo>
-                  <a:lnTo>
-                    <a:pt x="2148675" y="20990"/>
-                  </a:lnTo>
-                  <a:lnTo>
-                    <a:pt x="2077053" y="20299"/>
-                  </a:lnTo>
-                  <a:lnTo>
-                    <a:pt x="2005430" y="19607"/>
-                  </a:lnTo>
-                  <a:lnTo>
-                    <a:pt x="1933808" y="18914"/>
-                  </a:lnTo>
-                  <a:lnTo>
-                    <a:pt x="1862185" y="18221"/>
-                  </a:lnTo>
-                  <a:lnTo>
-                    <a:pt x="1790563" y="17527"/>
-                  </a:lnTo>
-                  <a:lnTo>
-                    <a:pt x="1718940" y="16833"/>
-                  </a:lnTo>
-                  <a:lnTo>
-                    <a:pt x="1647318" y="16138"/>
-                  </a:lnTo>
-                  <a:lnTo>
-                    <a:pt x="1575695" y="15443"/>
-                  </a:lnTo>
-                  <a:lnTo>
-                    <a:pt x="1504073" y="14747"/>
-                  </a:lnTo>
-                  <a:lnTo>
-                    <a:pt x="1432450" y="14051"/>
-                  </a:lnTo>
-                  <a:lnTo>
-                    <a:pt x="1360827" y="13354"/>
-                  </a:lnTo>
-                  <a:lnTo>
-                    <a:pt x="1289205" y="12656"/>
-                  </a:lnTo>
-                  <a:lnTo>
-                    <a:pt x="1217582" y="11958"/>
-                  </a:lnTo>
-                  <a:lnTo>
-                    <a:pt x="1145960" y="11259"/>
-                  </a:lnTo>
-                  <a:lnTo>
-                    <a:pt x="1074337" y="10560"/>
-                  </a:lnTo>
-                  <a:lnTo>
-                    <a:pt x="1002715" y="9860"/>
-                  </a:lnTo>
-                  <a:lnTo>
-                    <a:pt x="931092" y="9159"/>
-                  </a:lnTo>
-                  <a:lnTo>
-                    <a:pt x="859470" y="8458"/>
-                  </a:lnTo>
-                  <a:lnTo>
-                    <a:pt x="787847" y="7756"/>
-                  </a:lnTo>
-                  <a:lnTo>
-                    <a:pt x="716225" y="7054"/>
-                  </a:lnTo>
-                  <a:lnTo>
-                    <a:pt x="644602" y="6351"/>
-                  </a:lnTo>
-                  <a:lnTo>
-                    <a:pt x="572980" y="5648"/>
-                  </a:lnTo>
-                  <a:lnTo>
-                    <a:pt x="501357" y="4944"/>
-                  </a:lnTo>
-                  <a:lnTo>
-                    <a:pt x="429735" y="4239"/>
-                  </a:lnTo>
-                  <a:lnTo>
-                    <a:pt x="358112" y="3534"/>
-                  </a:lnTo>
-                  <a:lnTo>
-                    <a:pt x="286490" y="2828"/>
-                  </a:lnTo>
-                  <a:lnTo>
-                    <a:pt x="214867" y="2122"/>
-                  </a:lnTo>
-                  <a:lnTo>
-                    <a:pt x="143245" y="1415"/>
-                  </a:lnTo>
-                  <a:lnTo>
-                    <a:pt x="71622" y="708"/>
-                  </a:lnTo>
-                  <a:lnTo>
-                    <a:pt x="0" y="0"/>
+                    <a:pt x="70344" y="8174"/>
+                  </a:lnTo>
+                  <a:lnTo>
+                    <a:pt x="140688" y="16230"/>
+                  </a:lnTo>
+                  <a:lnTo>
+                    <a:pt x="211033" y="24169"/>
+                  </a:lnTo>
+                  <a:lnTo>
+                    <a:pt x="281377" y="31994"/>
+                  </a:lnTo>
+                  <a:lnTo>
+                    <a:pt x="351722" y="39705"/>
+                  </a:lnTo>
+                  <a:lnTo>
+                    <a:pt x="422066" y="47305"/>
+                  </a:lnTo>
+                  <a:lnTo>
+                    <a:pt x="492411" y="54795"/>
+                  </a:lnTo>
+                  <a:lnTo>
+                    <a:pt x="562755" y="62177"/>
+                  </a:lnTo>
+                  <a:lnTo>
+                    <a:pt x="633100" y="69451"/>
+                  </a:lnTo>
+                  <a:lnTo>
+                    <a:pt x="703444" y="76621"/>
+                  </a:lnTo>
+                  <a:lnTo>
+                    <a:pt x="773789" y="83686"/>
+                  </a:lnTo>
+                  <a:lnTo>
+                    <a:pt x="844133" y="90650"/>
+                  </a:lnTo>
+                  <a:lnTo>
+                    <a:pt x="914478" y="97512"/>
+                  </a:lnTo>
+                  <a:lnTo>
+                    <a:pt x="984822" y="104276"/>
+                  </a:lnTo>
+                  <a:lnTo>
+                    <a:pt x="1055167" y="110941"/>
+                  </a:lnTo>
+                  <a:lnTo>
+                    <a:pt x="1125511" y="117510"/>
+                  </a:lnTo>
+                  <a:lnTo>
+                    <a:pt x="1195856" y="123984"/>
+                  </a:lnTo>
+                  <a:lnTo>
+                    <a:pt x="1266200" y="130365"/>
+                  </a:lnTo>
+                  <a:lnTo>
+                    <a:pt x="1336545" y="136653"/>
+                  </a:lnTo>
+                  <a:lnTo>
+                    <a:pt x="1406889" y="142850"/>
+                  </a:lnTo>
+                  <a:lnTo>
+                    <a:pt x="1477234" y="148957"/>
+                  </a:lnTo>
+                  <a:lnTo>
+                    <a:pt x="1547578" y="154976"/>
+                  </a:lnTo>
+                  <a:lnTo>
+                    <a:pt x="1617923" y="160908"/>
+                  </a:lnTo>
+                  <a:lnTo>
+                    <a:pt x="1688267" y="166754"/>
+                  </a:lnTo>
+                  <a:lnTo>
+                    <a:pt x="1758612" y="172516"/>
+                  </a:lnTo>
+                  <a:lnTo>
+                    <a:pt x="1828956" y="178194"/>
+                  </a:lnTo>
+                  <a:lnTo>
+                    <a:pt x="1899301" y="183790"/>
+                  </a:lnTo>
+                  <a:lnTo>
+                    <a:pt x="1969645" y="189305"/>
+                  </a:lnTo>
+                  <a:lnTo>
+                    <a:pt x="2039990" y="194740"/>
+                  </a:lnTo>
+                  <a:lnTo>
+                    <a:pt x="2110334" y="200096"/>
+                  </a:lnTo>
+                  <a:lnTo>
+                    <a:pt x="2180679" y="205375"/>
+                  </a:lnTo>
+                  <a:lnTo>
+                    <a:pt x="2251023" y="210578"/>
+                  </a:lnTo>
+                  <a:lnTo>
+                    <a:pt x="2321368" y="215705"/>
+                  </a:lnTo>
+                  <a:lnTo>
+                    <a:pt x="2391712" y="220759"/>
+                  </a:lnTo>
+                  <a:lnTo>
+                    <a:pt x="2462057" y="225739"/>
+                  </a:lnTo>
+                  <a:lnTo>
+                    <a:pt x="2532401" y="230647"/>
+                  </a:lnTo>
+                  <a:lnTo>
+                    <a:pt x="2602746" y="235484"/>
+                  </a:lnTo>
+                  <a:lnTo>
+                    <a:pt x="2673090" y="240251"/>
+                  </a:lnTo>
+                  <a:lnTo>
+                    <a:pt x="2743435" y="244949"/>
+                  </a:lnTo>
+                  <a:lnTo>
+                    <a:pt x="2813779" y="249579"/>
+                  </a:lnTo>
+                  <a:lnTo>
+                    <a:pt x="2884124" y="254142"/>
+                  </a:lnTo>
+                  <a:lnTo>
+                    <a:pt x="2954468" y="258639"/>
+                  </a:lnTo>
+                  <a:lnTo>
+                    <a:pt x="3024813" y="263071"/>
+                  </a:lnTo>
+                  <a:lnTo>
+                    <a:pt x="3095157" y="265703"/>
+                  </a:lnTo>
+                  <a:lnTo>
+                    <a:pt x="3165502" y="265949"/>
+                  </a:lnTo>
+                  <a:lnTo>
+                    <a:pt x="3235846" y="266196"/>
+                  </a:lnTo>
+                  <a:lnTo>
+                    <a:pt x="3306191" y="266442"/>
+                  </a:lnTo>
+                  <a:lnTo>
+                    <a:pt x="3376535" y="266688"/>
+                  </a:lnTo>
+                  <a:lnTo>
+                    <a:pt x="3446880" y="266933"/>
+                  </a:lnTo>
+                  <a:lnTo>
+                    <a:pt x="3517224" y="267179"/>
+                  </a:lnTo>
+                  <a:lnTo>
+                    <a:pt x="3587569" y="267424"/>
+                  </a:lnTo>
+                  <a:lnTo>
+                    <a:pt x="3657913" y="267669"/>
+                  </a:lnTo>
+                  <a:lnTo>
+                    <a:pt x="3728257" y="267914"/>
+                  </a:lnTo>
+                  <a:lnTo>
+                    <a:pt x="3798602" y="268158"/>
+                  </a:lnTo>
+                  <a:lnTo>
+                    <a:pt x="3868946" y="268403"/>
+                  </a:lnTo>
+                  <a:lnTo>
+                    <a:pt x="3939291" y="268647"/>
+                  </a:lnTo>
+                  <a:lnTo>
+                    <a:pt x="4009635" y="268891"/>
+                  </a:lnTo>
+                  <a:lnTo>
+                    <a:pt x="4079980" y="269135"/>
+                  </a:lnTo>
+                  <a:lnTo>
+                    <a:pt x="4150324" y="269378"/>
+                  </a:lnTo>
+                  <a:lnTo>
+                    <a:pt x="4220669" y="269622"/>
+                  </a:lnTo>
+                  <a:lnTo>
+                    <a:pt x="4291013" y="269865"/>
+                  </a:lnTo>
+                  <a:lnTo>
+                    <a:pt x="4361358" y="270108"/>
+                  </a:lnTo>
+                  <a:lnTo>
+                    <a:pt x="4431702" y="270351"/>
+                  </a:lnTo>
+                  <a:lnTo>
+                    <a:pt x="4502047" y="270593"/>
+                  </a:lnTo>
+                  <a:lnTo>
+                    <a:pt x="4572391" y="270836"/>
+                  </a:lnTo>
+                  <a:lnTo>
+                    <a:pt x="4642736" y="271078"/>
+                  </a:lnTo>
+                  <a:lnTo>
+                    <a:pt x="4713080" y="271320"/>
+                  </a:lnTo>
+                  <a:lnTo>
+                    <a:pt x="4783425" y="271562"/>
+                  </a:lnTo>
+                  <a:lnTo>
+                    <a:pt x="4853769" y="271803"/>
+                  </a:lnTo>
+                  <a:lnTo>
+                    <a:pt x="4924114" y="272045"/>
+                  </a:lnTo>
+                  <a:lnTo>
+                    <a:pt x="4994458" y="272286"/>
+                  </a:lnTo>
+                  <a:lnTo>
+                    <a:pt x="5064803" y="272527"/>
+                  </a:lnTo>
+                  <a:lnTo>
+                    <a:pt x="5135147" y="272768"/>
+                  </a:lnTo>
+                  <a:lnTo>
+                    <a:pt x="5205492" y="273008"/>
+                  </a:lnTo>
+                  <a:lnTo>
+                    <a:pt x="5275836" y="273249"/>
+                  </a:lnTo>
+                  <a:lnTo>
+                    <a:pt x="5346181" y="273489"/>
+                  </a:lnTo>
+                  <a:lnTo>
+                    <a:pt x="5416525" y="273729"/>
+                  </a:lnTo>
+                  <a:lnTo>
+                    <a:pt x="5486870" y="273969"/>
+                  </a:lnTo>
+                  <a:lnTo>
+                    <a:pt x="5557214" y="274208"/>
+                  </a:lnTo>
+                  <a:lnTo>
+                    <a:pt x="5627559" y="274448"/>
+                  </a:lnTo>
+                  <a:lnTo>
+                    <a:pt x="5697903" y="274687"/>
+                  </a:lnTo>
+                  <a:lnTo>
+                    <a:pt x="5768248" y="274926"/>
+                  </a:lnTo>
+                  <a:lnTo>
+                    <a:pt x="5838592" y="275165"/>
+                  </a:lnTo>
+                  <a:lnTo>
+                    <a:pt x="5908937" y="275404"/>
+                  </a:lnTo>
+                  <a:lnTo>
+                    <a:pt x="5979281" y="275642"/>
+                  </a:lnTo>
+                  <a:lnTo>
+                    <a:pt x="6049626" y="275880"/>
+                  </a:lnTo>
+                  <a:lnTo>
+                    <a:pt x="6119970" y="276118"/>
+                  </a:lnTo>
+                  <a:lnTo>
+                    <a:pt x="6190315" y="276356"/>
+                  </a:lnTo>
+                  <a:lnTo>
+                    <a:pt x="6260659" y="276594"/>
+                  </a:lnTo>
+                  <a:lnTo>
+                    <a:pt x="6331004" y="276831"/>
+                  </a:lnTo>
+                  <a:lnTo>
+                    <a:pt x="6401348" y="277068"/>
+                  </a:lnTo>
+                  <a:lnTo>
+                    <a:pt x="6471693" y="277306"/>
+                  </a:lnTo>
+                  <a:lnTo>
+                    <a:pt x="6542037" y="277542"/>
+                  </a:lnTo>
+                  <a:lnTo>
+                    <a:pt x="6612382" y="277779"/>
+                  </a:lnTo>
+                  <a:lnTo>
+                    <a:pt x="6682726" y="278016"/>
+                  </a:lnTo>
+                  <a:lnTo>
+                    <a:pt x="6753071" y="278252"/>
+                  </a:lnTo>
+                  <a:lnTo>
+                    <a:pt x="6823415" y="278488"/>
+                  </a:lnTo>
+                  <a:lnTo>
+                    <a:pt x="6893760" y="278724"/>
+                  </a:lnTo>
+                  <a:lnTo>
+                    <a:pt x="6964104" y="278960"/>
                   </a:lnTo>
                 </a:path>
               </a:pathLst>
@@ -4326,312 +4036,637 @@
           </p:nvSpPr>
           <p:spPr>
             <a:xfrm>
-              <a:off x="1172049" y="4397100"/>
-              <a:ext cx="7090630" cy="618811"/>
+              <a:off x="1235312" y="3090018"/>
+              <a:ext cx="6964104" cy="176822"/>
             </a:xfrm>
             <a:custGeom>
               <a:avLst/>
               <a:pathLst>
-                <a:path w="7090630" h="618811">
+                <a:path w="6964104" h="176822">
+                  <a:moveTo>
+                    <a:pt x="6964104" y="176822"/>
+                  </a:moveTo>
+                  <a:lnTo>
+                    <a:pt x="6893760" y="174863"/>
+                  </a:lnTo>
+                  <a:lnTo>
+                    <a:pt x="6823415" y="172874"/>
+                  </a:lnTo>
+                  <a:lnTo>
+                    <a:pt x="6753071" y="170857"/>
+                  </a:lnTo>
+                  <a:lnTo>
+                    <a:pt x="6682726" y="168810"/>
+                  </a:lnTo>
+                  <a:lnTo>
+                    <a:pt x="6612382" y="166733"/>
+                  </a:lnTo>
+                  <a:lnTo>
+                    <a:pt x="6542037" y="164626"/>
+                  </a:lnTo>
+                  <a:lnTo>
+                    <a:pt x="6471693" y="162487"/>
+                  </a:lnTo>
+                  <a:lnTo>
+                    <a:pt x="6401348" y="160317"/>
+                  </a:lnTo>
+                  <a:lnTo>
+                    <a:pt x="6331004" y="158116"/>
+                  </a:lnTo>
+                  <a:lnTo>
+                    <a:pt x="6260659" y="155882"/>
+                  </a:lnTo>
+                  <a:lnTo>
+                    <a:pt x="6190315" y="153615"/>
+                  </a:lnTo>
+                  <a:lnTo>
+                    <a:pt x="6119970" y="151315"/>
+                  </a:lnTo>
+                  <a:lnTo>
+                    <a:pt x="6049626" y="148981"/>
+                  </a:lnTo>
+                  <a:lnTo>
+                    <a:pt x="5979281" y="146613"/>
+                  </a:lnTo>
+                  <a:lnTo>
+                    <a:pt x="5908937" y="144210"/>
+                  </a:lnTo>
+                  <a:lnTo>
+                    <a:pt x="5838592" y="141772"/>
+                  </a:lnTo>
+                  <a:lnTo>
+                    <a:pt x="5768248" y="139298"/>
+                  </a:lnTo>
+                  <a:lnTo>
+                    <a:pt x="5697903" y="136787"/>
+                  </a:lnTo>
+                  <a:lnTo>
+                    <a:pt x="5627559" y="134240"/>
+                  </a:lnTo>
+                  <a:lnTo>
+                    <a:pt x="5557214" y="131656"/>
+                  </a:lnTo>
+                  <a:lnTo>
+                    <a:pt x="5486870" y="129033"/>
+                  </a:lnTo>
+                  <a:lnTo>
+                    <a:pt x="5416525" y="126372"/>
+                  </a:lnTo>
+                  <a:lnTo>
+                    <a:pt x="5346181" y="123672"/>
+                  </a:lnTo>
+                  <a:lnTo>
+                    <a:pt x="5275836" y="120932"/>
+                  </a:lnTo>
+                  <a:lnTo>
+                    <a:pt x="5205492" y="118153"/>
+                  </a:lnTo>
+                  <a:lnTo>
+                    <a:pt x="5135147" y="115332"/>
+                  </a:lnTo>
+                  <a:lnTo>
+                    <a:pt x="5064803" y="112470"/>
+                  </a:lnTo>
+                  <a:lnTo>
+                    <a:pt x="4994458" y="109565"/>
+                  </a:lnTo>
+                  <a:lnTo>
+                    <a:pt x="4924114" y="106619"/>
+                  </a:lnTo>
+                  <a:lnTo>
+                    <a:pt x="4853769" y="103628"/>
+                  </a:lnTo>
+                  <a:lnTo>
+                    <a:pt x="4783425" y="100594"/>
+                  </a:lnTo>
+                  <a:lnTo>
+                    <a:pt x="4713080" y="97516"/>
+                  </a:lnTo>
+                  <a:lnTo>
+                    <a:pt x="4642736" y="94392"/>
+                  </a:lnTo>
+                  <a:lnTo>
+                    <a:pt x="4572391" y="91223"/>
+                  </a:lnTo>
+                  <a:lnTo>
+                    <a:pt x="4502047" y="88006"/>
+                  </a:lnTo>
+                  <a:lnTo>
+                    <a:pt x="4431702" y="84743"/>
+                  </a:lnTo>
+                  <a:lnTo>
+                    <a:pt x="4361358" y="81432"/>
+                  </a:lnTo>
+                  <a:lnTo>
+                    <a:pt x="4291013" y="78072"/>
+                  </a:lnTo>
+                  <a:lnTo>
+                    <a:pt x="4220669" y="74663"/>
+                  </a:lnTo>
+                  <a:lnTo>
+                    <a:pt x="4150324" y="71203"/>
+                  </a:lnTo>
+                  <a:lnTo>
+                    <a:pt x="4079980" y="67693"/>
+                  </a:lnTo>
+                  <a:lnTo>
+                    <a:pt x="4009635" y="64132"/>
+                  </a:lnTo>
+                  <a:lnTo>
+                    <a:pt x="3939291" y="60518"/>
+                  </a:lnTo>
+                  <a:lnTo>
+                    <a:pt x="3868946" y="56851"/>
+                  </a:lnTo>
+                  <a:lnTo>
+                    <a:pt x="3798602" y="53130"/>
+                  </a:lnTo>
+                  <a:lnTo>
+                    <a:pt x="3728257" y="49355"/>
+                  </a:lnTo>
+                  <a:lnTo>
+                    <a:pt x="3657913" y="45524"/>
+                  </a:lnTo>
+                  <a:lnTo>
+                    <a:pt x="3587569" y="41637"/>
+                  </a:lnTo>
+                  <a:lnTo>
+                    <a:pt x="3517224" y="37693"/>
+                  </a:lnTo>
+                  <a:lnTo>
+                    <a:pt x="3446880" y="33691"/>
+                  </a:lnTo>
+                  <a:lnTo>
+                    <a:pt x="3376535" y="29630"/>
+                  </a:lnTo>
+                  <a:lnTo>
+                    <a:pt x="3306191" y="25509"/>
+                  </a:lnTo>
+                  <a:lnTo>
+                    <a:pt x="3235846" y="21328"/>
+                  </a:lnTo>
+                  <a:lnTo>
+                    <a:pt x="3165502" y="17086"/>
+                  </a:lnTo>
+                  <a:lnTo>
+                    <a:pt x="3095157" y="12781"/>
+                  </a:lnTo>
+                  <a:lnTo>
+                    <a:pt x="3024813" y="10799"/>
+                  </a:lnTo>
+                  <a:lnTo>
+                    <a:pt x="2954468" y="10552"/>
+                  </a:lnTo>
+                  <a:lnTo>
+                    <a:pt x="2884124" y="10305"/>
+                  </a:lnTo>
+                  <a:lnTo>
+                    <a:pt x="2813779" y="10058"/>
+                  </a:lnTo>
+                  <a:lnTo>
+                    <a:pt x="2743435" y="9811"/>
+                  </a:lnTo>
+                  <a:lnTo>
+                    <a:pt x="2673090" y="9563"/>
+                  </a:lnTo>
+                  <a:lnTo>
+                    <a:pt x="2602746" y="9315"/>
+                  </a:lnTo>
+                  <a:lnTo>
+                    <a:pt x="2532401" y="9067"/>
+                  </a:lnTo>
+                  <a:lnTo>
+                    <a:pt x="2462057" y="8819"/>
+                  </a:lnTo>
+                  <a:lnTo>
+                    <a:pt x="2391712" y="8570"/>
+                  </a:lnTo>
+                  <a:lnTo>
+                    <a:pt x="2321368" y="8322"/>
+                  </a:lnTo>
+                  <a:lnTo>
+                    <a:pt x="2251023" y="8073"/>
+                  </a:lnTo>
+                  <a:lnTo>
+                    <a:pt x="2180679" y="7824"/>
+                  </a:lnTo>
+                  <a:lnTo>
+                    <a:pt x="2110334" y="7574"/>
+                  </a:lnTo>
+                  <a:lnTo>
+                    <a:pt x="2039990" y="7325"/>
+                  </a:lnTo>
+                  <a:lnTo>
+                    <a:pt x="1969645" y="7075"/>
+                  </a:lnTo>
+                  <a:lnTo>
+                    <a:pt x="1899301" y="6825"/>
+                  </a:lnTo>
+                  <a:lnTo>
+                    <a:pt x="1828956" y="6575"/>
+                  </a:lnTo>
+                  <a:lnTo>
+                    <a:pt x="1758612" y="6325"/>
+                  </a:lnTo>
+                  <a:lnTo>
+                    <a:pt x="1688267" y="6074"/>
+                  </a:lnTo>
+                  <a:lnTo>
+                    <a:pt x="1617923" y="5824"/>
+                  </a:lnTo>
+                  <a:lnTo>
+                    <a:pt x="1547578" y="5573"/>
+                  </a:lnTo>
+                  <a:lnTo>
+                    <a:pt x="1477234" y="5322"/>
+                  </a:lnTo>
+                  <a:lnTo>
+                    <a:pt x="1406889" y="5070"/>
+                  </a:lnTo>
+                  <a:lnTo>
+                    <a:pt x="1336545" y="4819"/>
+                  </a:lnTo>
+                  <a:lnTo>
+                    <a:pt x="1266200" y="4567"/>
+                  </a:lnTo>
+                  <a:lnTo>
+                    <a:pt x="1195856" y="4315"/>
+                  </a:lnTo>
+                  <a:lnTo>
+                    <a:pt x="1125511" y="4063"/>
+                  </a:lnTo>
+                  <a:lnTo>
+                    <a:pt x="1055167" y="3810"/>
+                  </a:lnTo>
+                  <a:lnTo>
+                    <a:pt x="984822" y="3558"/>
+                  </a:lnTo>
+                  <a:lnTo>
+                    <a:pt x="914478" y="3305"/>
+                  </a:lnTo>
+                  <a:lnTo>
+                    <a:pt x="844133" y="3052"/>
+                  </a:lnTo>
+                  <a:lnTo>
+                    <a:pt x="773789" y="2799"/>
+                  </a:lnTo>
+                  <a:lnTo>
+                    <a:pt x="703444" y="2545"/>
+                  </a:lnTo>
+                  <a:lnTo>
+                    <a:pt x="633100" y="2292"/>
+                  </a:lnTo>
+                  <a:lnTo>
+                    <a:pt x="562755" y="2038"/>
+                  </a:lnTo>
+                  <a:lnTo>
+                    <a:pt x="492411" y="1784"/>
+                  </a:lnTo>
+                  <a:lnTo>
+                    <a:pt x="422066" y="1530"/>
+                  </a:lnTo>
+                  <a:lnTo>
+                    <a:pt x="351722" y="1275"/>
+                  </a:lnTo>
+                  <a:lnTo>
+                    <a:pt x="281377" y="1020"/>
+                  </a:lnTo>
+                  <a:lnTo>
+                    <a:pt x="211033" y="765"/>
+                  </a:lnTo>
+                  <a:lnTo>
+                    <a:pt x="140688" y="510"/>
+                  </a:lnTo>
+                  <a:lnTo>
+                    <a:pt x="70344" y="255"/>
+                  </a:lnTo>
+                  <a:lnTo>
+                    <a:pt x="0" y="0"/>
+                  </a:lnTo>
+                </a:path>
+              </a:pathLst>
+            </a:custGeom>
+          </p:spPr>
+          <p:txBody>
+            <a:bodyPr/>
+            <a:lstStyle/>
+            <a:p/>
+          </p:txBody>
+        </p:sp>
+        <p:sp>
+          <p:nvSpPr>
+            <p:cNvPr id="26" name="pl26"/>
+            <p:cNvSpPr/>
+            <p:nvPr/>
+          </p:nvSpPr>
+          <p:spPr>
+            <a:xfrm>
+              <a:off x="1235312" y="2981623"/>
+              <a:ext cx="6964104" cy="223314"/>
+            </a:xfrm>
+            <a:custGeom>
+              <a:avLst/>
+              <a:pathLst>
+                <a:path w="6964104" h="223314">
                   <a:moveTo>
                     <a:pt x="0" y="0"/>
                   </a:moveTo>
                   <a:lnTo>
-                    <a:pt x="71622" y="8898"/>
-                  </a:lnTo>
-                  <a:lnTo>
-                    <a:pt x="143245" y="17728"/>
-                  </a:lnTo>
-                  <a:lnTo>
-                    <a:pt x="214867" y="26490"/>
-                  </a:lnTo>
-                  <a:lnTo>
-                    <a:pt x="286490" y="35186"/>
-                  </a:lnTo>
-                  <a:lnTo>
-                    <a:pt x="358112" y="43814"/>
-                  </a:lnTo>
-                  <a:lnTo>
-                    <a:pt x="429735" y="52376"/>
-                  </a:lnTo>
-                  <a:lnTo>
-                    <a:pt x="501357" y="60873"/>
-                  </a:lnTo>
-                  <a:lnTo>
-                    <a:pt x="572980" y="69305"/>
-                  </a:lnTo>
-                  <a:lnTo>
-                    <a:pt x="644602" y="77671"/>
-                  </a:lnTo>
-                  <a:lnTo>
-                    <a:pt x="716225" y="85974"/>
-                  </a:lnTo>
-                  <a:lnTo>
-                    <a:pt x="787847" y="94213"/>
-                  </a:lnTo>
-                  <a:lnTo>
-                    <a:pt x="859470" y="102389"/>
-                  </a:lnTo>
-                  <a:lnTo>
-                    <a:pt x="931092" y="110502"/>
-                  </a:lnTo>
-                  <a:lnTo>
-                    <a:pt x="1002715" y="118553"/>
-                  </a:lnTo>
-                  <a:lnTo>
-                    <a:pt x="1074337" y="126542"/>
-                  </a:lnTo>
-                  <a:lnTo>
-                    <a:pt x="1145960" y="134469"/>
-                  </a:lnTo>
-                  <a:lnTo>
-                    <a:pt x="1217582" y="142336"/>
-                  </a:lnTo>
-                  <a:lnTo>
-                    <a:pt x="1289205" y="150143"/>
-                  </a:lnTo>
-                  <a:lnTo>
-                    <a:pt x="1360827" y="157890"/>
-                  </a:lnTo>
-                  <a:lnTo>
-                    <a:pt x="1432450" y="165577"/>
-                  </a:lnTo>
-                  <a:lnTo>
-                    <a:pt x="1504073" y="173206"/>
-                  </a:lnTo>
-                  <a:lnTo>
-                    <a:pt x="1575695" y="180775"/>
-                  </a:lnTo>
-                  <a:lnTo>
-                    <a:pt x="1647318" y="188287"/>
-                  </a:lnTo>
-                  <a:lnTo>
-                    <a:pt x="1718940" y="195741"/>
-                  </a:lnTo>
-                  <a:lnTo>
-                    <a:pt x="1790563" y="203139"/>
-                  </a:lnTo>
-                  <a:lnTo>
-                    <a:pt x="1862185" y="210479"/>
-                  </a:lnTo>
-                  <a:lnTo>
-                    <a:pt x="1933808" y="217763"/>
-                  </a:lnTo>
-                  <a:lnTo>
-                    <a:pt x="2005430" y="224991"/>
-                  </a:lnTo>
-                  <a:lnTo>
-                    <a:pt x="2077053" y="232164"/>
-                  </a:lnTo>
-                  <a:lnTo>
-                    <a:pt x="2148675" y="239281"/>
-                  </a:lnTo>
-                  <a:lnTo>
-                    <a:pt x="2220298" y="246344"/>
-                  </a:lnTo>
-                  <a:lnTo>
-                    <a:pt x="2291920" y="253353"/>
-                  </a:lnTo>
-                  <a:lnTo>
-                    <a:pt x="2363543" y="260308"/>
-                  </a:lnTo>
-                  <a:lnTo>
-                    <a:pt x="2435165" y="267210"/>
-                  </a:lnTo>
-                  <a:lnTo>
-                    <a:pt x="2506788" y="274059"/>
-                  </a:lnTo>
-                  <a:lnTo>
-                    <a:pt x="2578410" y="280855"/>
-                  </a:lnTo>
-                  <a:lnTo>
-                    <a:pt x="2650033" y="287600"/>
-                  </a:lnTo>
-                  <a:lnTo>
-                    <a:pt x="2721655" y="294292"/>
-                  </a:lnTo>
-                  <a:lnTo>
-                    <a:pt x="2793278" y="300933"/>
-                  </a:lnTo>
-                  <a:lnTo>
-                    <a:pt x="2864901" y="307523"/>
-                  </a:lnTo>
-                  <a:lnTo>
-                    <a:pt x="2936523" y="314063"/>
-                  </a:lnTo>
-                  <a:lnTo>
-                    <a:pt x="3008146" y="320553"/>
-                  </a:lnTo>
-                  <a:lnTo>
-                    <a:pt x="3079768" y="326992"/>
-                  </a:lnTo>
-                  <a:lnTo>
-                    <a:pt x="3151391" y="333383"/>
-                  </a:lnTo>
-                  <a:lnTo>
-                    <a:pt x="3223013" y="339724"/>
-                  </a:lnTo>
-                  <a:lnTo>
-                    <a:pt x="3294636" y="346017"/>
-                  </a:lnTo>
-                  <a:lnTo>
-                    <a:pt x="3366258" y="352261"/>
-                  </a:lnTo>
-                  <a:lnTo>
-                    <a:pt x="3437881" y="358458"/>
-                  </a:lnTo>
-                  <a:lnTo>
-                    <a:pt x="3509503" y="364607"/>
-                  </a:lnTo>
-                  <a:lnTo>
-                    <a:pt x="3581126" y="370708"/>
-                  </a:lnTo>
-                  <a:lnTo>
-                    <a:pt x="3652748" y="376763"/>
-                  </a:lnTo>
-                  <a:lnTo>
-                    <a:pt x="3724371" y="382772"/>
-                  </a:lnTo>
-                  <a:lnTo>
-                    <a:pt x="3795993" y="388735"/>
-                  </a:lnTo>
-                  <a:lnTo>
-                    <a:pt x="3867616" y="394651"/>
-                  </a:lnTo>
-                  <a:lnTo>
-                    <a:pt x="3939238" y="400523"/>
-                  </a:lnTo>
-                  <a:lnTo>
-                    <a:pt x="4010861" y="406349"/>
-                  </a:lnTo>
-                  <a:lnTo>
-                    <a:pt x="4082483" y="412131"/>
-                  </a:lnTo>
-                  <a:lnTo>
-                    <a:pt x="4154106" y="417868"/>
-                  </a:lnTo>
-                  <a:lnTo>
-                    <a:pt x="4225729" y="423561"/>
-                  </a:lnTo>
-                  <a:lnTo>
-                    <a:pt x="4297351" y="429211"/>
-                  </a:lnTo>
-                  <a:lnTo>
-                    <a:pt x="4368974" y="434817"/>
-                  </a:lnTo>
-                  <a:lnTo>
-                    <a:pt x="4440596" y="440381"/>
-                  </a:lnTo>
-                  <a:lnTo>
-                    <a:pt x="4512219" y="445901"/>
-                  </a:lnTo>
-                  <a:lnTo>
-                    <a:pt x="4583841" y="451380"/>
-                  </a:lnTo>
-                  <a:lnTo>
-                    <a:pt x="4655464" y="456816"/>
-                  </a:lnTo>
-                  <a:lnTo>
-                    <a:pt x="4727086" y="462210"/>
-                  </a:lnTo>
-                  <a:lnTo>
-                    <a:pt x="4798709" y="467564"/>
-                  </a:lnTo>
-                  <a:lnTo>
-                    <a:pt x="4870331" y="472876"/>
-                  </a:lnTo>
-                  <a:lnTo>
-                    <a:pt x="4941954" y="478147"/>
-                  </a:lnTo>
-                  <a:lnTo>
-                    <a:pt x="5013576" y="483378"/>
-                  </a:lnTo>
-                  <a:lnTo>
-                    <a:pt x="5085199" y="488569"/>
-                  </a:lnTo>
-                  <a:lnTo>
-                    <a:pt x="5156821" y="493720"/>
-                  </a:lnTo>
-                  <a:lnTo>
-                    <a:pt x="5228444" y="498832"/>
-                  </a:lnTo>
-                  <a:lnTo>
-                    <a:pt x="5300066" y="503904"/>
-                  </a:lnTo>
-                  <a:lnTo>
-                    <a:pt x="5371689" y="508937"/>
-                  </a:lnTo>
-                  <a:lnTo>
-                    <a:pt x="5443311" y="513932"/>
-                  </a:lnTo>
-                  <a:lnTo>
-                    <a:pt x="5514934" y="518889"/>
-                  </a:lnTo>
-                  <a:lnTo>
-                    <a:pt x="5586557" y="523807"/>
-                  </a:lnTo>
-                  <a:lnTo>
-                    <a:pt x="5658179" y="528688"/>
-                  </a:lnTo>
-                  <a:lnTo>
-                    <a:pt x="5729802" y="533531"/>
-                  </a:lnTo>
-                  <a:lnTo>
-                    <a:pt x="5801424" y="538337"/>
-                  </a:lnTo>
-                  <a:lnTo>
-                    <a:pt x="5873047" y="543107"/>
-                  </a:lnTo>
-                  <a:lnTo>
-                    <a:pt x="5944669" y="547839"/>
-                  </a:lnTo>
-                  <a:lnTo>
-                    <a:pt x="6016292" y="552536"/>
-                  </a:lnTo>
-                  <a:lnTo>
-                    <a:pt x="6087914" y="557196"/>
-                  </a:lnTo>
-                  <a:lnTo>
-                    <a:pt x="6159537" y="561821"/>
-                  </a:lnTo>
-                  <a:lnTo>
-                    <a:pt x="6231159" y="566410"/>
-                  </a:lnTo>
-                  <a:lnTo>
-                    <a:pt x="6302782" y="570964"/>
-                  </a:lnTo>
-                  <a:lnTo>
-                    <a:pt x="6374404" y="575483"/>
-                  </a:lnTo>
-                  <a:lnTo>
-                    <a:pt x="6446027" y="579968"/>
-                  </a:lnTo>
-                  <a:lnTo>
-                    <a:pt x="6517649" y="584418"/>
-                  </a:lnTo>
-                  <a:lnTo>
-                    <a:pt x="6589272" y="588833"/>
-                  </a:lnTo>
-                  <a:lnTo>
-                    <a:pt x="6660894" y="593215"/>
-                  </a:lnTo>
-                  <a:lnTo>
-                    <a:pt x="6732517" y="597564"/>
-                  </a:lnTo>
-                  <a:lnTo>
-                    <a:pt x="6804139" y="601879"/>
-                  </a:lnTo>
-                  <a:lnTo>
-                    <a:pt x="6875762" y="606161"/>
-                  </a:lnTo>
-                  <a:lnTo>
-                    <a:pt x="6947385" y="610410"/>
-                  </a:lnTo>
-                  <a:lnTo>
-                    <a:pt x="7019007" y="614626"/>
-                  </a:lnTo>
-                  <a:lnTo>
-                    <a:pt x="7090630" y="618811"/>
+                    <a:pt x="70344" y="3211"/>
+                  </a:lnTo>
+                  <a:lnTo>
+                    <a:pt x="140688" y="6397"/>
+                  </a:lnTo>
+                  <a:lnTo>
+                    <a:pt x="211033" y="9559"/>
+                  </a:lnTo>
+                  <a:lnTo>
+                    <a:pt x="281377" y="12697"/>
+                  </a:lnTo>
+                  <a:lnTo>
+                    <a:pt x="351722" y="15811"/>
+                  </a:lnTo>
+                  <a:lnTo>
+                    <a:pt x="422066" y="18901"/>
+                  </a:lnTo>
+                  <a:lnTo>
+                    <a:pt x="492411" y="21967"/>
+                  </a:lnTo>
+                  <a:lnTo>
+                    <a:pt x="562755" y="25010"/>
+                  </a:lnTo>
+                  <a:lnTo>
+                    <a:pt x="633100" y="28029"/>
+                  </a:lnTo>
+                  <a:lnTo>
+                    <a:pt x="703444" y="31026"/>
+                  </a:lnTo>
+                  <a:lnTo>
+                    <a:pt x="773789" y="33999"/>
+                  </a:lnTo>
+                  <a:lnTo>
+                    <a:pt x="844133" y="36949"/>
+                  </a:lnTo>
+                  <a:lnTo>
+                    <a:pt x="914478" y="39877"/>
+                  </a:lnTo>
+                  <a:lnTo>
+                    <a:pt x="984822" y="42783"/>
+                  </a:lnTo>
+                  <a:lnTo>
+                    <a:pt x="1055167" y="45666"/>
+                  </a:lnTo>
+                  <a:lnTo>
+                    <a:pt x="1125511" y="48527"/>
+                  </a:lnTo>
+                  <a:lnTo>
+                    <a:pt x="1195856" y="51366"/>
+                  </a:lnTo>
+                  <a:lnTo>
+                    <a:pt x="1266200" y="54183"/>
+                  </a:lnTo>
+                  <a:lnTo>
+                    <a:pt x="1336545" y="56978"/>
+                  </a:lnTo>
+                  <a:lnTo>
+                    <a:pt x="1406889" y="59753"/>
+                  </a:lnTo>
+                  <a:lnTo>
+                    <a:pt x="1477234" y="62505"/>
+                  </a:lnTo>
+                  <a:lnTo>
+                    <a:pt x="1547578" y="65237"/>
+                  </a:lnTo>
+                  <a:lnTo>
+                    <a:pt x="1617923" y="67948"/>
+                  </a:lnTo>
+                  <a:lnTo>
+                    <a:pt x="1688267" y="70638"/>
+                  </a:lnTo>
+                  <a:lnTo>
+                    <a:pt x="1758612" y="73308"/>
+                  </a:lnTo>
+                  <a:lnTo>
+                    <a:pt x="1828956" y="75957"/>
+                  </a:lnTo>
+                  <a:lnTo>
+                    <a:pt x="1899301" y="78585"/>
+                  </a:lnTo>
+                  <a:lnTo>
+                    <a:pt x="1969645" y="81194"/>
+                  </a:lnTo>
+                  <a:lnTo>
+                    <a:pt x="2039990" y="83782"/>
+                  </a:lnTo>
+                  <a:lnTo>
+                    <a:pt x="2110334" y="86351"/>
+                  </a:lnTo>
+                  <a:lnTo>
+                    <a:pt x="2180679" y="88900"/>
+                  </a:lnTo>
+                  <a:lnTo>
+                    <a:pt x="2251023" y="91429"/>
+                  </a:lnTo>
+                  <a:lnTo>
+                    <a:pt x="2321368" y="93939"/>
+                  </a:lnTo>
+                  <a:lnTo>
+                    <a:pt x="2391712" y="96430"/>
+                  </a:lnTo>
+                  <a:lnTo>
+                    <a:pt x="2462057" y="98901"/>
+                  </a:lnTo>
+                  <a:lnTo>
+                    <a:pt x="2532401" y="101354"/>
+                  </a:lnTo>
+                  <a:lnTo>
+                    <a:pt x="2602746" y="103788"/>
+                  </a:lnTo>
+                  <a:lnTo>
+                    <a:pt x="2673090" y="106203"/>
+                  </a:lnTo>
+                  <a:lnTo>
+                    <a:pt x="2743435" y="108599"/>
+                  </a:lnTo>
+                  <a:lnTo>
+                    <a:pt x="2813779" y="110978"/>
+                  </a:lnTo>
+                  <a:lnTo>
+                    <a:pt x="2884124" y="113338"/>
+                  </a:lnTo>
+                  <a:lnTo>
+                    <a:pt x="2954468" y="115680"/>
+                  </a:lnTo>
+                  <a:lnTo>
+                    <a:pt x="3024813" y="118004"/>
+                  </a:lnTo>
+                  <a:lnTo>
+                    <a:pt x="3095157" y="120310"/>
+                  </a:lnTo>
+                  <a:lnTo>
+                    <a:pt x="3165502" y="122598"/>
+                  </a:lnTo>
+                  <a:lnTo>
+                    <a:pt x="3235846" y="124869"/>
+                  </a:lnTo>
+                  <a:lnTo>
+                    <a:pt x="3306191" y="127122"/>
+                  </a:lnTo>
+                  <a:lnTo>
+                    <a:pt x="3376535" y="129359"/>
+                  </a:lnTo>
+                  <a:lnTo>
+                    <a:pt x="3446880" y="131578"/>
+                  </a:lnTo>
+                  <a:lnTo>
+                    <a:pt x="3517224" y="133780"/>
+                  </a:lnTo>
+                  <a:lnTo>
+                    <a:pt x="3587569" y="135965"/>
+                  </a:lnTo>
+                  <a:lnTo>
+                    <a:pt x="3657913" y="138133"/>
+                  </a:lnTo>
+                  <a:lnTo>
+                    <a:pt x="3728257" y="140285"/>
+                  </a:lnTo>
+                  <a:lnTo>
+                    <a:pt x="3798602" y="142420"/>
+                  </a:lnTo>
+                  <a:lnTo>
+                    <a:pt x="3868946" y="144539"/>
+                  </a:lnTo>
+                  <a:lnTo>
+                    <a:pt x="3939291" y="146641"/>
+                  </a:lnTo>
+                  <a:lnTo>
+                    <a:pt x="4009635" y="148728"/>
+                  </a:lnTo>
+                  <a:lnTo>
+                    <a:pt x="4079980" y="150798"/>
+                  </a:lnTo>
+                  <a:lnTo>
+                    <a:pt x="4150324" y="152853"/>
+                  </a:lnTo>
+                  <a:lnTo>
+                    <a:pt x="4220669" y="154892"/>
+                  </a:lnTo>
+                  <a:lnTo>
+                    <a:pt x="4291013" y="156915"/>
+                  </a:lnTo>
+                  <a:lnTo>
+                    <a:pt x="4361358" y="158923"/>
+                  </a:lnTo>
+                  <a:lnTo>
+                    <a:pt x="4431702" y="160915"/>
+                  </a:lnTo>
+                  <a:lnTo>
+                    <a:pt x="4502047" y="162892"/>
+                  </a:lnTo>
+                  <a:lnTo>
+                    <a:pt x="4572391" y="164854"/>
+                  </a:lnTo>
+                  <a:lnTo>
+                    <a:pt x="4642736" y="166801"/>
+                  </a:lnTo>
+                  <a:lnTo>
+                    <a:pt x="4713080" y="168732"/>
+                  </a:lnTo>
+                  <a:lnTo>
+                    <a:pt x="4783425" y="170649"/>
+                  </a:lnTo>
+                  <a:lnTo>
+                    <a:pt x="4853769" y="172552"/>
+                  </a:lnTo>
+                  <a:lnTo>
+                    <a:pt x="4924114" y="174439"/>
+                  </a:lnTo>
+                  <a:lnTo>
+                    <a:pt x="4994458" y="176313"/>
+                  </a:lnTo>
+                  <a:lnTo>
+                    <a:pt x="5064803" y="178172"/>
+                  </a:lnTo>
+                  <a:lnTo>
+                    <a:pt x="5135147" y="180016"/>
+                  </a:lnTo>
+                  <a:lnTo>
+                    <a:pt x="5205492" y="181847"/>
+                  </a:lnTo>
+                  <a:lnTo>
+                    <a:pt x="5275836" y="183663"/>
+                  </a:lnTo>
+                  <a:lnTo>
+                    <a:pt x="5346181" y="185466"/>
+                  </a:lnTo>
+                  <a:lnTo>
+                    <a:pt x="5416525" y="187254"/>
+                  </a:lnTo>
+                  <a:lnTo>
+                    <a:pt x="5486870" y="189029"/>
+                  </a:lnTo>
+                  <a:lnTo>
+                    <a:pt x="5557214" y="190791"/>
+                  </a:lnTo>
+                  <a:lnTo>
+                    <a:pt x="5627559" y="192539"/>
+                  </a:lnTo>
+                  <a:lnTo>
+                    <a:pt x="5697903" y="194273"/>
+                  </a:lnTo>
+                  <a:lnTo>
+                    <a:pt x="5768248" y="195994"/>
+                  </a:lnTo>
+                  <a:lnTo>
+                    <a:pt x="5838592" y="197702"/>
+                  </a:lnTo>
+                  <a:lnTo>
+                    <a:pt x="5908937" y="199397"/>
+                  </a:lnTo>
+                  <a:lnTo>
+                    <a:pt x="5979281" y="201079"/>
+                  </a:lnTo>
+                  <a:lnTo>
+                    <a:pt x="6049626" y="202748"/>
+                  </a:lnTo>
+                  <a:lnTo>
+                    <a:pt x="6119970" y="204404"/>
+                  </a:lnTo>
+                  <a:lnTo>
+                    <a:pt x="6190315" y="206047"/>
+                  </a:lnTo>
+                  <a:lnTo>
+                    <a:pt x="6260659" y="207678"/>
+                  </a:lnTo>
+                  <a:lnTo>
+                    <a:pt x="6331004" y="209296"/>
+                  </a:lnTo>
+                  <a:lnTo>
+                    <a:pt x="6401348" y="210902"/>
+                  </a:lnTo>
+                  <a:lnTo>
+                    <a:pt x="6471693" y="212496"/>
+                  </a:lnTo>
+                  <a:lnTo>
+                    <a:pt x="6542037" y="214077"/>
+                  </a:lnTo>
+                  <a:lnTo>
+                    <a:pt x="6612382" y="215646"/>
+                  </a:lnTo>
+                  <a:lnTo>
+                    <a:pt x="6682726" y="217204"/>
+                  </a:lnTo>
+                  <a:lnTo>
+                    <a:pt x="6753071" y="218749"/>
+                  </a:lnTo>
+                  <a:lnTo>
+                    <a:pt x="6823415" y="220282"/>
+                  </a:lnTo>
+                  <a:lnTo>
+                    <a:pt x="6893760" y="221804"/>
+                  </a:lnTo>
+                  <a:lnTo>
+                    <a:pt x="6964104" y="223314"/>
                   </a:lnTo>
                 </a:path>
               </a:pathLst>
@@ -4654,27 +4689,27 @@
         </p:sp>
         <p:sp>
           <p:nvSpPr>
-            <p:cNvPr id="26" name="pl26"/>
+            <p:cNvPr id="27" name="pl27"/>
             <p:cNvSpPr/>
             <p:nvPr/>
           </p:nvSpPr>
           <p:spPr>
             <a:xfrm>
-              <a:off x="817517" y="4727786"/>
-              <a:ext cx="7799693" cy="0"/>
+              <a:off x="887106" y="3100960"/>
+              <a:ext cx="7660515" cy="0"/>
             </a:xfrm>
             <a:custGeom>
               <a:avLst/>
               <a:pathLst>
-                <a:path w="7799693" h="0">
+                <a:path w="7660515" h="0">
                   <a:moveTo>
                     <a:pt x="0" y="0"/>
                   </a:moveTo>
                   <a:lnTo>
-                    <a:pt x="7799693" y="0"/>
-                  </a:lnTo>
-                  <a:lnTo>
-                    <a:pt x="7799693" y="0"/>
+                    <a:pt x="7660515" y="0"/>
+                  </a:lnTo>
+                  <a:lnTo>
+                    <a:pt x="7660515" y="0"/>
                   </a:lnTo>
                 </a:path>
               </a:pathLst>
@@ -4697,21 +4732,21 @@
         </p:sp>
         <p:sp>
           <p:nvSpPr>
-            <p:cNvPr id="27" name="pl27"/>
+            <p:cNvPr id="28" name="pl28"/>
             <p:cNvSpPr/>
             <p:nvPr/>
           </p:nvSpPr>
           <p:spPr>
             <a:xfrm>
-              <a:off x="4293144" y="2073503"/>
-              <a:ext cx="0" cy="3649639"/>
+              <a:off x="4300713" y="2143092"/>
+              <a:ext cx="0" cy="1317069"/>
             </a:xfrm>
             <a:custGeom>
               <a:avLst/>
               <a:pathLst>
-                <a:path w="0" h="3649639">
+                <a:path w="0" h="1317069">
                   <a:moveTo>
-                    <a:pt x="0" y="3649639"/>
+                    <a:pt x="0" y="1317069"/>
                   </a:moveTo>
                   <a:lnTo>
                     <a:pt x="0" y="0"/>
@@ -4740,21 +4775,21 @@
         </p:sp>
         <p:sp>
           <p:nvSpPr>
-            <p:cNvPr id="28" name="pl28"/>
+            <p:cNvPr id="29" name="pl29"/>
             <p:cNvSpPr/>
             <p:nvPr/>
           </p:nvSpPr>
           <p:spPr>
             <a:xfrm>
-              <a:off x="3074393" y="2073503"/>
-              <a:ext cx="0" cy="3649639"/>
+              <a:off x="3103710" y="2143092"/>
+              <a:ext cx="0" cy="1317069"/>
             </a:xfrm>
             <a:custGeom>
               <a:avLst/>
               <a:pathLst>
-                <a:path w="0" h="3649639">
+                <a:path w="0" h="1317069">
                   <a:moveTo>
-                    <a:pt x="0" y="3649639"/>
+                    <a:pt x="0" y="1317069"/>
                   </a:moveTo>
                   <a:lnTo>
                     <a:pt x="0" y="0"/>
@@ -4783,21 +4818,21 @@
         </p:sp>
         <p:sp>
           <p:nvSpPr>
-            <p:cNvPr id="29" name="pl29"/>
+            <p:cNvPr id="30" name="pl30"/>
             <p:cNvSpPr/>
             <p:nvPr/>
           </p:nvSpPr>
           <p:spPr>
             <a:xfrm>
-              <a:off x="5518580" y="2073503"/>
-              <a:ext cx="0" cy="3649639"/>
+              <a:off x="5504283" y="2143092"/>
+              <a:ext cx="0" cy="1317069"/>
             </a:xfrm>
             <a:custGeom>
               <a:avLst/>
               <a:pathLst>
-                <a:path w="0" h="3649639">
+                <a:path w="0" h="1317069">
                   <a:moveTo>
-                    <a:pt x="0" y="3649639"/>
+                    <a:pt x="0" y="1317069"/>
                   </a:moveTo>
                   <a:lnTo>
                     <a:pt x="0" y="0"/>
@@ -4826,13 +4861,13 @@
         </p:sp>
         <p:sp>
           <p:nvSpPr>
-            <p:cNvPr id="30" name="tx30"/>
+            <p:cNvPr id="31" name="tx31"/>
             <p:cNvSpPr/>
             <p:nvPr/>
           </p:nvSpPr>
           <p:spPr>
             <a:xfrm>
-              <a:off x="692708" y="5517199"/>
+              <a:off x="762297" y="3360243"/>
               <a:ext cx="62179" cy="80101"/>
             </a:xfrm>
             <a:prstGeom prst="rect">
@@ -4872,13 +4907,13 @@
         </p:sp>
         <p:sp>
           <p:nvSpPr>
-            <p:cNvPr id="31" name="tx31"/>
+            <p:cNvPr id="32" name="tx32"/>
             <p:cNvSpPr/>
             <p:nvPr/>
           </p:nvSpPr>
           <p:spPr>
             <a:xfrm>
-              <a:off x="692708" y="4687735"/>
+              <a:off x="762297" y="3060909"/>
               <a:ext cx="62179" cy="80101"/>
             </a:xfrm>
             <a:prstGeom prst="rect">
@@ -4918,13 +4953,13 @@
         </p:sp>
         <p:sp>
           <p:nvSpPr>
-            <p:cNvPr id="32" name="tx32"/>
+            <p:cNvPr id="33" name="tx33"/>
             <p:cNvSpPr/>
             <p:nvPr/>
           </p:nvSpPr>
           <p:spPr>
             <a:xfrm>
-              <a:off x="692708" y="3858272"/>
+              <a:off x="762297" y="2761575"/>
               <a:ext cx="62179" cy="80101"/>
             </a:xfrm>
             <a:prstGeom prst="rect">
@@ -4964,13 +4999,13 @@
         </p:sp>
         <p:sp>
           <p:nvSpPr>
-            <p:cNvPr id="33" name="tx33"/>
+            <p:cNvPr id="34" name="tx34"/>
             <p:cNvSpPr/>
             <p:nvPr/>
           </p:nvSpPr>
           <p:spPr>
             <a:xfrm>
-              <a:off x="692708" y="3028808"/>
+              <a:off x="762297" y="2462242"/>
               <a:ext cx="62179" cy="80101"/>
             </a:xfrm>
             <a:prstGeom prst="rect">
@@ -5010,13 +5045,13 @@
         </p:sp>
         <p:sp>
           <p:nvSpPr>
-            <p:cNvPr id="34" name="tx34"/>
+            <p:cNvPr id="35" name="tx35"/>
             <p:cNvSpPr/>
             <p:nvPr/>
           </p:nvSpPr>
           <p:spPr>
             <a:xfrm>
-              <a:off x="692708" y="2199345"/>
+              <a:off x="762297" y="2162908"/>
               <a:ext cx="62179" cy="80101"/>
             </a:xfrm>
             <a:prstGeom prst="rect">
@@ -5056,13 +5091,13 @@
         </p:sp>
         <p:sp>
           <p:nvSpPr>
-            <p:cNvPr id="35" name="tx35"/>
+            <p:cNvPr id="36" name="tx36"/>
             <p:cNvSpPr/>
             <p:nvPr/>
           </p:nvSpPr>
           <p:spPr>
             <a:xfrm>
-              <a:off x="2134610" y="5785772"/>
+              <a:off x="2179256" y="3522791"/>
               <a:ext cx="161574" cy="80101"/>
             </a:xfrm>
             <a:prstGeom prst="rect">
@@ -5102,13 +5137,13 @@
         </p:sp>
         <p:sp>
           <p:nvSpPr>
-            <p:cNvPr id="36" name="tx36"/>
+            <p:cNvPr id="37" name="tx37"/>
             <p:cNvSpPr/>
             <p:nvPr/>
           </p:nvSpPr>
           <p:spPr>
             <a:xfrm>
-              <a:off x="3875731" y="5785772"/>
+              <a:off x="3889308" y="3522791"/>
               <a:ext cx="161574" cy="80101"/>
             </a:xfrm>
             <a:prstGeom prst="rect">
@@ -5148,13 +5183,13 @@
         </p:sp>
         <p:sp>
           <p:nvSpPr>
-            <p:cNvPr id="37" name="tx37"/>
+            <p:cNvPr id="38" name="tx38"/>
             <p:cNvSpPr/>
             <p:nvPr/>
           </p:nvSpPr>
           <p:spPr>
             <a:xfrm>
-              <a:off x="5666549" y="5785772"/>
+              <a:off x="5649057" y="3522791"/>
               <a:ext cx="62179" cy="80101"/>
             </a:xfrm>
             <a:prstGeom prst="rect">
@@ -5194,13 +5229,13 @@
         </p:sp>
         <p:sp>
           <p:nvSpPr>
-            <p:cNvPr id="38" name="tx38"/>
+            <p:cNvPr id="39" name="tx39"/>
             <p:cNvSpPr/>
             <p:nvPr/>
           </p:nvSpPr>
           <p:spPr>
             <a:xfrm>
-              <a:off x="7376580" y="5785772"/>
+              <a:off x="7328020" y="3522791"/>
               <a:ext cx="124358" cy="80101"/>
             </a:xfrm>
             <a:prstGeom prst="rect">
@@ -5240,13 +5275,13 @@
         </p:sp>
         <p:sp>
           <p:nvSpPr>
-            <p:cNvPr id="39" name="tx39"/>
+            <p:cNvPr id="40" name="tx40"/>
             <p:cNvSpPr/>
             <p:nvPr/>
           </p:nvSpPr>
           <p:spPr>
             <a:xfrm>
-              <a:off x="1561815" y="5925448"/>
+              <a:off x="1561815" y="3662467"/>
               <a:ext cx="6311097" cy="100218"/>
             </a:xfrm>
             <a:prstGeom prst="rect">
@@ -5286,13 +5321,13 @@
         </p:sp>
         <p:sp>
           <p:nvSpPr>
-            <p:cNvPr id="40" name="tx40"/>
+            <p:cNvPr id="41" name="tx41"/>
             <p:cNvSpPr/>
             <p:nvPr/>
           </p:nvSpPr>
           <p:spPr>
             <a:xfrm rot="-5400000">
-              <a:off x="68446" y="3848213"/>
+              <a:off x="138035" y="2751517"/>
               <a:ext cx="1016904" cy="100218"/>
             </a:xfrm>
             <a:prstGeom prst="rect">
@@ -5332,13 +5367,13 @@
         </p:sp>
         <p:sp>
           <p:nvSpPr>
-            <p:cNvPr id="41" name="tx41"/>
+            <p:cNvPr id="42" name="tx42"/>
             <p:cNvSpPr/>
             <p:nvPr/>
           </p:nvSpPr>
           <p:spPr>
             <a:xfrm>
-              <a:off x="817517" y="1896563"/>
+              <a:off x="887106" y="1966152"/>
               <a:ext cx="6959864" cy="82021"/>
             </a:xfrm>
             <a:prstGeom prst="rect">
@@ -5378,13 +5413,3789 @@
         </p:sp>
         <p:sp>
           <p:nvSpPr>
-            <p:cNvPr id="42" name="tx42"/>
+            <p:cNvPr id="43" name="tx43"/>
             <p:cNvSpPr/>
             <p:nvPr/>
           </p:nvSpPr>
           <p:spPr>
             <a:xfrm>
-              <a:off x="817517" y="1669789"/>
+              <a:off x="887106" y="1739378"/>
+              <a:ext cx="3760378" cy="120152"/>
+            </a:xfrm>
+            <a:prstGeom prst="rect">
+              <a:avLst/>
+            </a:prstGeom>
+            <a:noFill/>
+          </p:spPr>
+          <p:txBody>
+            <a:bodyPr lIns="0" rIns="0" tIns="0" bIns="0" anchorCtr="1" anchor="ctr" wrap="none"/>
+            <a:lstStyle/>
+            <a:p>
+              <a:pPr algn="l" marL="0" marR="0" indent="0">
+                <a:lnSpc>
+                  <a:spcPts val="1320"/>
+                </a:lnSpc>
+                <a:spcBef>
+                  <a:spcPts val="0"/>
+                </a:spcBef>
+                <a:spcAft>
+                  <a:spcPts val="0"/>
+                </a:spcAft>
+              </a:pPr>
+              <a:r>
+                <a:rPr sz="1320">
+                  <a:solidFill>
+                    <a:srgbClr val="000000">
+                      <a:alpha val="100000"/>
+                    </a:srgbClr>
+                  </a:solidFill>
+                  <a:latin typeface="Helvetica"/>
+                  <a:cs typeface="Helvetica"/>
+                </a:rPr>
+                <a:t>Anemia Grade 2 (Sensitivity, Carboplatin AUC ≥ 3)</a:t>
+              </a:r>
+            </a:p>
+          </p:txBody>
+        </p:sp>
+        <p:sp>
+          <p:nvSpPr>
+            <p:cNvPr id="44" name="pl44"/>
+            <p:cNvSpPr/>
+            <p:nvPr/>
+          </p:nvSpPr>
+          <p:spPr>
+            <a:xfrm>
+              <a:off x="887106" y="5444019"/>
+              <a:ext cx="7660515" cy="0"/>
+            </a:xfrm>
+            <a:custGeom>
+              <a:avLst/>
+              <a:pathLst>
+                <a:path w="7660515" h="0">
+                  <a:moveTo>
+                    <a:pt x="0" y="0"/>
+                  </a:moveTo>
+                  <a:lnTo>
+                    <a:pt x="7660515" y="0"/>
+                  </a:lnTo>
+                  <a:lnTo>
+                    <a:pt x="7660515" y="0"/>
+                  </a:lnTo>
+                </a:path>
+              </a:pathLst>
+            </a:custGeom>
+            <a:ln w="6775" cap="flat">
+              <a:solidFill>
+                <a:srgbClr val="EBEBEB">
+                  <a:alpha val="100000"/>
+                </a:srgbClr>
+              </a:solidFill>
+              <a:prstDash val="solid"/>
+              <a:round/>
+            </a:ln>
+          </p:spPr>
+          <p:txBody>
+            <a:bodyPr/>
+            <a:lstStyle/>
+            <a:p/>
+          </p:txBody>
+        </p:sp>
+        <p:sp>
+          <p:nvSpPr>
+            <p:cNvPr id="45" name="pl45"/>
+            <p:cNvSpPr/>
+            <p:nvPr/>
+          </p:nvSpPr>
+          <p:spPr>
+            <a:xfrm>
+              <a:off x="887106" y="5144686"/>
+              <a:ext cx="7660515" cy="0"/>
+            </a:xfrm>
+            <a:custGeom>
+              <a:avLst/>
+              <a:pathLst>
+                <a:path w="7660515" h="0">
+                  <a:moveTo>
+                    <a:pt x="0" y="0"/>
+                  </a:moveTo>
+                  <a:lnTo>
+                    <a:pt x="7660515" y="0"/>
+                  </a:lnTo>
+                  <a:lnTo>
+                    <a:pt x="7660515" y="0"/>
+                  </a:lnTo>
+                </a:path>
+              </a:pathLst>
+            </a:custGeom>
+            <a:ln w="6775" cap="flat">
+              <a:solidFill>
+                <a:srgbClr val="EBEBEB">
+                  <a:alpha val="100000"/>
+                </a:srgbClr>
+              </a:solidFill>
+              <a:prstDash val="solid"/>
+              <a:round/>
+            </a:ln>
+          </p:spPr>
+          <p:txBody>
+            <a:bodyPr/>
+            <a:lstStyle/>
+            <a:p/>
+          </p:txBody>
+        </p:sp>
+        <p:sp>
+          <p:nvSpPr>
+            <p:cNvPr id="46" name="pl46"/>
+            <p:cNvSpPr/>
+            <p:nvPr/>
+          </p:nvSpPr>
+          <p:spPr>
+            <a:xfrm>
+              <a:off x="887106" y="4845352"/>
+              <a:ext cx="7660515" cy="0"/>
+            </a:xfrm>
+            <a:custGeom>
+              <a:avLst/>
+              <a:pathLst>
+                <a:path w="7660515" h="0">
+                  <a:moveTo>
+                    <a:pt x="0" y="0"/>
+                  </a:moveTo>
+                  <a:lnTo>
+                    <a:pt x="7660515" y="0"/>
+                  </a:lnTo>
+                  <a:lnTo>
+                    <a:pt x="7660515" y="0"/>
+                  </a:lnTo>
+                </a:path>
+              </a:pathLst>
+            </a:custGeom>
+            <a:ln w="6775" cap="flat">
+              <a:solidFill>
+                <a:srgbClr val="EBEBEB">
+                  <a:alpha val="100000"/>
+                </a:srgbClr>
+              </a:solidFill>
+              <a:prstDash val="solid"/>
+              <a:round/>
+            </a:ln>
+          </p:spPr>
+          <p:txBody>
+            <a:bodyPr/>
+            <a:lstStyle/>
+            <a:p/>
+          </p:txBody>
+        </p:sp>
+        <p:sp>
+          <p:nvSpPr>
+            <p:cNvPr id="47" name="pl47"/>
+            <p:cNvSpPr/>
+            <p:nvPr/>
+          </p:nvSpPr>
+          <p:spPr>
+            <a:xfrm>
+              <a:off x="887106" y="4546018"/>
+              <a:ext cx="7660515" cy="0"/>
+            </a:xfrm>
+            <a:custGeom>
+              <a:avLst/>
+              <a:pathLst>
+                <a:path w="7660515" h="0">
+                  <a:moveTo>
+                    <a:pt x="0" y="0"/>
+                  </a:moveTo>
+                  <a:lnTo>
+                    <a:pt x="7660515" y="0"/>
+                  </a:lnTo>
+                  <a:lnTo>
+                    <a:pt x="7660515" y="0"/>
+                  </a:lnTo>
+                </a:path>
+              </a:pathLst>
+            </a:custGeom>
+            <a:ln w="6775" cap="flat">
+              <a:solidFill>
+                <a:srgbClr val="EBEBEB">
+                  <a:alpha val="100000"/>
+                </a:srgbClr>
+              </a:solidFill>
+              <a:prstDash val="solid"/>
+              <a:round/>
+            </a:ln>
+          </p:spPr>
+          <p:txBody>
+            <a:bodyPr/>
+            <a:lstStyle/>
+            <a:p/>
+          </p:txBody>
+        </p:sp>
+        <p:sp>
+          <p:nvSpPr>
+            <p:cNvPr id="48" name="pl48"/>
+            <p:cNvSpPr/>
+            <p:nvPr/>
+          </p:nvSpPr>
+          <p:spPr>
+            <a:xfrm>
+              <a:off x="977504" y="4336484"/>
+              <a:ext cx="0" cy="1317069"/>
+            </a:xfrm>
+            <a:custGeom>
+              <a:avLst/>
+              <a:pathLst>
+                <a:path w="0" h="1317069">
+                  <a:moveTo>
+                    <a:pt x="0" y="1317069"/>
+                  </a:moveTo>
+                  <a:lnTo>
+                    <a:pt x="0" y="0"/>
+                  </a:lnTo>
+                  <a:lnTo>
+                    <a:pt x="0" y="0"/>
+                  </a:lnTo>
+                </a:path>
+              </a:pathLst>
+            </a:custGeom>
+            <a:ln w="6775" cap="flat">
+              <a:solidFill>
+                <a:srgbClr val="EBEBEB">
+                  <a:alpha val="100000"/>
+                </a:srgbClr>
+              </a:solidFill>
+              <a:prstDash val="solid"/>
+              <a:round/>
+            </a:ln>
+          </p:spPr>
+          <p:txBody>
+            <a:bodyPr/>
+            <a:lstStyle/>
+            <a:p/>
+          </p:txBody>
+        </p:sp>
+        <p:sp>
+          <p:nvSpPr>
+            <p:cNvPr id="49" name="pl49"/>
+            <p:cNvSpPr/>
+            <p:nvPr/>
+          </p:nvSpPr>
+          <p:spPr>
+            <a:xfrm>
+              <a:off x="1832530" y="4336484"/>
+              <a:ext cx="0" cy="1317069"/>
+            </a:xfrm>
+            <a:custGeom>
+              <a:avLst/>
+              <a:pathLst>
+                <a:path w="0" h="1317069">
+                  <a:moveTo>
+                    <a:pt x="0" y="1317069"/>
+                  </a:moveTo>
+                  <a:lnTo>
+                    <a:pt x="0" y="0"/>
+                  </a:lnTo>
+                  <a:lnTo>
+                    <a:pt x="0" y="0"/>
+                  </a:lnTo>
+                </a:path>
+              </a:pathLst>
+            </a:custGeom>
+            <a:ln w="6775" cap="flat">
+              <a:solidFill>
+                <a:srgbClr val="EBEBEB">
+                  <a:alpha val="100000"/>
+                </a:srgbClr>
+              </a:solidFill>
+              <a:prstDash val="solid"/>
+              <a:round/>
+            </a:ln>
+          </p:spPr>
+          <p:txBody>
+            <a:bodyPr/>
+            <a:lstStyle/>
+            <a:p/>
+          </p:txBody>
+        </p:sp>
+        <p:sp>
+          <p:nvSpPr>
+            <p:cNvPr id="50" name="pl50"/>
+            <p:cNvSpPr/>
+            <p:nvPr/>
+          </p:nvSpPr>
+          <p:spPr>
+            <a:xfrm>
+              <a:off x="2687556" y="4336484"/>
+              <a:ext cx="0" cy="1317069"/>
+            </a:xfrm>
+            <a:custGeom>
+              <a:avLst/>
+              <a:pathLst>
+                <a:path w="0" h="1317069">
+                  <a:moveTo>
+                    <a:pt x="0" y="1317069"/>
+                  </a:moveTo>
+                  <a:lnTo>
+                    <a:pt x="0" y="0"/>
+                  </a:lnTo>
+                  <a:lnTo>
+                    <a:pt x="0" y="0"/>
+                  </a:lnTo>
+                </a:path>
+              </a:pathLst>
+            </a:custGeom>
+            <a:ln w="6775" cap="flat">
+              <a:solidFill>
+                <a:srgbClr val="EBEBEB">
+                  <a:alpha val="100000"/>
+                </a:srgbClr>
+              </a:solidFill>
+              <a:prstDash val="solid"/>
+              <a:round/>
+            </a:ln>
+          </p:spPr>
+          <p:txBody>
+            <a:bodyPr/>
+            <a:lstStyle/>
+            <a:p/>
+          </p:txBody>
+        </p:sp>
+        <p:sp>
+          <p:nvSpPr>
+            <p:cNvPr id="51" name="pl51"/>
+            <p:cNvSpPr/>
+            <p:nvPr/>
+          </p:nvSpPr>
+          <p:spPr>
+            <a:xfrm>
+              <a:off x="3542582" y="4336484"/>
+              <a:ext cx="0" cy="1317069"/>
+            </a:xfrm>
+            <a:custGeom>
+              <a:avLst/>
+              <a:pathLst>
+                <a:path w="0" h="1317069">
+                  <a:moveTo>
+                    <a:pt x="0" y="1317069"/>
+                  </a:moveTo>
+                  <a:lnTo>
+                    <a:pt x="0" y="0"/>
+                  </a:lnTo>
+                  <a:lnTo>
+                    <a:pt x="0" y="0"/>
+                  </a:lnTo>
+                </a:path>
+              </a:pathLst>
+            </a:custGeom>
+            <a:ln w="6775" cap="flat">
+              <a:solidFill>
+                <a:srgbClr val="EBEBEB">
+                  <a:alpha val="100000"/>
+                </a:srgbClr>
+              </a:solidFill>
+              <a:prstDash val="solid"/>
+              <a:round/>
+            </a:ln>
+          </p:spPr>
+          <p:txBody>
+            <a:bodyPr/>
+            <a:lstStyle/>
+            <a:p/>
+          </p:txBody>
+        </p:sp>
+        <p:sp>
+          <p:nvSpPr>
+            <p:cNvPr id="52" name="pl52"/>
+            <p:cNvSpPr/>
+            <p:nvPr/>
+          </p:nvSpPr>
+          <p:spPr>
+            <a:xfrm>
+              <a:off x="4397608" y="4336484"/>
+              <a:ext cx="0" cy="1317069"/>
+            </a:xfrm>
+            <a:custGeom>
+              <a:avLst/>
+              <a:pathLst>
+                <a:path w="0" h="1317069">
+                  <a:moveTo>
+                    <a:pt x="0" y="1317069"/>
+                  </a:moveTo>
+                  <a:lnTo>
+                    <a:pt x="0" y="0"/>
+                  </a:lnTo>
+                  <a:lnTo>
+                    <a:pt x="0" y="0"/>
+                  </a:lnTo>
+                </a:path>
+              </a:pathLst>
+            </a:custGeom>
+            <a:ln w="6775" cap="flat">
+              <a:solidFill>
+                <a:srgbClr val="EBEBEB">
+                  <a:alpha val="100000"/>
+                </a:srgbClr>
+              </a:solidFill>
+              <a:prstDash val="solid"/>
+              <a:round/>
+            </a:ln>
+          </p:spPr>
+          <p:txBody>
+            <a:bodyPr/>
+            <a:lstStyle/>
+            <a:p/>
+          </p:txBody>
+        </p:sp>
+        <p:sp>
+          <p:nvSpPr>
+            <p:cNvPr id="53" name="pl53"/>
+            <p:cNvSpPr/>
+            <p:nvPr/>
+          </p:nvSpPr>
+          <p:spPr>
+            <a:xfrm>
+              <a:off x="5252634" y="4336484"/>
+              <a:ext cx="0" cy="1317069"/>
+            </a:xfrm>
+            <a:custGeom>
+              <a:avLst/>
+              <a:pathLst>
+                <a:path w="0" h="1317069">
+                  <a:moveTo>
+                    <a:pt x="0" y="1317069"/>
+                  </a:moveTo>
+                  <a:lnTo>
+                    <a:pt x="0" y="0"/>
+                  </a:lnTo>
+                  <a:lnTo>
+                    <a:pt x="0" y="0"/>
+                  </a:lnTo>
+                </a:path>
+              </a:pathLst>
+            </a:custGeom>
+            <a:ln w="6775" cap="flat">
+              <a:solidFill>
+                <a:srgbClr val="EBEBEB">
+                  <a:alpha val="100000"/>
+                </a:srgbClr>
+              </a:solidFill>
+              <a:prstDash val="solid"/>
+              <a:round/>
+            </a:ln>
+          </p:spPr>
+          <p:txBody>
+            <a:bodyPr/>
+            <a:lstStyle/>
+            <a:p/>
+          </p:txBody>
+        </p:sp>
+        <p:sp>
+          <p:nvSpPr>
+            <p:cNvPr id="54" name="pl54"/>
+            <p:cNvSpPr/>
+            <p:nvPr/>
+          </p:nvSpPr>
+          <p:spPr>
+            <a:xfrm>
+              <a:off x="6107660" y="4336484"/>
+              <a:ext cx="0" cy="1317069"/>
+            </a:xfrm>
+            <a:custGeom>
+              <a:avLst/>
+              <a:pathLst>
+                <a:path w="0" h="1317069">
+                  <a:moveTo>
+                    <a:pt x="0" y="1317069"/>
+                  </a:moveTo>
+                  <a:lnTo>
+                    <a:pt x="0" y="0"/>
+                  </a:lnTo>
+                  <a:lnTo>
+                    <a:pt x="0" y="0"/>
+                  </a:lnTo>
+                </a:path>
+              </a:pathLst>
+            </a:custGeom>
+            <a:ln w="6775" cap="flat">
+              <a:solidFill>
+                <a:srgbClr val="EBEBEB">
+                  <a:alpha val="100000"/>
+                </a:srgbClr>
+              </a:solidFill>
+              <a:prstDash val="solid"/>
+              <a:round/>
+            </a:ln>
+          </p:spPr>
+          <p:txBody>
+            <a:bodyPr/>
+            <a:lstStyle/>
+            <a:p/>
+          </p:txBody>
+        </p:sp>
+        <p:sp>
+          <p:nvSpPr>
+            <p:cNvPr id="55" name="pl55"/>
+            <p:cNvSpPr/>
+            <p:nvPr/>
+          </p:nvSpPr>
+          <p:spPr>
+            <a:xfrm>
+              <a:off x="6962686" y="4336484"/>
+              <a:ext cx="0" cy="1317069"/>
+            </a:xfrm>
+            <a:custGeom>
+              <a:avLst/>
+              <a:pathLst>
+                <a:path w="0" h="1317069">
+                  <a:moveTo>
+                    <a:pt x="0" y="1317069"/>
+                  </a:moveTo>
+                  <a:lnTo>
+                    <a:pt x="0" y="0"/>
+                  </a:lnTo>
+                  <a:lnTo>
+                    <a:pt x="0" y="0"/>
+                  </a:lnTo>
+                </a:path>
+              </a:pathLst>
+            </a:custGeom>
+            <a:ln w="6775" cap="flat">
+              <a:solidFill>
+                <a:srgbClr val="EBEBEB">
+                  <a:alpha val="100000"/>
+                </a:srgbClr>
+              </a:solidFill>
+              <a:prstDash val="solid"/>
+              <a:round/>
+            </a:ln>
+          </p:spPr>
+          <p:txBody>
+            <a:bodyPr/>
+            <a:lstStyle/>
+            <a:p/>
+          </p:txBody>
+        </p:sp>
+        <p:sp>
+          <p:nvSpPr>
+            <p:cNvPr id="56" name="pl56"/>
+            <p:cNvSpPr/>
+            <p:nvPr/>
+          </p:nvSpPr>
+          <p:spPr>
+            <a:xfrm>
+              <a:off x="7817712" y="4336484"/>
+              <a:ext cx="0" cy="1317069"/>
+            </a:xfrm>
+            <a:custGeom>
+              <a:avLst/>
+              <a:pathLst>
+                <a:path w="0" h="1317069">
+                  <a:moveTo>
+                    <a:pt x="0" y="1317069"/>
+                  </a:moveTo>
+                  <a:lnTo>
+                    <a:pt x="0" y="0"/>
+                  </a:lnTo>
+                  <a:lnTo>
+                    <a:pt x="0" y="0"/>
+                  </a:lnTo>
+                </a:path>
+              </a:pathLst>
+            </a:custGeom>
+            <a:ln w="6775" cap="flat">
+              <a:solidFill>
+                <a:srgbClr val="EBEBEB">
+                  <a:alpha val="100000"/>
+                </a:srgbClr>
+              </a:solidFill>
+              <a:prstDash val="solid"/>
+              <a:round/>
+            </a:ln>
+          </p:spPr>
+          <p:txBody>
+            <a:bodyPr/>
+            <a:lstStyle/>
+            <a:p/>
+          </p:txBody>
+        </p:sp>
+        <p:sp>
+          <p:nvSpPr>
+            <p:cNvPr id="57" name="pl57"/>
+            <p:cNvSpPr/>
+            <p:nvPr/>
+          </p:nvSpPr>
+          <p:spPr>
+            <a:xfrm>
+              <a:off x="887106" y="5593686"/>
+              <a:ext cx="7660515" cy="0"/>
+            </a:xfrm>
+            <a:custGeom>
+              <a:avLst/>
+              <a:pathLst>
+                <a:path w="7660515" h="0">
+                  <a:moveTo>
+                    <a:pt x="0" y="0"/>
+                  </a:moveTo>
+                  <a:lnTo>
+                    <a:pt x="7660515" y="0"/>
+                  </a:lnTo>
+                  <a:lnTo>
+                    <a:pt x="7660515" y="0"/>
+                  </a:lnTo>
+                </a:path>
+              </a:pathLst>
+            </a:custGeom>
+            <a:ln w="13550" cap="flat">
+              <a:solidFill>
+                <a:srgbClr val="EBEBEB">
+                  <a:alpha val="100000"/>
+                </a:srgbClr>
+              </a:solidFill>
+              <a:prstDash val="solid"/>
+              <a:round/>
+            </a:ln>
+          </p:spPr>
+          <p:txBody>
+            <a:bodyPr/>
+            <a:lstStyle/>
+            <a:p/>
+          </p:txBody>
+        </p:sp>
+        <p:sp>
+          <p:nvSpPr>
+            <p:cNvPr id="58" name="pl58"/>
+            <p:cNvSpPr/>
+            <p:nvPr/>
+          </p:nvSpPr>
+          <p:spPr>
+            <a:xfrm>
+              <a:off x="887106" y="5294352"/>
+              <a:ext cx="7660515" cy="0"/>
+            </a:xfrm>
+            <a:custGeom>
+              <a:avLst/>
+              <a:pathLst>
+                <a:path w="7660515" h="0">
+                  <a:moveTo>
+                    <a:pt x="0" y="0"/>
+                  </a:moveTo>
+                  <a:lnTo>
+                    <a:pt x="7660515" y="0"/>
+                  </a:lnTo>
+                  <a:lnTo>
+                    <a:pt x="7660515" y="0"/>
+                  </a:lnTo>
+                </a:path>
+              </a:pathLst>
+            </a:custGeom>
+            <a:ln w="13550" cap="flat">
+              <a:solidFill>
+                <a:srgbClr val="EBEBEB">
+                  <a:alpha val="100000"/>
+                </a:srgbClr>
+              </a:solidFill>
+              <a:prstDash val="solid"/>
+              <a:round/>
+            </a:ln>
+          </p:spPr>
+          <p:txBody>
+            <a:bodyPr/>
+            <a:lstStyle/>
+            <a:p/>
+          </p:txBody>
+        </p:sp>
+        <p:sp>
+          <p:nvSpPr>
+            <p:cNvPr id="59" name="pl59"/>
+            <p:cNvSpPr/>
+            <p:nvPr/>
+          </p:nvSpPr>
+          <p:spPr>
+            <a:xfrm>
+              <a:off x="887106" y="4995019"/>
+              <a:ext cx="7660515" cy="0"/>
+            </a:xfrm>
+            <a:custGeom>
+              <a:avLst/>
+              <a:pathLst>
+                <a:path w="7660515" h="0">
+                  <a:moveTo>
+                    <a:pt x="0" y="0"/>
+                  </a:moveTo>
+                  <a:lnTo>
+                    <a:pt x="7660515" y="0"/>
+                  </a:lnTo>
+                  <a:lnTo>
+                    <a:pt x="7660515" y="0"/>
+                  </a:lnTo>
+                </a:path>
+              </a:pathLst>
+            </a:custGeom>
+            <a:ln w="13550" cap="flat">
+              <a:solidFill>
+                <a:srgbClr val="EBEBEB">
+                  <a:alpha val="100000"/>
+                </a:srgbClr>
+              </a:solidFill>
+              <a:prstDash val="solid"/>
+              <a:round/>
+            </a:ln>
+          </p:spPr>
+          <p:txBody>
+            <a:bodyPr/>
+            <a:lstStyle/>
+            <a:p/>
+          </p:txBody>
+        </p:sp>
+        <p:sp>
+          <p:nvSpPr>
+            <p:cNvPr id="60" name="pl60"/>
+            <p:cNvSpPr/>
+            <p:nvPr/>
+          </p:nvSpPr>
+          <p:spPr>
+            <a:xfrm>
+              <a:off x="887106" y="4695685"/>
+              <a:ext cx="7660515" cy="0"/>
+            </a:xfrm>
+            <a:custGeom>
+              <a:avLst/>
+              <a:pathLst>
+                <a:path w="7660515" h="0">
+                  <a:moveTo>
+                    <a:pt x="0" y="0"/>
+                  </a:moveTo>
+                  <a:lnTo>
+                    <a:pt x="7660515" y="0"/>
+                  </a:lnTo>
+                  <a:lnTo>
+                    <a:pt x="7660515" y="0"/>
+                  </a:lnTo>
+                </a:path>
+              </a:pathLst>
+            </a:custGeom>
+            <a:ln w="13550" cap="flat">
+              <a:solidFill>
+                <a:srgbClr val="EBEBEB">
+                  <a:alpha val="100000"/>
+                </a:srgbClr>
+              </a:solidFill>
+              <a:prstDash val="solid"/>
+              <a:round/>
+            </a:ln>
+          </p:spPr>
+          <p:txBody>
+            <a:bodyPr/>
+            <a:lstStyle/>
+            <a:p/>
+          </p:txBody>
+        </p:sp>
+        <p:sp>
+          <p:nvSpPr>
+            <p:cNvPr id="61" name="pl61"/>
+            <p:cNvSpPr/>
+            <p:nvPr/>
+          </p:nvSpPr>
+          <p:spPr>
+            <a:xfrm>
+              <a:off x="887106" y="4396351"/>
+              <a:ext cx="7660515" cy="0"/>
+            </a:xfrm>
+            <a:custGeom>
+              <a:avLst/>
+              <a:pathLst>
+                <a:path w="7660515" h="0">
+                  <a:moveTo>
+                    <a:pt x="0" y="0"/>
+                  </a:moveTo>
+                  <a:lnTo>
+                    <a:pt x="7660515" y="0"/>
+                  </a:lnTo>
+                  <a:lnTo>
+                    <a:pt x="7660515" y="0"/>
+                  </a:lnTo>
+                </a:path>
+              </a:pathLst>
+            </a:custGeom>
+            <a:ln w="13550" cap="flat">
+              <a:solidFill>
+                <a:srgbClr val="EBEBEB">
+                  <a:alpha val="100000"/>
+                </a:srgbClr>
+              </a:solidFill>
+              <a:prstDash val="solid"/>
+              <a:round/>
+            </a:ln>
+          </p:spPr>
+          <p:txBody>
+            <a:bodyPr/>
+            <a:lstStyle/>
+            <a:p/>
+          </p:txBody>
+        </p:sp>
+        <p:sp>
+          <p:nvSpPr>
+            <p:cNvPr id="62" name="pl62"/>
+            <p:cNvSpPr/>
+            <p:nvPr/>
+          </p:nvSpPr>
+          <p:spPr>
+            <a:xfrm>
+              <a:off x="1405017" y="4336484"/>
+              <a:ext cx="0" cy="1317069"/>
+            </a:xfrm>
+            <a:custGeom>
+              <a:avLst/>
+              <a:pathLst>
+                <a:path w="0" h="1317069">
+                  <a:moveTo>
+                    <a:pt x="0" y="1317069"/>
+                  </a:moveTo>
+                  <a:lnTo>
+                    <a:pt x="0" y="0"/>
+                  </a:lnTo>
+                  <a:lnTo>
+                    <a:pt x="0" y="0"/>
+                  </a:lnTo>
+                </a:path>
+              </a:pathLst>
+            </a:custGeom>
+            <a:ln w="13550" cap="flat">
+              <a:solidFill>
+                <a:srgbClr val="EBEBEB">
+                  <a:alpha val="100000"/>
+                </a:srgbClr>
+              </a:solidFill>
+              <a:prstDash val="solid"/>
+              <a:round/>
+            </a:ln>
+          </p:spPr>
+          <p:txBody>
+            <a:bodyPr/>
+            <a:lstStyle/>
+            <a:p/>
+          </p:txBody>
+        </p:sp>
+        <p:sp>
+          <p:nvSpPr>
+            <p:cNvPr id="63" name="pl63"/>
+            <p:cNvSpPr/>
+            <p:nvPr/>
+          </p:nvSpPr>
+          <p:spPr>
+            <a:xfrm>
+              <a:off x="2260043" y="4336484"/>
+              <a:ext cx="0" cy="1317069"/>
+            </a:xfrm>
+            <a:custGeom>
+              <a:avLst/>
+              <a:pathLst>
+                <a:path w="0" h="1317069">
+                  <a:moveTo>
+                    <a:pt x="0" y="1317069"/>
+                  </a:moveTo>
+                  <a:lnTo>
+                    <a:pt x="0" y="0"/>
+                  </a:lnTo>
+                  <a:lnTo>
+                    <a:pt x="0" y="0"/>
+                  </a:lnTo>
+                </a:path>
+              </a:pathLst>
+            </a:custGeom>
+            <a:ln w="13550" cap="flat">
+              <a:solidFill>
+                <a:srgbClr val="EBEBEB">
+                  <a:alpha val="100000"/>
+                </a:srgbClr>
+              </a:solidFill>
+              <a:prstDash val="solid"/>
+              <a:round/>
+            </a:ln>
+          </p:spPr>
+          <p:txBody>
+            <a:bodyPr/>
+            <a:lstStyle/>
+            <a:p/>
+          </p:txBody>
+        </p:sp>
+        <p:sp>
+          <p:nvSpPr>
+            <p:cNvPr id="64" name="pl64"/>
+            <p:cNvSpPr/>
+            <p:nvPr/>
+          </p:nvSpPr>
+          <p:spPr>
+            <a:xfrm>
+              <a:off x="3115069" y="4336484"/>
+              <a:ext cx="0" cy="1317069"/>
+            </a:xfrm>
+            <a:custGeom>
+              <a:avLst/>
+              <a:pathLst>
+                <a:path w="0" h="1317069">
+                  <a:moveTo>
+                    <a:pt x="0" y="1317069"/>
+                  </a:moveTo>
+                  <a:lnTo>
+                    <a:pt x="0" y="0"/>
+                  </a:lnTo>
+                  <a:lnTo>
+                    <a:pt x="0" y="0"/>
+                  </a:lnTo>
+                </a:path>
+              </a:pathLst>
+            </a:custGeom>
+            <a:ln w="13550" cap="flat">
+              <a:solidFill>
+                <a:srgbClr val="EBEBEB">
+                  <a:alpha val="100000"/>
+                </a:srgbClr>
+              </a:solidFill>
+              <a:prstDash val="solid"/>
+              <a:round/>
+            </a:ln>
+          </p:spPr>
+          <p:txBody>
+            <a:bodyPr/>
+            <a:lstStyle/>
+            <a:p/>
+          </p:txBody>
+        </p:sp>
+        <p:sp>
+          <p:nvSpPr>
+            <p:cNvPr id="65" name="pl65"/>
+            <p:cNvSpPr/>
+            <p:nvPr/>
+          </p:nvSpPr>
+          <p:spPr>
+            <a:xfrm>
+              <a:off x="3970095" y="4336484"/>
+              <a:ext cx="0" cy="1317069"/>
+            </a:xfrm>
+            <a:custGeom>
+              <a:avLst/>
+              <a:pathLst>
+                <a:path w="0" h="1317069">
+                  <a:moveTo>
+                    <a:pt x="0" y="1317069"/>
+                  </a:moveTo>
+                  <a:lnTo>
+                    <a:pt x="0" y="0"/>
+                  </a:lnTo>
+                  <a:lnTo>
+                    <a:pt x="0" y="0"/>
+                  </a:lnTo>
+                </a:path>
+              </a:pathLst>
+            </a:custGeom>
+            <a:ln w="13550" cap="flat">
+              <a:solidFill>
+                <a:srgbClr val="EBEBEB">
+                  <a:alpha val="100000"/>
+                </a:srgbClr>
+              </a:solidFill>
+              <a:prstDash val="solid"/>
+              <a:round/>
+            </a:ln>
+          </p:spPr>
+          <p:txBody>
+            <a:bodyPr/>
+            <a:lstStyle/>
+            <a:p/>
+          </p:txBody>
+        </p:sp>
+        <p:sp>
+          <p:nvSpPr>
+            <p:cNvPr id="66" name="pl66"/>
+            <p:cNvSpPr/>
+            <p:nvPr/>
+          </p:nvSpPr>
+          <p:spPr>
+            <a:xfrm>
+              <a:off x="4825121" y="4336484"/>
+              <a:ext cx="0" cy="1317069"/>
+            </a:xfrm>
+            <a:custGeom>
+              <a:avLst/>
+              <a:pathLst>
+                <a:path w="0" h="1317069">
+                  <a:moveTo>
+                    <a:pt x="0" y="1317069"/>
+                  </a:moveTo>
+                  <a:lnTo>
+                    <a:pt x="0" y="0"/>
+                  </a:lnTo>
+                  <a:lnTo>
+                    <a:pt x="0" y="0"/>
+                  </a:lnTo>
+                </a:path>
+              </a:pathLst>
+            </a:custGeom>
+            <a:ln w="13550" cap="flat">
+              <a:solidFill>
+                <a:srgbClr val="EBEBEB">
+                  <a:alpha val="100000"/>
+                </a:srgbClr>
+              </a:solidFill>
+              <a:prstDash val="solid"/>
+              <a:round/>
+            </a:ln>
+          </p:spPr>
+          <p:txBody>
+            <a:bodyPr/>
+            <a:lstStyle/>
+            <a:p/>
+          </p:txBody>
+        </p:sp>
+        <p:sp>
+          <p:nvSpPr>
+            <p:cNvPr id="67" name="pl67"/>
+            <p:cNvSpPr/>
+            <p:nvPr/>
+          </p:nvSpPr>
+          <p:spPr>
+            <a:xfrm>
+              <a:off x="5680147" y="4336484"/>
+              <a:ext cx="0" cy="1317069"/>
+            </a:xfrm>
+            <a:custGeom>
+              <a:avLst/>
+              <a:pathLst>
+                <a:path w="0" h="1317069">
+                  <a:moveTo>
+                    <a:pt x="0" y="1317069"/>
+                  </a:moveTo>
+                  <a:lnTo>
+                    <a:pt x="0" y="0"/>
+                  </a:lnTo>
+                  <a:lnTo>
+                    <a:pt x="0" y="0"/>
+                  </a:lnTo>
+                </a:path>
+              </a:pathLst>
+            </a:custGeom>
+            <a:ln w="13550" cap="flat">
+              <a:solidFill>
+                <a:srgbClr val="EBEBEB">
+                  <a:alpha val="100000"/>
+                </a:srgbClr>
+              </a:solidFill>
+              <a:prstDash val="solid"/>
+              <a:round/>
+            </a:ln>
+          </p:spPr>
+          <p:txBody>
+            <a:bodyPr/>
+            <a:lstStyle/>
+            <a:p/>
+          </p:txBody>
+        </p:sp>
+        <p:sp>
+          <p:nvSpPr>
+            <p:cNvPr id="68" name="pl68"/>
+            <p:cNvSpPr/>
+            <p:nvPr/>
+          </p:nvSpPr>
+          <p:spPr>
+            <a:xfrm>
+              <a:off x="6535173" y="4336484"/>
+              <a:ext cx="0" cy="1317069"/>
+            </a:xfrm>
+            <a:custGeom>
+              <a:avLst/>
+              <a:pathLst>
+                <a:path w="0" h="1317069">
+                  <a:moveTo>
+                    <a:pt x="0" y="1317069"/>
+                  </a:moveTo>
+                  <a:lnTo>
+                    <a:pt x="0" y="0"/>
+                  </a:lnTo>
+                  <a:lnTo>
+                    <a:pt x="0" y="0"/>
+                  </a:lnTo>
+                </a:path>
+              </a:pathLst>
+            </a:custGeom>
+            <a:ln w="13550" cap="flat">
+              <a:solidFill>
+                <a:srgbClr val="EBEBEB">
+                  <a:alpha val="100000"/>
+                </a:srgbClr>
+              </a:solidFill>
+              <a:prstDash val="solid"/>
+              <a:round/>
+            </a:ln>
+          </p:spPr>
+          <p:txBody>
+            <a:bodyPr/>
+            <a:lstStyle/>
+            <a:p/>
+          </p:txBody>
+        </p:sp>
+        <p:sp>
+          <p:nvSpPr>
+            <p:cNvPr id="69" name="pl69"/>
+            <p:cNvSpPr/>
+            <p:nvPr/>
+          </p:nvSpPr>
+          <p:spPr>
+            <a:xfrm>
+              <a:off x="7390199" y="4336484"/>
+              <a:ext cx="0" cy="1317069"/>
+            </a:xfrm>
+            <a:custGeom>
+              <a:avLst/>
+              <a:pathLst>
+                <a:path w="0" h="1317069">
+                  <a:moveTo>
+                    <a:pt x="0" y="1317069"/>
+                  </a:moveTo>
+                  <a:lnTo>
+                    <a:pt x="0" y="0"/>
+                  </a:lnTo>
+                  <a:lnTo>
+                    <a:pt x="0" y="0"/>
+                  </a:lnTo>
+                </a:path>
+              </a:pathLst>
+            </a:custGeom>
+            <a:ln w="13550" cap="flat">
+              <a:solidFill>
+                <a:srgbClr val="EBEBEB">
+                  <a:alpha val="100000"/>
+                </a:srgbClr>
+              </a:solidFill>
+              <a:prstDash val="solid"/>
+              <a:round/>
+            </a:ln>
+          </p:spPr>
+          <p:txBody>
+            <a:bodyPr/>
+            <a:lstStyle/>
+            <a:p/>
+          </p:txBody>
+        </p:sp>
+        <p:sp>
+          <p:nvSpPr>
+            <p:cNvPr id="70" name="pl70"/>
+            <p:cNvSpPr/>
+            <p:nvPr/>
+          </p:nvSpPr>
+          <p:spPr>
+            <a:xfrm>
+              <a:off x="8245225" y="4336484"/>
+              <a:ext cx="0" cy="1317069"/>
+            </a:xfrm>
+            <a:custGeom>
+              <a:avLst/>
+              <a:pathLst>
+                <a:path w="0" h="1317069">
+                  <a:moveTo>
+                    <a:pt x="0" y="1317069"/>
+                  </a:moveTo>
+                  <a:lnTo>
+                    <a:pt x="0" y="0"/>
+                  </a:lnTo>
+                  <a:lnTo>
+                    <a:pt x="0" y="0"/>
+                  </a:lnTo>
+                </a:path>
+              </a:pathLst>
+            </a:custGeom>
+            <a:ln w="13550" cap="flat">
+              <a:solidFill>
+                <a:srgbClr val="EBEBEB">
+                  <a:alpha val="100000"/>
+                </a:srgbClr>
+              </a:solidFill>
+              <a:prstDash val="solid"/>
+              <a:round/>
+            </a:ln>
+          </p:spPr>
+          <p:txBody>
+            <a:bodyPr/>
+            <a:lstStyle/>
+            <a:p/>
+          </p:txBody>
+        </p:sp>
+        <p:sp>
+          <p:nvSpPr>
+            <p:cNvPr id="71" name="pg71"/>
+            <p:cNvSpPr/>
+            <p:nvPr/>
+          </p:nvSpPr>
+          <p:spPr>
+            <a:xfrm>
+              <a:off x="1235312" y="5028753"/>
+              <a:ext cx="6964104" cy="431479"/>
+            </a:xfrm>
+            <a:custGeom>
+              <a:avLst/>
+              <a:pathLst>
+                <a:path w="6964104" h="431479">
+                  <a:moveTo>
+                    <a:pt x="0" y="0"/>
+                  </a:moveTo>
+                  <a:lnTo>
+                    <a:pt x="70344" y="8174"/>
+                  </a:lnTo>
+                  <a:lnTo>
+                    <a:pt x="140688" y="16230"/>
+                  </a:lnTo>
+                  <a:lnTo>
+                    <a:pt x="211033" y="24169"/>
+                  </a:lnTo>
+                  <a:lnTo>
+                    <a:pt x="281377" y="31994"/>
+                  </a:lnTo>
+                  <a:lnTo>
+                    <a:pt x="351722" y="39705"/>
+                  </a:lnTo>
+                  <a:lnTo>
+                    <a:pt x="422066" y="47305"/>
+                  </a:lnTo>
+                  <a:lnTo>
+                    <a:pt x="492411" y="54795"/>
+                  </a:lnTo>
+                  <a:lnTo>
+                    <a:pt x="562755" y="62177"/>
+                  </a:lnTo>
+                  <a:lnTo>
+                    <a:pt x="633100" y="69451"/>
+                  </a:lnTo>
+                  <a:lnTo>
+                    <a:pt x="703444" y="76621"/>
+                  </a:lnTo>
+                  <a:lnTo>
+                    <a:pt x="773789" y="83686"/>
+                  </a:lnTo>
+                  <a:lnTo>
+                    <a:pt x="844133" y="90650"/>
+                  </a:lnTo>
+                  <a:lnTo>
+                    <a:pt x="914478" y="97512"/>
+                  </a:lnTo>
+                  <a:lnTo>
+                    <a:pt x="984822" y="104276"/>
+                  </a:lnTo>
+                  <a:lnTo>
+                    <a:pt x="1055167" y="110941"/>
+                  </a:lnTo>
+                  <a:lnTo>
+                    <a:pt x="1125511" y="117510"/>
+                  </a:lnTo>
+                  <a:lnTo>
+                    <a:pt x="1195856" y="123984"/>
+                  </a:lnTo>
+                  <a:lnTo>
+                    <a:pt x="1266200" y="130365"/>
+                  </a:lnTo>
+                  <a:lnTo>
+                    <a:pt x="1336545" y="136653"/>
+                  </a:lnTo>
+                  <a:lnTo>
+                    <a:pt x="1406889" y="142850"/>
+                  </a:lnTo>
+                  <a:lnTo>
+                    <a:pt x="1477234" y="148957"/>
+                  </a:lnTo>
+                  <a:lnTo>
+                    <a:pt x="1547578" y="154976"/>
+                  </a:lnTo>
+                  <a:lnTo>
+                    <a:pt x="1617923" y="160908"/>
+                  </a:lnTo>
+                  <a:lnTo>
+                    <a:pt x="1688267" y="166754"/>
+                  </a:lnTo>
+                  <a:lnTo>
+                    <a:pt x="1758612" y="172516"/>
+                  </a:lnTo>
+                  <a:lnTo>
+                    <a:pt x="1828956" y="178194"/>
+                  </a:lnTo>
+                  <a:lnTo>
+                    <a:pt x="1899301" y="183790"/>
+                  </a:lnTo>
+                  <a:lnTo>
+                    <a:pt x="1969645" y="189305"/>
+                  </a:lnTo>
+                  <a:lnTo>
+                    <a:pt x="2039990" y="194740"/>
+                  </a:lnTo>
+                  <a:lnTo>
+                    <a:pt x="2110334" y="200096"/>
+                  </a:lnTo>
+                  <a:lnTo>
+                    <a:pt x="2180679" y="205375"/>
+                  </a:lnTo>
+                  <a:lnTo>
+                    <a:pt x="2251023" y="210578"/>
+                  </a:lnTo>
+                  <a:lnTo>
+                    <a:pt x="2321368" y="215705"/>
+                  </a:lnTo>
+                  <a:lnTo>
+                    <a:pt x="2391712" y="220759"/>
+                  </a:lnTo>
+                  <a:lnTo>
+                    <a:pt x="2462057" y="225739"/>
+                  </a:lnTo>
+                  <a:lnTo>
+                    <a:pt x="2532401" y="230647"/>
+                  </a:lnTo>
+                  <a:lnTo>
+                    <a:pt x="2602746" y="235484"/>
+                  </a:lnTo>
+                  <a:lnTo>
+                    <a:pt x="2673090" y="240251"/>
+                  </a:lnTo>
+                  <a:lnTo>
+                    <a:pt x="2743435" y="244949"/>
+                  </a:lnTo>
+                  <a:lnTo>
+                    <a:pt x="2813779" y="249579"/>
+                  </a:lnTo>
+                  <a:lnTo>
+                    <a:pt x="2884124" y="254142"/>
+                  </a:lnTo>
+                  <a:lnTo>
+                    <a:pt x="2954468" y="258639"/>
+                  </a:lnTo>
+                  <a:lnTo>
+                    <a:pt x="3024813" y="263071"/>
+                  </a:lnTo>
+                  <a:lnTo>
+                    <a:pt x="3095157" y="265703"/>
+                  </a:lnTo>
+                  <a:lnTo>
+                    <a:pt x="3165502" y="265949"/>
+                  </a:lnTo>
+                  <a:lnTo>
+                    <a:pt x="3235846" y="266196"/>
+                  </a:lnTo>
+                  <a:lnTo>
+                    <a:pt x="3306191" y="266442"/>
+                  </a:lnTo>
+                  <a:lnTo>
+                    <a:pt x="3376535" y="266688"/>
+                  </a:lnTo>
+                  <a:lnTo>
+                    <a:pt x="3446880" y="266933"/>
+                  </a:lnTo>
+                  <a:lnTo>
+                    <a:pt x="3517224" y="267179"/>
+                  </a:lnTo>
+                  <a:lnTo>
+                    <a:pt x="3587569" y="267424"/>
+                  </a:lnTo>
+                  <a:lnTo>
+                    <a:pt x="3657913" y="267669"/>
+                  </a:lnTo>
+                  <a:lnTo>
+                    <a:pt x="3728257" y="267914"/>
+                  </a:lnTo>
+                  <a:lnTo>
+                    <a:pt x="3798602" y="268158"/>
+                  </a:lnTo>
+                  <a:lnTo>
+                    <a:pt x="3868946" y="268403"/>
+                  </a:lnTo>
+                  <a:lnTo>
+                    <a:pt x="3939291" y="268647"/>
+                  </a:lnTo>
+                  <a:lnTo>
+                    <a:pt x="4009635" y="268891"/>
+                  </a:lnTo>
+                  <a:lnTo>
+                    <a:pt x="4079980" y="269135"/>
+                  </a:lnTo>
+                  <a:lnTo>
+                    <a:pt x="4150324" y="269378"/>
+                  </a:lnTo>
+                  <a:lnTo>
+                    <a:pt x="4220669" y="269622"/>
+                  </a:lnTo>
+                  <a:lnTo>
+                    <a:pt x="4291013" y="269865"/>
+                  </a:lnTo>
+                  <a:lnTo>
+                    <a:pt x="4361358" y="270108"/>
+                  </a:lnTo>
+                  <a:lnTo>
+                    <a:pt x="4431702" y="270351"/>
+                  </a:lnTo>
+                  <a:lnTo>
+                    <a:pt x="4502047" y="270593"/>
+                  </a:lnTo>
+                  <a:lnTo>
+                    <a:pt x="4572391" y="270836"/>
+                  </a:lnTo>
+                  <a:lnTo>
+                    <a:pt x="4642736" y="271078"/>
+                  </a:lnTo>
+                  <a:lnTo>
+                    <a:pt x="4713080" y="271320"/>
+                  </a:lnTo>
+                  <a:lnTo>
+                    <a:pt x="4783425" y="271562"/>
+                  </a:lnTo>
+                  <a:lnTo>
+                    <a:pt x="4853769" y="271803"/>
+                  </a:lnTo>
+                  <a:lnTo>
+                    <a:pt x="4924114" y="272045"/>
+                  </a:lnTo>
+                  <a:lnTo>
+                    <a:pt x="4994458" y="272286"/>
+                  </a:lnTo>
+                  <a:lnTo>
+                    <a:pt x="5064803" y="272527"/>
+                  </a:lnTo>
+                  <a:lnTo>
+                    <a:pt x="5135147" y="272768"/>
+                  </a:lnTo>
+                  <a:lnTo>
+                    <a:pt x="5205492" y="273008"/>
+                  </a:lnTo>
+                  <a:lnTo>
+                    <a:pt x="5275836" y="273249"/>
+                  </a:lnTo>
+                  <a:lnTo>
+                    <a:pt x="5346181" y="273489"/>
+                  </a:lnTo>
+                  <a:lnTo>
+                    <a:pt x="5416525" y="273729"/>
+                  </a:lnTo>
+                  <a:lnTo>
+                    <a:pt x="5486870" y="273969"/>
+                  </a:lnTo>
+                  <a:lnTo>
+                    <a:pt x="5557214" y="274208"/>
+                  </a:lnTo>
+                  <a:lnTo>
+                    <a:pt x="5627559" y="274448"/>
+                  </a:lnTo>
+                  <a:lnTo>
+                    <a:pt x="5697903" y="274687"/>
+                  </a:lnTo>
+                  <a:lnTo>
+                    <a:pt x="5768248" y="274926"/>
+                  </a:lnTo>
+                  <a:lnTo>
+                    <a:pt x="5838592" y="275165"/>
+                  </a:lnTo>
+                  <a:lnTo>
+                    <a:pt x="5908937" y="275404"/>
+                  </a:lnTo>
+                  <a:lnTo>
+                    <a:pt x="5979281" y="275642"/>
+                  </a:lnTo>
+                  <a:lnTo>
+                    <a:pt x="6049626" y="275880"/>
+                  </a:lnTo>
+                  <a:lnTo>
+                    <a:pt x="6119970" y="276118"/>
+                  </a:lnTo>
+                  <a:lnTo>
+                    <a:pt x="6190315" y="276356"/>
+                  </a:lnTo>
+                  <a:lnTo>
+                    <a:pt x="6260659" y="276594"/>
+                  </a:lnTo>
+                  <a:lnTo>
+                    <a:pt x="6331004" y="276831"/>
+                  </a:lnTo>
+                  <a:lnTo>
+                    <a:pt x="6401348" y="277068"/>
+                  </a:lnTo>
+                  <a:lnTo>
+                    <a:pt x="6471693" y="277306"/>
+                  </a:lnTo>
+                  <a:lnTo>
+                    <a:pt x="6542037" y="277542"/>
+                  </a:lnTo>
+                  <a:lnTo>
+                    <a:pt x="6612382" y="277779"/>
+                  </a:lnTo>
+                  <a:lnTo>
+                    <a:pt x="6682726" y="278016"/>
+                  </a:lnTo>
+                  <a:lnTo>
+                    <a:pt x="6753071" y="278252"/>
+                  </a:lnTo>
+                  <a:lnTo>
+                    <a:pt x="6823415" y="278488"/>
+                  </a:lnTo>
+                  <a:lnTo>
+                    <a:pt x="6893760" y="278724"/>
+                  </a:lnTo>
+                  <a:lnTo>
+                    <a:pt x="6964104" y="278960"/>
+                  </a:lnTo>
+                  <a:lnTo>
+                    <a:pt x="6964104" y="431479"/>
+                  </a:lnTo>
+                  <a:lnTo>
+                    <a:pt x="6893760" y="429520"/>
+                  </a:lnTo>
+                  <a:lnTo>
+                    <a:pt x="6823415" y="427532"/>
+                  </a:lnTo>
+                  <a:lnTo>
+                    <a:pt x="6753071" y="425514"/>
+                  </a:lnTo>
+                  <a:lnTo>
+                    <a:pt x="6682726" y="423467"/>
+                  </a:lnTo>
+                  <a:lnTo>
+                    <a:pt x="6612382" y="421390"/>
+                  </a:lnTo>
+                  <a:lnTo>
+                    <a:pt x="6542037" y="419283"/>
+                  </a:lnTo>
+                  <a:lnTo>
+                    <a:pt x="6471693" y="417144"/>
+                  </a:lnTo>
+                  <a:lnTo>
+                    <a:pt x="6401348" y="414975"/>
+                  </a:lnTo>
+                  <a:lnTo>
+                    <a:pt x="6331004" y="412773"/>
+                  </a:lnTo>
+                  <a:lnTo>
+                    <a:pt x="6260659" y="410539"/>
+                  </a:lnTo>
+                  <a:lnTo>
+                    <a:pt x="6190315" y="408272"/>
+                  </a:lnTo>
+                  <a:lnTo>
+                    <a:pt x="6119970" y="405972"/>
+                  </a:lnTo>
+                  <a:lnTo>
+                    <a:pt x="6049626" y="403638"/>
+                  </a:lnTo>
+                  <a:lnTo>
+                    <a:pt x="5979281" y="401270"/>
+                  </a:lnTo>
+                  <a:lnTo>
+                    <a:pt x="5908937" y="398867"/>
+                  </a:lnTo>
+                  <a:lnTo>
+                    <a:pt x="5838592" y="396429"/>
+                  </a:lnTo>
+                  <a:lnTo>
+                    <a:pt x="5768248" y="393955"/>
+                  </a:lnTo>
+                  <a:lnTo>
+                    <a:pt x="5697903" y="391445"/>
+                  </a:lnTo>
+                  <a:lnTo>
+                    <a:pt x="5627559" y="388897"/>
+                  </a:lnTo>
+                  <a:lnTo>
+                    <a:pt x="5557214" y="386313"/>
+                  </a:lnTo>
+                  <a:lnTo>
+                    <a:pt x="5486870" y="383690"/>
+                  </a:lnTo>
+                  <a:lnTo>
+                    <a:pt x="5416525" y="381029"/>
+                  </a:lnTo>
+                  <a:lnTo>
+                    <a:pt x="5346181" y="378329"/>
+                  </a:lnTo>
+                  <a:lnTo>
+                    <a:pt x="5275836" y="375590"/>
+                  </a:lnTo>
+                  <a:lnTo>
+                    <a:pt x="5205492" y="372810"/>
+                  </a:lnTo>
+                  <a:lnTo>
+                    <a:pt x="5135147" y="369989"/>
+                  </a:lnTo>
+                  <a:lnTo>
+                    <a:pt x="5064803" y="367127"/>
+                  </a:lnTo>
+                  <a:lnTo>
+                    <a:pt x="4994458" y="364223"/>
+                  </a:lnTo>
+                  <a:lnTo>
+                    <a:pt x="4924114" y="361276"/>
+                  </a:lnTo>
+                  <a:lnTo>
+                    <a:pt x="4853769" y="358286"/>
+                  </a:lnTo>
+                  <a:lnTo>
+                    <a:pt x="4783425" y="355252"/>
+                  </a:lnTo>
+                  <a:lnTo>
+                    <a:pt x="4713080" y="352173"/>
+                  </a:lnTo>
+                  <a:lnTo>
+                    <a:pt x="4642736" y="349049"/>
+                  </a:lnTo>
+                  <a:lnTo>
+                    <a:pt x="4572391" y="345880"/>
+                  </a:lnTo>
+                  <a:lnTo>
+                    <a:pt x="4502047" y="342664"/>
+                  </a:lnTo>
+                  <a:lnTo>
+                    <a:pt x="4431702" y="339400"/>
+                  </a:lnTo>
+                  <a:lnTo>
+                    <a:pt x="4361358" y="336089"/>
+                  </a:lnTo>
+                  <a:lnTo>
+                    <a:pt x="4291013" y="332729"/>
+                  </a:lnTo>
+                  <a:lnTo>
+                    <a:pt x="4220669" y="329320"/>
+                  </a:lnTo>
+                  <a:lnTo>
+                    <a:pt x="4150324" y="325861"/>
+                  </a:lnTo>
+                  <a:lnTo>
+                    <a:pt x="4079980" y="322351"/>
+                  </a:lnTo>
+                  <a:lnTo>
+                    <a:pt x="4009635" y="318789"/>
+                  </a:lnTo>
+                  <a:lnTo>
+                    <a:pt x="3939291" y="315175"/>
+                  </a:lnTo>
+                  <a:lnTo>
+                    <a:pt x="3868946" y="311508"/>
+                  </a:lnTo>
+                  <a:lnTo>
+                    <a:pt x="3798602" y="307787"/>
+                  </a:lnTo>
+                  <a:lnTo>
+                    <a:pt x="3728257" y="304012"/>
+                  </a:lnTo>
+                  <a:lnTo>
+                    <a:pt x="3657913" y="300181"/>
+                  </a:lnTo>
+                  <a:lnTo>
+                    <a:pt x="3587569" y="296294"/>
+                  </a:lnTo>
+                  <a:lnTo>
+                    <a:pt x="3517224" y="292350"/>
+                  </a:lnTo>
+                  <a:lnTo>
+                    <a:pt x="3446880" y="288348"/>
+                  </a:lnTo>
+                  <a:lnTo>
+                    <a:pt x="3376535" y="284287"/>
+                  </a:lnTo>
+                  <a:lnTo>
+                    <a:pt x="3306191" y="280166"/>
+                  </a:lnTo>
+                  <a:lnTo>
+                    <a:pt x="3235846" y="275985"/>
+                  </a:lnTo>
+                  <a:lnTo>
+                    <a:pt x="3165502" y="271743"/>
+                  </a:lnTo>
+                  <a:lnTo>
+                    <a:pt x="3095157" y="267439"/>
+                  </a:lnTo>
+                  <a:lnTo>
+                    <a:pt x="3024813" y="265456"/>
+                  </a:lnTo>
+                  <a:lnTo>
+                    <a:pt x="2954468" y="265210"/>
+                  </a:lnTo>
+                  <a:lnTo>
+                    <a:pt x="2884124" y="264962"/>
+                  </a:lnTo>
+                  <a:lnTo>
+                    <a:pt x="2813779" y="264715"/>
+                  </a:lnTo>
+                  <a:lnTo>
+                    <a:pt x="2743435" y="264468"/>
+                  </a:lnTo>
+                  <a:lnTo>
+                    <a:pt x="2673090" y="264220"/>
+                  </a:lnTo>
+                  <a:lnTo>
+                    <a:pt x="2602746" y="263972"/>
+                  </a:lnTo>
+                  <a:lnTo>
+                    <a:pt x="2532401" y="263724"/>
+                  </a:lnTo>
+                  <a:lnTo>
+                    <a:pt x="2462057" y="263476"/>
+                  </a:lnTo>
+                  <a:lnTo>
+                    <a:pt x="2391712" y="263228"/>
+                  </a:lnTo>
+                  <a:lnTo>
+                    <a:pt x="2321368" y="262979"/>
+                  </a:lnTo>
+                  <a:lnTo>
+                    <a:pt x="2251023" y="262730"/>
+                  </a:lnTo>
+                  <a:lnTo>
+                    <a:pt x="2180679" y="262481"/>
+                  </a:lnTo>
+                  <a:lnTo>
+                    <a:pt x="2110334" y="262232"/>
+                  </a:lnTo>
+                  <a:lnTo>
+                    <a:pt x="2039990" y="261982"/>
+                  </a:lnTo>
+                  <a:lnTo>
+                    <a:pt x="1969645" y="261732"/>
+                  </a:lnTo>
+                  <a:lnTo>
+                    <a:pt x="1899301" y="261482"/>
+                  </a:lnTo>
+                  <a:lnTo>
+                    <a:pt x="1828956" y="261232"/>
+                  </a:lnTo>
+                  <a:lnTo>
+                    <a:pt x="1758612" y="260982"/>
+                  </a:lnTo>
+                  <a:lnTo>
+                    <a:pt x="1688267" y="260732"/>
+                  </a:lnTo>
+                  <a:lnTo>
+                    <a:pt x="1617923" y="260481"/>
+                  </a:lnTo>
+                  <a:lnTo>
+                    <a:pt x="1547578" y="260230"/>
+                  </a:lnTo>
+                  <a:lnTo>
+                    <a:pt x="1477234" y="259979"/>
+                  </a:lnTo>
+                  <a:lnTo>
+                    <a:pt x="1406889" y="259727"/>
+                  </a:lnTo>
+                  <a:lnTo>
+                    <a:pt x="1336545" y="259476"/>
+                  </a:lnTo>
+                  <a:lnTo>
+                    <a:pt x="1266200" y="259224"/>
+                  </a:lnTo>
+                  <a:lnTo>
+                    <a:pt x="1195856" y="258972"/>
+                  </a:lnTo>
+                  <a:lnTo>
+                    <a:pt x="1125511" y="258720"/>
+                  </a:lnTo>
+                  <a:lnTo>
+                    <a:pt x="1055167" y="258468"/>
+                  </a:lnTo>
+                  <a:lnTo>
+                    <a:pt x="984822" y="258215"/>
+                  </a:lnTo>
+                  <a:lnTo>
+                    <a:pt x="914478" y="257962"/>
+                  </a:lnTo>
+                  <a:lnTo>
+                    <a:pt x="844133" y="257709"/>
+                  </a:lnTo>
+                  <a:lnTo>
+                    <a:pt x="773789" y="257456"/>
+                  </a:lnTo>
+                  <a:lnTo>
+                    <a:pt x="703444" y="257202"/>
+                  </a:lnTo>
+                  <a:lnTo>
+                    <a:pt x="633100" y="256949"/>
+                  </a:lnTo>
+                  <a:lnTo>
+                    <a:pt x="562755" y="256695"/>
+                  </a:lnTo>
+                  <a:lnTo>
+                    <a:pt x="492411" y="256441"/>
+                  </a:lnTo>
+                  <a:lnTo>
+                    <a:pt x="422066" y="256187"/>
+                  </a:lnTo>
+                  <a:lnTo>
+                    <a:pt x="351722" y="255932"/>
+                  </a:lnTo>
+                  <a:lnTo>
+                    <a:pt x="281377" y="255677"/>
+                  </a:lnTo>
+                  <a:lnTo>
+                    <a:pt x="211033" y="255423"/>
+                  </a:lnTo>
+                  <a:lnTo>
+                    <a:pt x="140688" y="255167"/>
+                  </a:lnTo>
+                  <a:lnTo>
+                    <a:pt x="70344" y="254912"/>
+                  </a:lnTo>
+                  <a:lnTo>
+                    <a:pt x="0" y="254657"/>
+                  </a:lnTo>
+                  <a:close/>
+                </a:path>
+              </a:pathLst>
+            </a:custGeom>
+            <a:solidFill>
+              <a:srgbClr val="FF8C00">
+                <a:alpha val="20000"/>
+              </a:srgbClr>
+            </a:solidFill>
+          </p:spPr>
+          <p:txBody>
+            <a:bodyPr/>
+            <a:lstStyle/>
+            <a:p/>
+          </p:txBody>
+        </p:sp>
+        <p:sp>
+          <p:nvSpPr>
+            <p:cNvPr id="72" name="pl72"/>
+            <p:cNvSpPr/>
+            <p:nvPr/>
+          </p:nvSpPr>
+          <p:spPr>
+            <a:xfrm>
+              <a:off x="1235312" y="5028753"/>
+              <a:ext cx="6964104" cy="278960"/>
+            </a:xfrm>
+            <a:custGeom>
+              <a:avLst/>
+              <a:pathLst>
+                <a:path w="6964104" h="278960">
+                  <a:moveTo>
+                    <a:pt x="0" y="0"/>
+                  </a:moveTo>
+                  <a:lnTo>
+                    <a:pt x="70344" y="8174"/>
+                  </a:lnTo>
+                  <a:lnTo>
+                    <a:pt x="140688" y="16230"/>
+                  </a:lnTo>
+                  <a:lnTo>
+                    <a:pt x="211033" y="24169"/>
+                  </a:lnTo>
+                  <a:lnTo>
+                    <a:pt x="281377" y="31994"/>
+                  </a:lnTo>
+                  <a:lnTo>
+                    <a:pt x="351722" y="39705"/>
+                  </a:lnTo>
+                  <a:lnTo>
+                    <a:pt x="422066" y="47305"/>
+                  </a:lnTo>
+                  <a:lnTo>
+                    <a:pt x="492411" y="54795"/>
+                  </a:lnTo>
+                  <a:lnTo>
+                    <a:pt x="562755" y="62177"/>
+                  </a:lnTo>
+                  <a:lnTo>
+                    <a:pt x="633100" y="69451"/>
+                  </a:lnTo>
+                  <a:lnTo>
+                    <a:pt x="703444" y="76621"/>
+                  </a:lnTo>
+                  <a:lnTo>
+                    <a:pt x="773789" y="83686"/>
+                  </a:lnTo>
+                  <a:lnTo>
+                    <a:pt x="844133" y="90650"/>
+                  </a:lnTo>
+                  <a:lnTo>
+                    <a:pt x="914478" y="97512"/>
+                  </a:lnTo>
+                  <a:lnTo>
+                    <a:pt x="984822" y="104276"/>
+                  </a:lnTo>
+                  <a:lnTo>
+                    <a:pt x="1055167" y="110941"/>
+                  </a:lnTo>
+                  <a:lnTo>
+                    <a:pt x="1125511" y="117510"/>
+                  </a:lnTo>
+                  <a:lnTo>
+                    <a:pt x="1195856" y="123984"/>
+                  </a:lnTo>
+                  <a:lnTo>
+                    <a:pt x="1266200" y="130365"/>
+                  </a:lnTo>
+                  <a:lnTo>
+                    <a:pt x="1336545" y="136653"/>
+                  </a:lnTo>
+                  <a:lnTo>
+                    <a:pt x="1406889" y="142850"/>
+                  </a:lnTo>
+                  <a:lnTo>
+                    <a:pt x="1477234" y="148957"/>
+                  </a:lnTo>
+                  <a:lnTo>
+                    <a:pt x="1547578" y="154976"/>
+                  </a:lnTo>
+                  <a:lnTo>
+                    <a:pt x="1617923" y="160908"/>
+                  </a:lnTo>
+                  <a:lnTo>
+                    <a:pt x="1688267" y="166754"/>
+                  </a:lnTo>
+                  <a:lnTo>
+                    <a:pt x="1758612" y="172516"/>
+                  </a:lnTo>
+                  <a:lnTo>
+                    <a:pt x="1828956" y="178194"/>
+                  </a:lnTo>
+                  <a:lnTo>
+                    <a:pt x="1899301" y="183790"/>
+                  </a:lnTo>
+                  <a:lnTo>
+                    <a:pt x="1969645" y="189305"/>
+                  </a:lnTo>
+                  <a:lnTo>
+                    <a:pt x="2039990" y="194740"/>
+                  </a:lnTo>
+                  <a:lnTo>
+                    <a:pt x="2110334" y="200096"/>
+                  </a:lnTo>
+                  <a:lnTo>
+                    <a:pt x="2180679" y="205375"/>
+                  </a:lnTo>
+                  <a:lnTo>
+                    <a:pt x="2251023" y="210578"/>
+                  </a:lnTo>
+                  <a:lnTo>
+                    <a:pt x="2321368" y="215705"/>
+                  </a:lnTo>
+                  <a:lnTo>
+                    <a:pt x="2391712" y="220759"/>
+                  </a:lnTo>
+                  <a:lnTo>
+                    <a:pt x="2462057" y="225739"/>
+                  </a:lnTo>
+                  <a:lnTo>
+                    <a:pt x="2532401" y="230647"/>
+                  </a:lnTo>
+                  <a:lnTo>
+                    <a:pt x="2602746" y="235484"/>
+                  </a:lnTo>
+                  <a:lnTo>
+                    <a:pt x="2673090" y="240251"/>
+                  </a:lnTo>
+                  <a:lnTo>
+                    <a:pt x="2743435" y="244949"/>
+                  </a:lnTo>
+                  <a:lnTo>
+                    <a:pt x="2813779" y="249579"/>
+                  </a:lnTo>
+                  <a:lnTo>
+                    <a:pt x="2884124" y="254142"/>
+                  </a:lnTo>
+                  <a:lnTo>
+                    <a:pt x="2954468" y="258639"/>
+                  </a:lnTo>
+                  <a:lnTo>
+                    <a:pt x="3024813" y="263071"/>
+                  </a:lnTo>
+                  <a:lnTo>
+                    <a:pt x="3095157" y="265703"/>
+                  </a:lnTo>
+                  <a:lnTo>
+                    <a:pt x="3165502" y="265949"/>
+                  </a:lnTo>
+                  <a:lnTo>
+                    <a:pt x="3235846" y="266196"/>
+                  </a:lnTo>
+                  <a:lnTo>
+                    <a:pt x="3306191" y="266442"/>
+                  </a:lnTo>
+                  <a:lnTo>
+                    <a:pt x="3376535" y="266688"/>
+                  </a:lnTo>
+                  <a:lnTo>
+                    <a:pt x="3446880" y="266933"/>
+                  </a:lnTo>
+                  <a:lnTo>
+                    <a:pt x="3517224" y="267179"/>
+                  </a:lnTo>
+                  <a:lnTo>
+                    <a:pt x="3587569" y="267424"/>
+                  </a:lnTo>
+                  <a:lnTo>
+                    <a:pt x="3657913" y="267669"/>
+                  </a:lnTo>
+                  <a:lnTo>
+                    <a:pt x="3728257" y="267914"/>
+                  </a:lnTo>
+                  <a:lnTo>
+                    <a:pt x="3798602" y="268158"/>
+                  </a:lnTo>
+                  <a:lnTo>
+                    <a:pt x="3868946" y="268403"/>
+                  </a:lnTo>
+                  <a:lnTo>
+                    <a:pt x="3939291" y="268647"/>
+                  </a:lnTo>
+                  <a:lnTo>
+                    <a:pt x="4009635" y="268891"/>
+                  </a:lnTo>
+                  <a:lnTo>
+                    <a:pt x="4079980" y="269135"/>
+                  </a:lnTo>
+                  <a:lnTo>
+                    <a:pt x="4150324" y="269378"/>
+                  </a:lnTo>
+                  <a:lnTo>
+                    <a:pt x="4220669" y="269622"/>
+                  </a:lnTo>
+                  <a:lnTo>
+                    <a:pt x="4291013" y="269865"/>
+                  </a:lnTo>
+                  <a:lnTo>
+                    <a:pt x="4361358" y="270108"/>
+                  </a:lnTo>
+                  <a:lnTo>
+                    <a:pt x="4431702" y="270351"/>
+                  </a:lnTo>
+                  <a:lnTo>
+                    <a:pt x="4502047" y="270593"/>
+                  </a:lnTo>
+                  <a:lnTo>
+                    <a:pt x="4572391" y="270836"/>
+                  </a:lnTo>
+                  <a:lnTo>
+                    <a:pt x="4642736" y="271078"/>
+                  </a:lnTo>
+                  <a:lnTo>
+                    <a:pt x="4713080" y="271320"/>
+                  </a:lnTo>
+                  <a:lnTo>
+                    <a:pt x="4783425" y="271562"/>
+                  </a:lnTo>
+                  <a:lnTo>
+                    <a:pt x="4853769" y="271803"/>
+                  </a:lnTo>
+                  <a:lnTo>
+                    <a:pt x="4924114" y="272045"/>
+                  </a:lnTo>
+                  <a:lnTo>
+                    <a:pt x="4994458" y="272286"/>
+                  </a:lnTo>
+                  <a:lnTo>
+                    <a:pt x="5064803" y="272527"/>
+                  </a:lnTo>
+                  <a:lnTo>
+                    <a:pt x="5135147" y="272768"/>
+                  </a:lnTo>
+                  <a:lnTo>
+                    <a:pt x="5205492" y="273008"/>
+                  </a:lnTo>
+                  <a:lnTo>
+                    <a:pt x="5275836" y="273249"/>
+                  </a:lnTo>
+                  <a:lnTo>
+                    <a:pt x="5346181" y="273489"/>
+                  </a:lnTo>
+                  <a:lnTo>
+                    <a:pt x="5416525" y="273729"/>
+                  </a:lnTo>
+                  <a:lnTo>
+                    <a:pt x="5486870" y="273969"/>
+                  </a:lnTo>
+                  <a:lnTo>
+                    <a:pt x="5557214" y="274208"/>
+                  </a:lnTo>
+                  <a:lnTo>
+                    <a:pt x="5627559" y="274448"/>
+                  </a:lnTo>
+                  <a:lnTo>
+                    <a:pt x="5697903" y="274687"/>
+                  </a:lnTo>
+                  <a:lnTo>
+                    <a:pt x="5768248" y="274926"/>
+                  </a:lnTo>
+                  <a:lnTo>
+                    <a:pt x="5838592" y="275165"/>
+                  </a:lnTo>
+                  <a:lnTo>
+                    <a:pt x="5908937" y="275404"/>
+                  </a:lnTo>
+                  <a:lnTo>
+                    <a:pt x="5979281" y="275642"/>
+                  </a:lnTo>
+                  <a:lnTo>
+                    <a:pt x="6049626" y="275880"/>
+                  </a:lnTo>
+                  <a:lnTo>
+                    <a:pt x="6119970" y="276118"/>
+                  </a:lnTo>
+                  <a:lnTo>
+                    <a:pt x="6190315" y="276356"/>
+                  </a:lnTo>
+                  <a:lnTo>
+                    <a:pt x="6260659" y="276594"/>
+                  </a:lnTo>
+                  <a:lnTo>
+                    <a:pt x="6331004" y="276831"/>
+                  </a:lnTo>
+                  <a:lnTo>
+                    <a:pt x="6401348" y="277068"/>
+                  </a:lnTo>
+                  <a:lnTo>
+                    <a:pt x="6471693" y="277306"/>
+                  </a:lnTo>
+                  <a:lnTo>
+                    <a:pt x="6542037" y="277542"/>
+                  </a:lnTo>
+                  <a:lnTo>
+                    <a:pt x="6612382" y="277779"/>
+                  </a:lnTo>
+                  <a:lnTo>
+                    <a:pt x="6682726" y="278016"/>
+                  </a:lnTo>
+                  <a:lnTo>
+                    <a:pt x="6753071" y="278252"/>
+                  </a:lnTo>
+                  <a:lnTo>
+                    <a:pt x="6823415" y="278488"/>
+                  </a:lnTo>
+                  <a:lnTo>
+                    <a:pt x="6893760" y="278724"/>
+                  </a:lnTo>
+                  <a:lnTo>
+                    <a:pt x="6964104" y="278960"/>
+                  </a:lnTo>
+                </a:path>
+              </a:pathLst>
+            </a:custGeom>
+          </p:spPr>
+          <p:txBody>
+            <a:bodyPr/>
+            <a:lstStyle/>
+            <a:p/>
+          </p:txBody>
+        </p:sp>
+        <p:sp>
+          <p:nvSpPr>
+            <p:cNvPr id="73" name="pl73"/>
+            <p:cNvSpPr/>
+            <p:nvPr/>
+          </p:nvSpPr>
+          <p:spPr>
+            <a:xfrm>
+              <a:off x="1235312" y="5283410"/>
+              <a:ext cx="6964104" cy="176822"/>
+            </a:xfrm>
+            <a:custGeom>
+              <a:avLst/>
+              <a:pathLst>
+                <a:path w="6964104" h="176822">
+                  <a:moveTo>
+                    <a:pt x="6964104" y="176822"/>
+                  </a:moveTo>
+                  <a:lnTo>
+                    <a:pt x="6893760" y="174863"/>
+                  </a:lnTo>
+                  <a:lnTo>
+                    <a:pt x="6823415" y="172874"/>
+                  </a:lnTo>
+                  <a:lnTo>
+                    <a:pt x="6753071" y="170857"/>
+                  </a:lnTo>
+                  <a:lnTo>
+                    <a:pt x="6682726" y="168810"/>
+                  </a:lnTo>
+                  <a:lnTo>
+                    <a:pt x="6612382" y="166733"/>
+                  </a:lnTo>
+                  <a:lnTo>
+                    <a:pt x="6542037" y="164626"/>
+                  </a:lnTo>
+                  <a:lnTo>
+                    <a:pt x="6471693" y="162487"/>
+                  </a:lnTo>
+                  <a:lnTo>
+                    <a:pt x="6401348" y="160317"/>
+                  </a:lnTo>
+                  <a:lnTo>
+                    <a:pt x="6331004" y="158116"/>
+                  </a:lnTo>
+                  <a:lnTo>
+                    <a:pt x="6260659" y="155882"/>
+                  </a:lnTo>
+                  <a:lnTo>
+                    <a:pt x="6190315" y="153615"/>
+                  </a:lnTo>
+                  <a:lnTo>
+                    <a:pt x="6119970" y="151315"/>
+                  </a:lnTo>
+                  <a:lnTo>
+                    <a:pt x="6049626" y="148981"/>
+                  </a:lnTo>
+                  <a:lnTo>
+                    <a:pt x="5979281" y="146613"/>
+                  </a:lnTo>
+                  <a:lnTo>
+                    <a:pt x="5908937" y="144210"/>
+                  </a:lnTo>
+                  <a:lnTo>
+                    <a:pt x="5838592" y="141772"/>
+                  </a:lnTo>
+                  <a:lnTo>
+                    <a:pt x="5768248" y="139298"/>
+                  </a:lnTo>
+                  <a:lnTo>
+                    <a:pt x="5697903" y="136787"/>
+                  </a:lnTo>
+                  <a:lnTo>
+                    <a:pt x="5627559" y="134240"/>
+                  </a:lnTo>
+                  <a:lnTo>
+                    <a:pt x="5557214" y="131656"/>
+                  </a:lnTo>
+                  <a:lnTo>
+                    <a:pt x="5486870" y="129033"/>
+                  </a:lnTo>
+                  <a:lnTo>
+                    <a:pt x="5416525" y="126372"/>
+                  </a:lnTo>
+                  <a:lnTo>
+                    <a:pt x="5346181" y="123672"/>
+                  </a:lnTo>
+                  <a:lnTo>
+                    <a:pt x="5275836" y="120932"/>
+                  </a:lnTo>
+                  <a:lnTo>
+                    <a:pt x="5205492" y="118153"/>
+                  </a:lnTo>
+                  <a:lnTo>
+                    <a:pt x="5135147" y="115332"/>
+                  </a:lnTo>
+                  <a:lnTo>
+                    <a:pt x="5064803" y="112470"/>
+                  </a:lnTo>
+                  <a:lnTo>
+                    <a:pt x="4994458" y="109565"/>
+                  </a:lnTo>
+                  <a:lnTo>
+                    <a:pt x="4924114" y="106619"/>
+                  </a:lnTo>
+                  <a:lnTo>
+                    <a:pt x="4853769" y="103628"/>
+                  </a:lnTo>
+                  <a:lnTo>
+                    <a:pt x="4783425" y="100594"/>
+                  </a:lnTo>
+                  <a:lnTo>
+                    <a:pt x="4713080" y="97516"/>
+                  </a:lnTo>
+                  <a:lnTo>
+                    <a:pt x="4642736" y="94392"/>
+                  </a:lnTo>
+                  <a:lnTo>
+                    <a:pt x="4572391" y="91223"/>
+                  </a:lnTo>
+                  <a:lnTo>
+                    <a:pt x="4502047" y="88006"/>
+                  </a:lnTo>
+                  <a:lnTo>
+                    <a:pt x="4431702" y="84743"/>
+                  </a:lnTo>
+                  <a:lnTo>
+                    <a:pt x="4361358" y="81432"/>
+                  </a:lnTo>
+                  <a:lnTo>
+                    <a:pt x="4291013" y="78072"/>
+                  </a:lnTo>
+                  <a:lnTo>
+                    <a:pt x="4220669" y="74663"/>
+                  </a:lnTo>
+                  <a:lnTo>
+                    <a:pt x="4150324" y="71203"/>
+                  </a:lnTo>
+                  <a:lnTo>
+                    <a:pt x="4079980" y="67693"/>
+                  </a:lnTo>
+                  <a:lnTo>
+                    <a:pt x="4009635" y="64132"/>
+                  </a:lnTo>
+                  <a:lnTo>
+                    <a:pt x="3939291" y="60518"/>
+                  </a:lnTo>
+                  <a:lnTo>
+                    <a:pt x="3868946" y="56851"/>
+                  </a:lnTo>
+                  <a:lnTo>
+                    <a:pt x="3798602" y="53130"/>
+                  </a:lnTo>
+                  <a:lnTo>
+                    <a:pt x="3728257" y="49355"/>
+                  </a:lnTo>
+                  <a:lnTo>
+                    <a:pt x="3657913" y="45524"/>
+                  </a:lnTo>
+                  <a:lnTo>
+                    <a:pt x="3587569" y="41637"/>
+                  </a:lnTo>
+                  <a:lnTo>
+                    <a:pt x="3517224" y="37693"/>
+                  </a:lnTo>
+                  <a:lnTo>
+                    <a:pt x="3446880" y="33691"/>
+                  </a:lnTo>
+                  <a:lnTo>
+                    <a:pt x="3376535" y="29630"/>
+                  </a:lnTo>
+                  <a:lnTo>
+                    <a:pt x="3306191" y="25509"/>
+                  </a:lnTo>
+                  <a:lnTo>
+                    <a:pt x="3235846" y="21328"/>
+                  </a:lnTo>
+                  <a:lnTo>
+                    <a:pt x="3165502" y="17086"/>
+                  </a:lnTo>
+                  <a:lnTo>
+                    <a:pt x="3095157" y="12781"/>
+                  </a:lnTo>
+                  <a:lnTo>
+                    <a:pt x="3024813" y="10799"/>
+                  </a:lnTo>
+                  <a:lnTo>
+                    <a:pt x="2954468" y="10552"/>
+                  </a:lnTo>
+                  <a:lnTo>
+                    <a:pt x="2884124" y="10305"/>
+                  </a:lnTo>
+                  <a:lnTo>
+                    <a:pt x="2813779" y="10058"/>
+                  </a:lnTo>
+                  <a:lnTo>
+                    <a:pt x="2743435" y="9811"/>
+                  </a:lnTo>
+                  <a:lnTo>
+                    <a:pt x="2673090" y="9563"/>
+                  </a:lnTo>
+                  <a:lnTo>
+                    <a:pt x="2602746" y="9315"/>
+                  </a:lnTo>
+                  <a:lnTo>
+                    <a:pt x="2532401" y="9067"/>
+                  </a:lnTo>
+                  <a:lnTo>
+                    <a:pt x="2462057" y="8819"/>
+                  </a:lnTo>
+                  <a:lnTo>
+                    <a:pt x="2391712" y="8570"/>
+                  </a:lnTo>
+                  <a:lnTo>
+                    <a:pt x="2321368" y="8322"/>
+                  </a:lnTo>
+                  <a:lnTo>
+                    <a:pt x="2251023" y="8073"/>
+                  </a:lnTo>
+                  <a:lnTo>
+                    <a:pt x="2180679" y="7824"/>
+                  </a:lnTo>
+                  <a:lnTo>
+                    <a:pt x="2110334" y="7574"/>
+                  </a:lnTo>
+                  <a:lnTo>
+                    <a:pt x="2039990" y="7325"/>
+                  </a:lnTo>
+                  <a:lnTo>
+                    <a:pt x="1969645" y="7075"/>
+                  </a:lnTo>
+                  <a:lnTo>
+                    <a:pt x="1899301" y="6825"/>
+                  </a:lnTo>
+                  <a:lnTo>
+                    <a:pt x="1828956" y="6575"/>
+                  </a:lnTo>
+                  <a:lnTo>
+                    <a:pt x="1758612" y="6325"/>
+                  </a:lnTo>
+                  <a:lnTo>
+                    <a:pt x="1688267" y="6074"/>
+                  </a:lnTo>
+                  <a:lnTo>
+                    <a:pt x="1617923" y="5824"/>
+                  </a:lnTo>
+                  <a:lnTo>
+                    <a:pt x="1547578" y="5573"/>
+                  </a:lnTo>
+                  <a:lnTo>
+                    <a:pt x="1477234" y="5322"/>
+                  </a:lnTo>
+                  <a:lnTo>
+                    <a:pt x="1406889" y="5070"/>
+                  </a:lnTo>
+                  <a:lnTo>
+                    <a:pt x="1336545" y="4819"/>
+                  </a:lnTo>
+                  <a:lnTo>
+                    <a:pt x="1266200" y="4567"/>
+                  </a:lnTo>
+                  <a:lnTo>
+                    <a:pt x="1195856" y="4315"/>
+                  </a:lnTo>
+                  <a:lnTo>
+                    <a:pt x="1125511" y="4063"/>
+                  </a:lnTo>
+                  <a:lnTo>
+                    <a:pt x="1055167" y="3810"/>
+                  </a:lnTo>
+                  <a:lnTo>
+                    <a:pt x="984822" y="3558"/>
+                  </a:lnTo>
+                  <a:lnTo>
+                    <a:pt x="914478" y="3305"/>
+                  </a:lnTo>
+                  <a:lnTo>
+                    <a:pt x="844133" y="3052"/>
+                  </a:lnTo>
+                  <a:lnTo>
+                    <a:pt x="773789" y="2799"/>
+                  </a:lnTo>
+                  <a:lnTo>
+                    <a:pt x="703444" y="2545"/>
+                  </a:lnTo>
+                  <a:lnTo>
+                    <a:pt x="633100" y="2292"/>
+                  </a:lnTo>
+                  <a:lnTo>
+                    <a:pt x="562755" y="2038"/>
+                  </a:lnTo>
+                  <a:lnTo>
+                    <a:pt x="492411" y="1784"/>
+                  </a:lnTo>
+                  <a:lnTo>
+                    <a:pt x="422066" y="1530"/>
+                  </a:lnTo>
+                  <a:lnTo>
+                    <a:pt x="351722" y="1275"/>
+                  </a:lnTo>
+                  <a:lnTo>
+                    <a:pt x="281377" y="1020"/>
+                  </a:lnTo>
+                  <a:lnTo>
+                    <a:pt x="211033" y="765"/>
+                  </a:lnTo>
+                  <a:lnTo>
+                    <a:pt x="140688" y="510"/>
+                  </a:lnTo>
+                  <a:lnTo>
+                    <a:pt x="70344" y="255"/>
+                  </a:lnTo>
+                  <a:lnTo>
+                    <a:pt x="0" y="0"/>
+                  </a:lnTo>
+                </a:path>
+              </a:pathLst>
+            </a:custGeom>
+          </p:spPr>
+          <p:txBody>
+            <a:bodyPr/>
+            <a:lstStyle/>
+            <a:p/>
+          </p:txBody>
+        </p:sp>
+        <p:sp>
+          <p:nvSpPr>
+            <p:cNvPr id="74" name="pl74"/>
+            <p:cNvSpPr/>
+            <p:nvPr/>
+          </p:nvSpPr>
+          <p:spPr>
+            <a:xfrm>
+              <a:off x="1235312" y="5175016"/>
+              <a:ext cx="6964104" cy="223314"/>
+            </a:xfrm>
+            <a:custGeom>
+              <a:avLst/>
+              <a:pathLst>
+                <a:path w="6964104" h="223314">
+                  <a:moveTo>
+                    <a:pt x="0" y="0"/>
+                  </a:moveTo>
+                  <a:lnTo>
+                    <a:pt x="70344" y="3211"/>
+                  </a:lnTo>
+                  <a:lnTo>
+                    <a:pt x="140688" y="6397"/>
+                  </a:lnTo>
+                  <a:lnTo>
+                    <a:pt x="211033" y="9559"/>
+                  </a:lnTo>
+                  <a:lnTo>
+                    <a:pt x="281377" y="12697"/>
+                  </a:lnTo>
+                  <a:lnTo>
+                    <a:pt x="351722" y="15811"/>
+                  </a:lnTo>
+                  <a:lnTo>
+                    <a:pt x="422066" y="18901"/>
+                  </a:lnTo>
+                  <a:lnTo>
+                    <a:pt x="492411" y="21967"/>
+                  </a:lnTo>
+                  <a:lnTo>
+                    <a:pt x="562755" y="25010"/>
+                  </a:lnTo>
+                  <a:lnTo>
+                    <a:pt x="633100" y="28029"/>
+                  </a:lnTo>
+                  <a:lnTo>
+                    <a:pt x="703444" y="31026"/>
+                  </a:lnTo>
+                  <a:lnTo>
+                    <a:pt x="773789" y="33999"/>
+                  </a:lnTo>
+                  <a:lnTo>
+                    <a:pt x="844133" y="36949"/>
+                  </a:lnTo>
+                  <a:lnTo>
+                    <a:pt x="914478" y="39877"/>
+                  </a:lnTo>
+                  <a:lnTo>
+                    <a:pt x="984822" y="42783"/>
+                  </a:lnTo>
+                  <a:lnTo>
+                    <a:pt x="1055167" y="45666"/>
+                  </a:lnTo>
+                  <a:lnTo>
+                    <a:pt x="1125511" y="48527"/>
+                  </a:lnTo>
+                  <a:lnTo>
+                    <a:pt x="1195856" y="51366"/>
+                  </a:lnTo>
+                  <a:lnTo>
+                    <a:pt x="1266200" y="54183"/>
+                  </a:lnTo>
+                  <a:lnTo>
+                    <a:pt x="1336545" y="56978"/>
+                  </a:lnTo>
+                  <a:lnTo>
+                    <a:pt x="1406889" y="59753"/>
+                  </a:lnTo>
+                  <a:lnTo>
+                    <a:pt x="1477234" y="62505"/>
+                  </a:lnTo>
+                  <a:lnTo>
+                    <a:pt x="1547578" y="65237"/>
+                  </a:lnTo>
+                  <a:lnTo>
+                    <a:pt x="1617923" y="67948"/>
+                  </a:lnTo>
+                  <a:lnTo>
+                    <a:pt x="1688267" y="70638"/>
+                  </a:lnTo>
+                  <a:lnTo>
+                    <a:pt x="1758612" y="73308"/>
+                  </a:lnTo>
+                  <a:lnTo>
+                    <a:pt x="1828956" y="75957"/>
+                  </a:lnTo>
+                  <a:lnTo>
+                    <a:pt x="1899301" y="78585"/>
+                  </a:lnTo>
+                  <a:lnTo>
+                    <a:pt x="1969645" y="81194"/>
+                  </a:lnTo>
+                  <a:lnTo>
+                    <a:pt x="2039990" y="83782"/>
+                  </a:lnTo>
+                  <a:lnTo>
+                    <a:pt x="2110334" y="86351"/>
+                  </a:lnTo>
+                  <a:lnTo>
+                    <a:pt x="2180679" y="88900"/>
+                  </a:lnTo>
+                  <a:lnTo>
+                    <a:pt x="2251023" y="91429"/>
+                  </a:lnTo>
+                  <a:lnTo>
+                    <a:pt x="2321368" y="93939"/>
+                  </a:lnTo>
+                  <a:lnTo>
+                    <a:pt x="2391712" y="96430"/>
+                  </a:lnTo>
+                  <a:lnTo>
+                    <a:pt x="2462057" y="98901"/>
+                  </a:lnTo>
+                  <a:lnTo>
+                    <a:pt x="2532401" y="101354"/>
+                  </a:lnTo>
+                  <a:lnTo>
+                    <a:pt x="2602746" y="103788"/>
+                  </a:lnTo>
+                  <a:lnTo>
+                    <a:pt x="2673090" y="106203"/>
+                  </a:lnTo>
+                  <a:lnTo>
+                    <a:pt x="2743435" y="108599"/>
+                  </a:lnTo>
+                  <a:lnTo>
+                    <a:pt x="2813779" y="110978"/>
+                  </a:lnTo>
+                  <a:lnTo>
+                    <a:pt x="2884124" y="113338"/>
+                  </a:lnTo>
+                  <a:lnTo>
+                    <a:pt x="2954468" y="115680"/>
+                  </a:lnTo>
+                  <a:lnTo>
+                    <a:pt x="3024813" y="118004"/>
+                  </a:lnTo>
+                  <a:lnTo>
+                    <a:pt x="3095157" y="120310"/>
+                  </a:lnTo>
+                  <a:lnTo>
+                    <a:pt x="3165502" y="122598"/>
+                  </a:lnTo>
+                  <a:lnTo>
+                    <a:pt x="3235846" y="124869"/>
+                  </a:lnTo>
+                  <a:lnTo>
+                    <a:pt x="3306191" y="127122"/>
+                  </a:lnTo>
+                  <a:lnTo>
+                    <a:pt x="3376535" y="129359"/>
+                  </a:lnTo>
+                  <a:lnTo>
+                    <a:pt x="3446880" y="131578"/>
+                  </a:lnTo>
+                  <a:lnTo>
+                    <a:pt x="3517224" y="133780"/>
+                  </a:lnTo>
+                  <a:lnTo>
+                    <a:pt x="3587569" y="135965"/>
+                  </a:lnTo>
+                  <a:lnTo>
+                    <a:pt x="3657913" y="138133"/>
+                  </a:lnTo>
+                  <a:lnTo>
+                    <a:pt x="3728257" y="140285"/>
+                  </a:lnTo>
+                  <a:lnTo>
+                    <a:pt x="3798602" y="142420"/>
+                  </a:lnTo>
+                  <a:lnTo>
+                    <a:pt x="3868946" y="144539"/>
+                  </a:lnTo>
+                  <a:lnTo>
+                    <a:pt x="3939291" y="146641"/>
+                  </a:lnTo>
+                  <a:lnTo>
+                    <a:pt x="4009635" y="148728"/>
+                  </a:lnTo>
+                  <a:lnTo>
+                    <a:pt x="4079980" y="150798"/>
+                  </a:lnTo>
+                  <a:lnTo>
+                    <a:pt x="4150324" y="152853"/>
+                  </a:lnTo>
+                  <a:lnTo>
+                    <a:pt x="4220669" y="154892"/>
+                  </a:lnTo>
+                  <a:lnTo>
+                    <a:pt x="4291013" y="156915"/>
+                  </a:lnTo>
+                  <a:lnTo>
+                    <a:pt x="4361358" y="158923"/>
+                  </a:lnTo>
+                  <a:lnTo>
+                    <a:pt x="4431702" y="160915"/>
+                  </a:lnTo>
+                  <a:lnTo>
+                    <a:pt x="4502047" y="162892"/>
+                  </a:lnTo>
+                  <a:lnTo>
+                    <a:pt x="4572391" y="164854"/>
+                  </a:lnTo>
+                  <a:lnTo>
+                    <a:pt x="4642736" y="166801"/>
+                  </a:lnTo>
+                  <a:lnTo>
+                    <a:pt x="4713080" y="168732"/>
+                  </a:lnTo>
+                  <a:lnTo>
+                    <a:pt x="4783425" y="170649"/>
+                  </a:lnTo>
+                  <a:lnTo>
+                    <a:pt x="4853769" y="172552"/>
+                  </a:lnTo>
+                  <a:lnTo>
+                    <a:pt x="4924114" y="174439"/>
+                  </a:lnTo>
+                  <a:lnTo>
+                    <a:pt x="4994458" y="176313"/>
+                  </a:lnTo>
+                  <a:lnTo>
+                    <a:pt x="5064803" y="178172"/>
+                  </a:lnTo>
+                  <a:lnTo>
+                    <a:pt x="5135147" y="180016"/>
+                  </a:lnTo>
+                  <a:lnTo>
+                    <a:pt x="5205492" y="181847"/>
+                  </a:lnTo>
+                  <a:lnTo>
+                    <a:pt x="5275836" y="183663"/>
+                  </a:lnTo>
+                  <a:lnTo>
+                    <a:pt x="5346181" y="185466"/>
+                  </a:lnTo>
+                  <a:lnTo>
+                    <a:pt x="5416525" y="187254"/>
+                  </a:lnTo>
+                  <a:lnTo>
+                    <a:pt x="5486870" y="189029"/>
+                  </a:lnTo>
+                  <a:lnTo>
+                    <a:pt x="5557214" y="190791"/>
+                  </a:lnTo>
+                  <a:lnTo>
+                    <a:pt x="5627559" y="192539"/>
+                  </a:lnTo>
+                  <a:lnTo>
+                    <a:pt x="5697903" y="194273"/>
+                  </a:lnTo>
+                  <a:lnTo>
+                    <a:pt x="5768248" y="195994"/>
+                  </a:lnTo>
+                  <a:lnTo>
+                    <a:pt x="5838592" y="197702"/>
+                  </a:lnTo>
+                  <a:lnTo>
+                    <a:pt x="5908937" y="199397"/>
+                  </a:lnTo>
+                  <a:lnTo>
+                    <a:pt x="5979281" y="201079"/>
+                  </a:lnTo>
+                  <a:lnTo>
+                    <a:pt x="6049626" y="202748"/>
+                  </a:lnTo>
+                  <a:lnTo>
+                    <a:pt x="6119970" y="204404"/>
+                  </a:lnTo>
+                  <a:lnTo>
+                    <a:pt x="6190315" y="206047"/>
+                  </a:lnTo>
+                  <a:lnTo>
+                    <a:pt x="6260659" y="207678"/>
+                  </a:lnTo>
+                  <a:lnTo>
+                    <a:pt x="6331004" y="209296"/>
+                  </a:lnTo>
+                  <a:lnTo>
+                    <a:pt x="6401348" y="210902"/>
+                  </a:lnTo>
+                  <a:lnTo>
+                    <a:pt x="6471693" y="212496"/>
+                  </a:lnTo>
+                  <a:lnTo>
+                    <a:pt x="6542037" y="214077"/>
+                  </a:lnTo>
+                  <a:lnTo>
+                    <a:pt x="6612382" y="215646"/>
+                  </a:lnTo>
+                  <a:lnTo>
+                    <a:pt x="6682726" y="217204"/>
+                  </a:lnTo>
+                  <a:lnTo>
+                    <a:pt x="6753071" y="218749"/>
+                  </a:lnTo>
+                  <a:lnTo>
+                    <a:pt x="6823415" y="220282"/>
+                  </a:lnTo>
+                  <a:lnTo>
+                    <a:pt x="6893760" y="221804"/>
+                  </a:lnTo>
+                  <a:lnTo>
+                    <a:pt x="6964104" y="223314"/>
+                  </a:lnTo>
+                </a:path>
+              </a:pathLst>
+            </a:custGeom>
+            <a:ln w="27101" cap="flat">
+              <a:solidFill>
+                <a:srgbClr val="FF8C00">
+                  <a:alpha val="100000"/>
+                </a:srgbClr>
+              </a:solidFill>
+              <a:prstDash val="solid"/>
+              <a:round/>
+            </a:ln>
+          </p:spPr>
+          <p:txBody>
+            <a:bodyPr/>
+            <a:lstStyle/>
+            <a:p/>
+          </p:txBody>
+        </p:sp>
+        <p:sp>
+          <p:nvSpPr>
+            <p:cNvPr id="75" name="pl75"/>
+            <p:cNvSpPr/>
+            <p:nvPr/>
+          </p:nvSpPr>
+          <p:spPr>
+            <a:xfrm>
+              <a:off x="887106" y="5294352"/>
+              <a:ext cx="7660515" cy="0"/>
+            </a:xfrm>
+            <a:custGeom>
+              <a:avLst/>
+              <a:pathLst>
+                <a:path w="7660515" h="0">
+                  <a:moveTo>
+                    <a:pt x="0" y="0"/>
+                  </a:moveTo>
+                  <a:lnTo>
+                    <a:pt x="7660515" y="0"/>
+                  </a:lnTo>
+                  <a:lnTo>
+                    <a:pt x="7660515" y="0"/>
+                  </a:lnTo>
+                </a:path>
+              </a:pathLst>
+            </a:custGeom>
+            <a:ln w="13550" cap="flat">
+              <a:solidFill>
+                <a:srgbClr val="7F7F7F">
+                  <a:alpha val="100000"/>
+                </a:srgbClr>
+              </a:solidFill>
+              <a:prstDash val="dash"/>
+              <a:round/>
+            </a:ln>
+          </p:spPr>
+          <p:txBody>
+            <a:bodyPr/>
+            <a:lstStyle/>
+            <a:p/>
+          </p:txBody>
+        </p:sp>
+        <p:sp>
+          <p:nvSpPr>
+            <p:cNvPr id="76" name="pl76"/>
+            <p:cNvSpPr/>
+            <p:nvPr/>
+          </p:nvSpPr>
+          <p:spPr>
+            <a:xfrm>
+              <a:off x="4300713" y="4336484"/>
+              <a:ext cx="0" cy="1317069"/>
+            </a:xfrm>
+            <a:custGeom>
+              <a:avLst/>
+              <a:pathLst>
+                <a:path w="0" h="1317069">
+                  <a:moveTo>
+                    <a:pt x="0" y="1317069"/>
+                  </a:moveTo>
+                  <a:lnTo>
+                    <a:pt x="0" y="0"/>
+                  </a:lnTo>
+                  <a:lnTo>
+                    <a:pt x="0" y="0"/>
+                  </a:lnTo>
+                </a:path>
+              </a:pathLst>
+            </a:custGeom>
+            <a:ln w="13550" cap="flat">
+              <a:solidFill>
+                <a:srgbClr val="666666">
+                  <a:alpha val="100000"/>
+                </a:srgbClr>
+              </a:solidFill>
+              <a:prstDash val="dot"/>
+              <a:round/>
+            </a:ln>
+          </p:spPr>
+          <p:txBody>
+            <a:bodyPr/>
+            <a:lstStyle/>
+            <a:p/>
+          </p:txBody>
+        </p:sp>
+        <p:sp>
+          <p:nvSpPr>
+            <p:cNvPr id="77" name="pl77"/>
+            <p:cNvSpPr/>
+            <p:nvPr/>
+          </p:nvSpPr>
+          <p:spPr>
+            <a:xfrm>
+              <a:off x="3103710" y="4336484"/>
+              <a:ext cx="0" cy="1317069"/>
+            </a:xfrm>
+            <a:custGeom>
+              <a:avLst/>
+              <a:pathLst>
+                <a:path w="0" h="1317069">
+                  <a:moveTo>
+                    <a:pt x="0" y="1317069"/>
+                  </a:moveTo>
+                  <a:lnTo>
+                    <a:pt x="0" y="0"/>
+                  </a:lnTo>
+                  <a:lnTo>
+                    <a:pt x="0" y="0"/>
+                  </a:lnTo>
+                </a:path>
+              </a:pathLst>
+            </a:custGeom>
+            <a:ln w="13550" cap="flat">
+              <a:solidFill>
+                <a:srgbClr val="4682B4">
+                  <a:alpha val="69803"/>
+                </a:srgbClr>
+              </a:solidFill>
+              <a:prstDash val="dash"/>
+              <a:round/>
+            </a:ln>
+          </p:spPr>
+          <p:txBody>
+            <a:bodyPr/>
+            <a:lstStyle/>
+            <a:p/>
+          </p:txBody>
+        </p:sp>
+        <p:sp>
+          <p:nvSpPr>
+            <p:cNvPr id="78" name="pl78"/>
+            <p:cNvSpPr/>
+            <p:nvPr/>
+          </p:nvSpPr>
+          <p:spPr>
+            <a:xfrm>
+              <a:off x="5504283" y="4336484"/>
+              <a:ext cx="0" cy="1317069"/>
+            </a:xfrm>
+            <a:custGeom>
+              <a:avLst/>
+              <a:pathLst>
+                <a:path w="0" h="1317069">
+                  <a:moveTo>
+                    <a:pt x="0" y="1317069"/>
+                  </a:moveTo>
+                  <a:lnTo>
+                    <a:pt x="0" y="0"/>
+                  </a:lnTo>
+                  <a:lnTo>
+                    <a:pt x="0" y="0"/>
+                  </a:lnTo>
+                </a:path>
+              </a:pathLst>
+            </a:custGeom>
+            <a:ln w="13550" cap="flat">
+              <a:solidFill>
+                <a:srgbClr val="4682B4">
+                  <a:alpha val="69803"/>
+                </a:srgbClr>
+              </a:solidFill>
+              <a:prstDash val="dash"/>
+              <a:round/>
+            </a:ln>
+          </p:spPr>
+          <p:txBody>
+            <a:bodyPr/>
+            <a:lstStyle/>
+            <a:p/>
+          </p:txBody>
+        </p:sp>
+        <p:sp>
+          <p:nvSpPr>
+            <p:cNvPr id="79" name="tx79"/>
+            <p:cNvSpPr/>
+            <p:nvPr/>
+          </p:nvSpPr>
+          <p:spPr>
+            <a:xfrm>
+              <a:off x="762297" y="5553636"/>
+              <a:ext cx="62179" cy="80101"/>
+            </a:xfrm>
+            <a:prstGeom prst="rect">
+              <a:avLst/>
+            </a:prstGeom>
+            <a:noFill/>
+          </p:spPr>
+          <p:txBody>
+            <a:bodyPr lIns="0" rIns="0" tIns="0" bIns="0" anchorCtr="1" anchor="ctr" wrap="none"/>
+            <a:lstStyle/>
+            <a:p>
+              <a:pPr algn="l" marL="0" marR="0" indent="0">
+                <a:lnSpc>
+                  <a:spcPts val="880"/>
+                </a:lnSpc>
+                <a:spcBef>
+                  <a:spcPts val="0"/>
+                </a:spcBef>
+                <a:spcAft>
+                  <a:spcPts val="0"/>
+                </a:spcAft>
+              </a:pPr>
+              <a:r>
+                <a:rPr sz="880">
+                  <a:solidFill>
+                    <a:srgbClr val="4D4D4D">
+                      <a:alpha val="100000"/>
+                    </a:srgbClr>
+                  </a:solidFill>
+                  <a:latin typeface="Helvetica"/>
+                  <a:cs typeface="Helvetica"/>
+                </a:rPr>
+                <a:t>0</a:t>
+              </a:r>
+            </a:p>
+          </p:txBody>
+        </p:sp>
+        <p:sp>
+          <p:nvSpPr>
+            <p:cNvPr id="80" name="tx80"/>
+            <p:cNvSpPr/>
+            <p:nvPr/>
+          </p:nvSpPr>
+          <p:spPr>
+            <a:xfrm>
+              <a:off x="762297" y="5254302"/>
+              <a:ext cx="62179" cy="80101"/>
+            </a:xfrm>
+            <a:prstGeom prst="rect">
+              <a:avLst/>
+            </a:prstGeom>
+            <a:noFill/>
+          </p:spPr>
+          <p:txBody>
+            <a:bodyPr lIns="0" rIns="0" tIns="0" bIns="0" anchorCtr="1" anchor="ctr" wrap="none"/>
+            <a:lstStyle/>
+            <a:p>
+              <a:pPr algn="l" marL="0" marR="0" indent="0">
+                <a:lnSpc>
+                  <a:spcPts val="880"/>
+                </a:lnSpc>
+                <a:spcBef>
+                  <a:spcPts val="0"/>
+                </a:spcBef>
+                <a:spcAft>
+                  <a:spcPts val="0"/>
+                </a:spcAft>
+              </a:pPr>
+              <a:r>
+                <a:rPr sz="880">
+                  <a:solidFill>
+                    <a:srgbClr val="4D4D4D">
+                      <a:alpha val="100000"/>
+                    </a:srgbClr>
+                  </a:solidFill>
+                  <a:latin typeface="Helvetica"/>
+                  <a:cs typeface="Helvetica"/>
+                </a:rPr>
+                <a:t>1</a:t>
+              </a:r>
+            </a:p>
+          </p:txBody>
+        </p:sp>
+        <p:sp>
+          <p:nvSpPr>
+            <p:cNvPr id="81" name="tx81"/>
+            <p:cNvSpPr/>
+            <p:nvPr/>
+          </p:nvSpPr>
+          <p:spPr>
+            <a:xfrm>
+              <a:off x="762297" y="4954968"/>
+              <a:ext cx="62179" cy="80101"/>
+            </a:xfrm>
+            <a:prstGeom prst="rect">
+              <a:avLst/>
+            </a:prstGeom>
+            <a:noFill/>
+          </p:spPr>
+          <p:txBody>
+            <a:bodyPr lIns="0" rIns="0" tIns="0" bIns="0" anchorCtr="1" anchor="ctr" wrap="none"/>
+            <a:lstStyle/>
+            <a:p>
+              <a:pPr algn="l" marL="0" marR="0" indent="0">
+                <a:lnSpc>
+                  <a:spcPts val="880"/>
+                </a:lnSpc>
+                <a:spcBef>
+                  <a:spcPts val="0"/>
+                </a:spcBef>
+                <a:spcAft>
+                  <a:spcPts val="0"/>
+                </a:spcAft>
+              </a:pPr>
+              <a:r>
+                <a:rPr sz="880">
+                  <a:solidFill>
+                    <a:srgbClr val="4D4D4D">
+                      <a:alpha val="100000"/>
+                    </a:srgbClr>
+                  </a:solidFill>
+                  <a:latin typeface="Helvetica"/>
+                  <a:cs typeface="Helvetica"/>
+                </a:rPr>
+                <a:t>2</a:t>
+              </a:r>
+            </a:p>
+          </p:txBody>
+        </p:sp>
+        <p:sp>
+          <p:nvSpPr>
+            <p:cNvPr id="82" name="tx82"/>
+            <p:cNvSpPr/>
+            <p:nvPr/>
+          </p:nvSpPr>
+          <p:spPr>
+            <a:xfrm>
+              <a:off x="762297" y="4655634"/>
+              <a:ext cx="62179" cy="80101"/>
+            </a:xfrm>
+            <a:prstGeom prst="rect">
+              <a:avLst/>
+            </a:prstGeom>
+            <a:noFill/>
+          </p:spPr>
+          <p:txBody>
+            <a:bodyPr lIns="0" rIns="0" tIns="0" bIns="0" anchorCtr="1" anchor="ctr" wrap="none"/>
+            <a:lstStyle/>
+            <a:p>
+              <a:pPr algn="l" marL="0" marR="0" indent="0">
+                <a:lnSpc>
+                  <a:spcPts val="880"/>
+                </a:lnSpc>
+                <a:spcBef>
+                  <a:spcPts val="0"/>
+                </a:spcBef>
+                <a:spcAft>
+                  <a:spcPts val="0"/>
+                </a:spcAft>
+              </a:pPr>
+              <a:r>
+                <a:rPr sz="880">
+                  <a:solidFill>
+                    <a:srgbClr val="4D4D4D">
+                      <a:alpha val="100000"/>
+                    </a:srgbClr>
+                  </a:solidFill>
+                  <a:latin typeface="Helvetica"/>
+                  <a:cs typeface="Helvetica"/>
+                </a:rPr>
+                <a:t>3</a:t>
+              </a:r>
+            </a:p>
+          </p:txBody>
+        </p:sp>
+        <p:sp>
+          <p:nvSpPr>
+            <p:cNvPr id="83" name="tx83"/>
+            <p:cNvSpPr/>
+            <p:nvPr/>
+          </p:nvSpPr>
+          <p:spPr>
+            <a:xfrm>
+              <a:off x="762297" y="4356300"/>
+              <a:ext cx="62179" cy="80101"/>
+            </a:xfrm>
+            <a:prstGeom prst="rect">
+              <a:avLst/>
+            </a:prstGeom>
+            <a:noFill/>
+          </p:spPr>
+          <p:txBody>
+            <a:bodyPr lIns="0" rIns="0" tIns="0" bIns="0" anchorCtr="1" anchor="ctr" wrap="none"/>
+            <a:lstStyle/>
+            <a:p>
+              <a:pPr algn="l" marL="0" marR="0" indent="0">
+                <a:lnSpc>
+                  <a:spcPts val="880"/>
+                </a:lnSpc>
+                <a:spcBef>
+                  <a:spcPts val="0"/>
+                </a:spcBef>
+                <a:spcAft>
+                  <a:spcPts val="0"/>
+                </a:spcAft>
+              </a:pPr>
+              <a:r>
+                <a:rPr sz="880">
+                  <a:solidFill>
+                    <a:srgbClr val="4D4D4D">
+                      <a:alpha val="100000"/>
+                    </a:srgbClr>
+                  </a:solidFill>
+                  <a:latin typeface="Helvetica"/>
+                  <a:cs typeface="Helvetica"/>
+                </a:rPr>
+                <a:t>4</a:t>
+              </a:r>
+            </a:p>
+          </p:txBody>
+        </p:sp>
+        <p:sp>
+          <p:nvSpPr>
+            <p:cNvPr id="84" name="tx84"/>
+            <p:cNvSpPr/>
+            <p:nvPr/>
+          </p:nvSpPr>
+          <p:spPr>
+            <a:xfrm>
+              <a:off x="1324230" y="5716183"/>
+              <a:ext cx="161574" cy="80101"/>
+            </a:xfrm>
+            <a:prstGeom prst="rect">
+              <a:avLst/>
+            </a:prstGeom>
+            <a:noFill/>
+          </p:spPr>
+          <p:txBody>
+            <a:bodyPr lIns="0" rIns="0" tIns="0" bIns="0" anchorCtr="1" anchor="ctr" wrap="none"/>
+            <a:lstStyle/>
+            <a:p>
+              <a:pPr algn="l" marL="0" marR="0" indent="0">
+                <a:lnSpc>
+                  <a:spcPts val="880"/>
+                </a:lnSpc>
+                <a:spcBef>
+                  <a:spcPts val="0"/>
+                </a:spcBef>
+                <a:spcAft>
+                  <a:spcPts val="0"/>
+                </a:spcAft>
+              </a:pPr>
+              <a:r>
+                <a:rPr sz="880">
+                  <a:solidFill>
+                    <a:srgbClr val="4D4D4D">
+                      <a:alpha val="100000"/>
+                    </a:srgbClr>
+                  </a:solidFill>
+                  <a:latin typeface="Helvetica"/>
+                  <a:cs typeface="Helvetica"/>
+                </a:rPr>
+                <a:t>-50</a:t>
+              </a:r>
+            </a:p>
+          </p:txBody>
+        </p:sp>
+        <p:sp>
+          <p:nvSpPr>
+            <p:cNvPr id="85" name="tx85"/>
+            <p:cNvSpPr/>
+            <p:nvPr/>
+          </p:nvSpPr>
+          <p:spPr>
+            <a:xfrm>
+              <a:off x="2179256" y="5716183"/>
+              <a:ext cx="161574" cy="80101"/>
+            </a:xfrm>
+            <a:prstGeom prst="rect">
+              <a:avLst/>
+            </a:prstGeom>
+            <a:noFill/>
+          </p:spPr>
+          <p:txBody>
+            <a:bodyPr lIns="0" rIns="0" tIns="0" bIns="0" anchorCtr="1" anchor="ctr" wrap="none"/>
+            <a:lstStyle/>
+            <a:p>
+              <a:pPr algn="l" marL="0" marR="0" indent="0">
+                <a:lnSpc>
+                  <a:spcPts val="880"/>
+                </a:lnSpc>
+                <a:spcBef>
+                  <a:spcPts val="0"/>
+                </a:spcBef>
+                <a:spcAft>
+                  <a:spcPts val="0"/>
+                </a:spcAft>
+              </a:pPr>
+              <a:r>
+                <a:rPr sz="880">
+                  <a:solidFill>
+                    <a:srgbClr val="4D4D4D">
+                      <a:alpha val="100000"/>
+                    </a:srgbClr>
+                  </a:solidFill>
+                  <a:latin typeface="Helvetica"/>
+                  <a:cs typeface="Helvetica"/>
+                </a:rPr>
+                <a:t>-40</a:t>
+              </a:r>
+            </a:p>
+          </p:txBody>
+        </p:sp>
+        <p:sp>
+          <p:nvSpPr>
+            <p:cNvPr id="86" name="tx86"/>
+            <p:cNvSpPr/>
+            <p:nvPr/>
+          </p:nvSpPr>
+          <p:spPr>
+            <a:xfrm>
+              <a:off x="3034282" y="5716183"/>
+              <a:ext cx="161574" cy="80101"/>
+            </a:xfrm>
+            <a:prstGeom prst="rect">
+              <a:avLst/>
+            </a:prstGeom>
+            <a:noFill/>
+          </p:spPr>
+          <p:txBody>
+            <a:bodyPr lIns="0" rIns="0" tIns="0" bIns="0" anchorCtr="1" anchor="ctr" wrap="none"/>
+            <a:lstStyle/>
+            <a:p>
+              <a:pPr algn="l" marL="0" marR="0" indent="0">
+                <a:lnSpc>
+                  <a:spcPts val="880"/>
+                </a:lnSpc>
+                <a:spcBef>
+                  <a:spcPts val="0"/>
+                </a:spcBef>
+                <a:spcAft>
+                  <a:spcPts val="0"/>
+                </a:spcAft>
+              </a:pPr>
+              <a:r>
+                <a:rPr sz="880">
+                  <a:solidFill>
+                    <a:srgbClr val="4D4D4D">
+                      <a:alpha val="100000"/>
+                    </a:srgbClr>
+                  </a:solidFill>
+                  <a:latin typeface="Helvetica"/>
+                  <a:cs typeface="Helvetica"/>
+                </a:rPr>
+                <a:t>-30</a:t>
+              </a:r>
+            </a:p>
+          </p:txBody>
+        </p:sp>
+        <p:sp>
+          <p:nvSpPr>
+            <p:cNvPr id="87" name="tx87"/>
+            <p:cNvSpPr/>
+            <p:nvPr/>
+          </p:nvSpPr>
+          <p:spPr>
+            <a:xfrm>
+              <a:off x="3889308" y="5716183"/>
+              <a:ext cx="161574" cy="80101"/>
+            </a:xfrm>
+            <a:prstGeom prst="rect">
+              <a:avLst/>
+            </a:prstGeom>
+            <a:noFill/>
+          </p:spPr>
+          <p:txBody>
+            <a:bodyPr lIns="0" rIns="0" tIns="0" bIns="0" anchorCtr="1" anchor="ctr" wrap="none"/>
+            <a:lstStyle/>
+            <a:p>
+              <a:pPr algn="l" marL="0" marR="0" indent="0">
+                <a:lnSpc>
+                  <a:spcPts val="880"/>
+                </a:lnSpc>
+                <a:spcBef>
+                  <a:spcPts val="0"/>
+                </a:spcBef>
+                <a:spcAft>
+                  <a:spcPts val="0"/>
+                </a:spcAft>
+              </a:pPr>
+              <a:r>
+                <a:rPr sz="880">
+                  <a:solidFill>
+                    <a:srgbClr val="4D4D4D">
+                      <a:alpha val="100000"/>
+                    </a:srgbClr>
+                  </a:solidFill>
+                  <a:latin typeface="Helvetica"/>
+                  <a:cs typeface="Helvetica"/>
+                </a:rPr>
+                <a:t>-20</a:t>
+              </a:r>
+            </a:p>
+          </p:txBody>
+        </p:sp>
+        <p:sp>
+          <p:nvSpPr>
+            <p:cNvPr id="88" name="tx88"/>
+            <p:cNvSpPr/>
+            <p:nvPr/>
+          </p:nvSpPr>
+          <p:spPr>
+            <a:xfrm>
+              <a:off x="4744334" y="5716183"/>
+              <a:ext cx="161574" cy="80101"/>
+            </a:xfrm>
+            <a:prstGeom prst="rect">
+              <a:avLst/>
+            </a:prstGeom>
+            <a:noFill/>
+          </p:spPr>
+          <p:txBody>
+            <a:bodyPr lIns="0" rIns="0" tIns="0" bIns="0" anchorCtr="1" anchor="ctr" wrap="none"/>
+            <a:lstStyle/>
+            <a:p>
+              <a:pPr algn="l" marL="0" marR="0" indent="0">
+                <a:lnSpc>
+                  <a:spcPts val="880"/>
+                </a:lnSpc>
+                <a:spcBef>
+                  <a:spcPts val="0"/>
+                </a:spcBef>
+                <a:spcAft>
+                  <a:spcPts val="0"/>
+                </a:spcAft>
+              </a:pPr>
+              <a:r>
+                <a:rPr sz="880">
+                  <a:solidFill>
+                    <a:srgbClr val="4D4D4D">
+                      <a:alpha val="100000"/>
+                    </a:srgbClr>
+                  </a:solidFill>
+                  <a:latin typeface="Helvetica"/>
+                  <a:cs typeface="Helvetica"/>
+                </a:rPr>
+                <a:t>-10</a:t>
+              </a:r>
+            </a:p>
+          </p:txBody>
+        </p:sp>
+        <p:sp>
+          <p:nvSpPr>
+            <p:cNvPr id="89" name="tx89"/>
+            <p:cNvSpPr/>
+            <p:nvPr/>
+          </p:nvSpPr>
+          <p:spPr>
+            <a:xfrm>
+              <a:off x="5649057" y="5716183"/>
+              <a:ext cx="62179" cy="80101"/>
+            </a:xfrm>
+            <a:prstGeom prst="rect">
+              <a:avLst/>
+            </a:prstGeom>
+            <a:noFill/>
+          </p:spPr>
+          <p:txBody>
+            <a:bodyPr lIns="0" rIns="0" tIns="0" bIns="0" anchorCtr="1" anchor="ctr" wrap="none"/>
+            <a:lstStyle/>
+            <a:p>
+              <a:pPr algn="l" marL="0" marR="0" indent="0">
+                <a:lnSpc>
+                  <a:spcPts val="880"/>
+                </a:lnSpc>
+                <a:spcBef>
+                  <a:spcPts val="0"/>
+                </a:spcBef>
+                <a:spcAft>
+                  <a:spcPts val="0"/>
+                </a:spcAft>
+              </a:pPr>
+              <a:r>
+                <a:rPr sz="880">
+                  <a:solidFill>
+                    <a:srgbClr val="4D4D4D">
+                      <a:alpha val="100000"/>
+                    </a:srgbClr>
+                  </a:solidFill>
+                  <a:latin typeface="Helvetica"/>
+                  <a:cs typeface="Helvetica"/>
+                </a:rPr>
+                <a:t>0</a:t>
+              </a:r>
+            </a:p>
+          </p:txBody>
+        </p:sp>
+        <p:sp>
+          <p:nvSpPr>
+            <p:cNvPr id="90" name="tx90"/>
+            <p:cNvSpPr/>
+            <p:nvPr/>
+          </p:nvSpPr>
+          <p:spPr>
+            <a:xfrm>
+              <a:off x="6472994" y="5716183"/>
+              <a:ext cx="124358" cy="80101"/>
+            </a:xfrm>
+            <a:prstGeom prst="rect">
+              <a:avLst/>
+            </a:prstGeom>
+            <a:noFill/>
+          </p:spPr>
+          <p:txBody>
+            <a:bodyPr lIns="0" rIns="0" tIns="0" bIns="0" anchorCtr="1" anchor="ctr" wrap="none"/>
+            <a:lstStyle/>
+            <a:p>
+              <a:pPr algn="l" marL="0" marR="0" indent="0">
+                <a:lnSpc>
+                  <a:spcPts val="880"/>
+                </a:lnSpc>
+                <a:spcBef>
+                  <a:spcPts val="0"/>
+                </a:spcBef>
+                <a:spcAft>
+                  <a:spcPts val="0"/>
+                </a:spcAft>
+              </a:pPr>
+              <a:r>
+                <a:rPr sz="880">
+                  <a:solidFill>
+                    <a:srgbClr val="4D4D4D">
+                      <a:alpha val="100000"/>
+                    </a:srgbClr>
+                  </a:solidFill>
+                  <a:latin typeface="Helvetica"/>
+                  <a:cs typeface="Helvetica"/>
+                </a:rPr>
+                <a:t>10</a:t>
+              </a:r>
+            </a:p>
+          </p:txBody>
+        </p:sp>
+        <p:sp>
+          <p:nvSpPr>
+            <p:cNvPr id="91" name="tx91"/>
+            <p:cNvSpPr/>
+            <p:nvPr/>
+          </p:nvSpPr>
+          <p:spPr>
+            <a:xfrm>
+              <a:off x="7328020" y="5716183"/>
+              <a:ext cx="124358" cy="80101"/>
+            </a:xfrm>
+            <a:prstGeom prst="rect">
+              <a:avLst/>
+            </a:prstGeom>
+            <a:noFill/>
+          </p:spPr>
+          <p:txBody>
+            <a:bodyPr lIns="0" rIns="0" tIns="0" bIns="0" anchorCtr="1" anchor="ctr" wrap="none"/>
+            <a:lstStyle/>
+            <a:p>
+              <a:pPr algn="l" marL="0" marR="0" indent="0">
+                <a:lnSpc>
+                  <a:spcPts val="880"/>
+                </a:lnSpc>
+                <a:spcBef>
+                  <a:spcPts val="0"/>
+                </a:spcBef>
+                <a:spcAft>
+                  <a:spcPts val="0"/>
+                </a:spcAft>
+              </a:pPr>
+              <a:r>
+                <a:rPr sz="880">
+                  <a:solidFill>
+                    <a:srgbClr val="4D4D4D">
+                      <a:alpha val="100000"/>
+                    </a:srgbClr>
+                  </a:solidFill>
+                  <a:latin typeface="Helvetica"/>
+                  <a:cs typeface="Helvetica"/>
+                </a:rPr>
+                <a:t>20</a:t>
+              </a:r>
+            </a:p>
+          </p:txBody>
+        </p:sp>
+        <p:sp>
+          <p:nvSpPr>
+            <p:cNvPr id="92" name="tx92"/>
+            <p:cNvSpPr/>
+            <p:nvPr/>
+          </p:nvSpPr>
+          <p:spPr>
+            <a:xfrm>
+              <a:off x="8183046" y="5716183"/>
+              <a:ext cx="124358" cy="80101"/>
+            </a:xfrm>
+            <a:prstGeom prst="rect">
+              <a:avLst/>
+            </a:prstGeom>
+            <a:noFill/>
+          </p:spPr>
+          <p:txBody>
+            <a:bodyPr lIns="0" rIns="0" tIns="0" bIns="0" anchorCtr="1" anchor="ctr" wrap="none"/>
+            <a:lstStyle/>
+            <a:p>
+              <a:pPr algn="l" marL="0" marR="0" indent="0">
+                <a:lnSpc>
+                  <a:spcPts val="880"/>
+                </a:lnSpc>
+                <a:spcBef>
+                  <a:spcPts val="0"/>
+                </a:spcBef>
+                <a:spcAft>
+                  <a:spcPts val="0"/>
+                </a:spcAft>
+              </a:pPr>
+              <a:r>
+                <a:rPr sz="880">
+                  <a:solidFill>
+                    <a:srgbClr val="4D4D4D">
+                      <a:alpha val="100000"/>
+                    </a:srgbClr>
+                  </a:solidFill>
+                  <a:latin typeface="Helvetica"/>
+                  <a:cs typeface="Helvetica"/>
+                </a:rPr>
+                <a:t>30</a:t>
+              </a:r>
+            </a:p>
+          </p:txBody>
+        </p:sp>
+        <p:sp>
+          <p:nvSpPr>
+            <p:cNvPr id="93" name="tx93"/>
+            <p:cNvSpPr/>
+            <p:nvPr/>
+          </p:nvSpPr>
+          <p:spPr>
+            <a:xfrm>
+              <a:off x="1561815" y="5855859"/>
+              <a:ext cx="6311097" cy="100218"/>
+            </a:xfrm>
+            <a:prstGeom prst="rect">
+              <a:avLst/>
+            </a:prstGeom>
+            <a:noFill/>
+          </p:spPr>
+          <p:txBody>
+            <a:bodyPr lIns="0" rIns="0" tIns="0" bIns="0" anchorCtr="1" anchor="ctr" wrap="none"/>
+            <a:lstStyle/>
+            <a:p>
+              <a:pPr algn="l" marL="0" marR="0" indent="0">
+                <a:lnSpc>
+                  <a:spcPts val="1100"/>
+                </a:lnSpc>
+                <a:spcBef>
+                  <a:spcPts val="0"/>
+                </a:spcBef>
+                <a:spcAft>
+                  <a:spcPts val="0"/>
+                </a:spcAft>
+              </a:pPr>
+              <a:r>
+                <a:rPr sz="1100">
+                  <a:solidFill>
+                    <a:srgbClr val="000000">
+                      <a:alpha val="100000"/>
+                    </a:srgbClr>
+                  </a:solidFill>
+                  <a:latin typeface="Helvetica"/>
+                  <a:cs typeface="Helvetica"/>
+                </a:rPr>
+                <a:t>Sensitivity eGFR Difference (%): 100 × (CKD-EPI 2012 CysC − CKD-EPI 2021 Cr) / CKD-EPI 2021 Cr</a:t>
+              </a:r>
+            </a:p>
+          </p:txBody>
+        </p:sp>
+        <p:sp>
+          <p:nvSpPr>
+            <p:cNvPr id="94" name="tx94"/>
+            <p:cNvSpPr/>
+            <p:nvPr/>
+          </p:nvSpPr>
+          <p:spPr>
+            <a:xfrm rot="-5400000">
+              <a:off x="138035" y="4944909"/>
+              <a:ext cx="1016904" cy="100218"/>
+            </a:xfrm>
+            <a:prstGeom prst="rect">
+              <a:avLst/>
+            </a:prstGeom>
+            <a:noFill/>
+          </p:spPr>
+          <p:txBody>
+            <a:bodyPr lIns="0" rIns="0" tIns="0" bIns="0" anchorCtr="1" anchor="ctr" wrap="none"/>
+            <a:lstStyle/>
+            <a:p>
+              <a:pPr algn="l" marL="0" marR="0" indent="0">
+                <a:lnSpc>
+                  <a:spcPts val="1100"/>
+                </a:lnSpc>
+                <a:spcBef>
+                  <a:spcPts val="0"/>
+                </a:spcBef>
+                <a:spcAft>
+                  <a:spcPts val="0"/>
+                </a:spcAft>
+              </a:pPr>
+              <a:r>
+                <a:rPr sz="1100">
+                  <a:solidFill>
+                    <a:srgbClr val="000000">
+                      <a:alpha val="100000"/>
+                    </a:srgbClr>
+                  </a:solidFill>
+                  <a:latin typeface="Helvetica"/>
+                  <a:cs typeface="Helvetica"/>
+                </a:rPr>
+                <a:t>subHR (95% CI)</a:t>
+              </a:r>
+            </a:p>
+          </p:txBody>
+        </p:sp>
+        <p:sp>
+          <p:nvSpPr>
+            <p:cNvPr id="95" name="tx95"/>
+            <p:cNvSpPr/>
+            <p:nvPr/>
+          </p:nvSpPr>
+          <p:spPr>
+            <a:xfrm>
+              <a:off x="887106" y="4159544"/>
+              <a:ext cx="6959864" cy="82021"/>
+            </a:xfrm>
+            <a:prstGeom prst="rect">
+              <a:avLst/>
+            </a:prstGeom>
+            <a:noFill/>
+          </p:spPr>
+          <p:txBody>
+            <a:bodyPr lIns="0" rIns="0" tIns="0" bIns="0" anchorCtr="1" anchor="ctr" wrap="none"/>
+            <a:lstStyle/>
+            <a:p>
+              <a:pPr algn="l" marL="0" marR="0" indent="0">
+                <a:lnSpc>
+                  <a:spcPts val="900"/>
+                </a:lnSpc>
+                <a:spcBef>
+                  <a:spcPts val="0"/>
+                </a:spcBef>
+                <a:spcAft>
+                  <a:spcPts val="0"/>
+                </a:spcAft>
+              </a:pPr>
+              <a:r>
+                <a:rPr sz="900">
+                  <a:solidFill>
+                    <a:srgbClr val="404040">
+                      <a:alpha val="100000"/>
+                    </a:srgbClr>
+                  </a:solidFill>
+                  <a:latin typeface="Helvetica"/>
+                  <a:cs typeface="Helvetica"/>
+                </a:rPr>
+                <a:t>subHR per 10 % decline: 1.10 (1.01-1.19), p_Bonf = 0.169 (n = 6)  |  per IQR decline (Δ = 28.1 %): 1.30 (1.03-1.64)  |  IQR: [-30.1, -2.1] %</a:t>
+              </a:r>
+            </a:p>
+          </p:txBody>
+        </p:sp>
+        <p:sp>
+          <p:nvSpPr>
+            <p:cNvPr id="96" name="tx96"/>
+            <p:cNvSpPr/>
+            <p:nvPr/>
+          </p:nvSpPr>
+          <p:spPr>
+            <a:xfrm>
+              <a:off x="887106" y="3932770"/>
               <a:ext cx="3760378" cy="120152"/>
             </a:xfrm>
             <a:prstGeom prst="rect">
